--- a/docs/presentations/llm-wiki-user-guide.pptx
+++ b/docs/presentations/llm-wiki-user-guide.pptx
@@ -5,7 +5,7 @@
     <p:sldMasterId id="2147483648" r:id="rId1"/>
   </p:sldMasterIdLst>
   <p:notesMasterIdLst>
-    <p:notesMasterId r:id="rId31"/>
+    <p:notesMasterId r:id="rId32"/>
   </p:notesMasterIdLst>
   <p:sldIdLst>
     <p:sldId id="256" r:id="rId2"/>
@@ -37,6 +37,7 @@
     <p:sldId id="282" r:id="rId28"/>
     <p:sldId id="283" r:id="rId29"/>
     <p:sldId id="284" r:id="rId30"/>
+    <p:sldId id="285" r:id="rId31"/>
   </p:sldIdLst>
   <p:sldSz cx="12192000" cy="6858000"/>
   <p:notesSz cx="6858000" cy="9144000"/>
@@ -533,7 +534,7 @@
           <a:p>
             <a:r>
               <a:rPr lang="en-US" dirty="0"/>
-              <a:t>Section three: PDF and DOCX. A dedicated parser model converts them; the original is kept and referenced.</a:t>
+              <a:t>Section three: documents. A dedicated parser model converts PDF, Word, PowerPoint and images; spreadsheets are converted locally. The original is kept and referenced.</a:t>
             </a:r>
           </a:p>
         </p:txBody>
@@ -710,7 +711,7 @@
           <a:p>
             <a:r>
               <a:rPr lang="en-US" dirty="0"/>
-              <a:t>Section four: working with agents. The schema makes Claude Code the maintainer; the MCP server gives it the tools.</a:t>
+              <a:t>New in 0.4. PowerPoint slides are read locally and sent with their pictures to the parser model. Spreadsheets never go to a model: every value stays exact. Images go to a vision model that transcribes and describes them.</a:t>
             </a:r>
           </a:p>
         </p:txBody>
@@ -769,7 +770,7 @@
           <a:p>
             <a:r>
               <a:rPr lang="en-US" dirty="0"/>
-              <a:t>Open the wiki root in Claude Code or Codex. The CLAUDE.md / AGENTS.md written by init is the contract: layout, page format, link rules, and the three workflows. Co-evolve it with the agent as your domain settles.</a:t>
+              <a:t>Section four: working with agents. The schema makes Claude Code the maintainer; the MCP server gives it the tools.</a:t>
             </a:r>
           </a:p>
         </p:txBody>
@@ -887,7 +888,7 @@
           <a:p>
             <a:r>
               <a:rPr lang="en-US" dirty="0"/>
-              <a:t>Register the MCP server once and the agent gets native tools for every registered wiki: each tool takes a wiki argument. Writing through wiki_write_page keeps index and search index current, in either format.</a:t>
+              <a:t>Open the wiki root in Claude Code or Codex. The CLAUDE.md / AGENTS.md written by init is the contract: layout, page format, link rules, and the three workflows. Co-evolve it with the agent as your domain settles.</a:t>
             </a:r>
           </a:p>
         </p:txBody>
@@ -946,7 +947,7 @@
           <a:p>
             <a:r>
               <a:rPr lang="en-US" dirty="0"/>
-              <a:t>If you ever write a page by hand, this is the shape. Frontmatter drives the index; wikilinks drive the graph and the lint.</a:t>
+              <a:t>Register the MCP server once and the agent gets native tools for every registered wiki: each tool takes a wiki argument. Writing through wiki_write_page keeps index and search index current, in either format.</a:t>
             </a:r>
           </a:p>
         </p:txBody>
@@ -1005,7 +1006,7 @@
           <a:p>
             <a:r>
               <a:rPr lang="en-US" dirty="0"/>
-              <a:t>A real run on a four-line deployment note: eight pages, hybrid search ranked the right chunk first, the filed query cited five pages, and lint suggested the one concept that deserved its own page.</a:t>
+              <a:t>If you ever write a page by hand, this is the shape. Frontmatter drives the index; wikilinks drive the graph and the lint.</a:t>
             </a:r>
           </a:p>
         </p:txBody>
@@ -1064,7 +1065,7 @@
           <a:p>
             <a:r>
               <a:rPr lang="en-US" dirty="0"/>
-              <a:t>The errors you will meet and what they mean. All of them are deliberate: the tool prefers to stop with a clear message than to guess.</a:t>
+              <a:t>A real run on a four-line deployment note: eight pages, hybrid search ranked the right chunk first, the filed query cited five pages, and lint suggested the one concept that deserved its own page.</a:t>
             </a:r>
           </a:p>
         </p:txBody>
@@ -1123,7 +1124,7 @@
           <a:p>
             <a:r>
               <a:rPr lang="en-US" dirty="0"/>
-              <a:t>Section five, new in 0.2 and 0.3: several named wikis, questions across them, markdown or HTML pages, converting a wiki, and the built-in guide and Claude skill.</a:t>
+              <a:t>The errors you will meet and what they mean. All of them are deliberate: the tool prefers to stop with a clear message than to guess.</a:t>
             </a:r>
           </a:p>
         </p:txBody>
@@ -1182,7 +1183,7 @@
           <a:p>
             <a:r>
               <a:rPr lang="en-US" dirty="0"/>
-              <a:t>Every wiki you init is registered by name. Each command works on exactly one wiki: the one you name with --wiki, else the current one, else you are asked. Nothing is guessed.</a:t>
+              <a:t>Section five, new in 0.2 and 0.3: several named wikis, questions across them, markdown or HTML pages, converting a wiki, and the built-in guide and Claude skill.</a:t>
             </a:r>
           </a:p>
         </p:txBody>
@@ -1241,7 +1242,7 @@
           <a:p>
             <a:r>
               <a:rPr lang="en-US" dirty="0"/>
-              <a:t>Search and query span wikis. Each wiki is ranked on its own index and the rankings are fused, so a large wiki cannot drown a small one. Query cites pages with the wiki name.</a:t>
+              <a:t>Every wiki you init is registered by name. Each command works on exactly one wiki: the one you name with --wiki, else the current one, else you are asked. Nothing is guessed.</a:t>
             </a:r>
           </a:p>
         </p:txBody>
@@ -1300,7 +1301,7 @@
           <a:p>
             <a:r>
               <a:rPr lang="en-US" dirty="0"/>
-              <a:t>Choose the page format per wiki at init. Markdown suits Obsidian, editors and agents. HTML gives standalone pages with relative links, a shared stylesheet and scripts disabled. Ingest, query, search, lint and MCP work the same in both.</a:t>
+              <a:t>Search and query span wikis. Each wiki is ranked on its own index and the rankings are fused, so a large wiki cannot drown a small one. Query cites pages with the wiki name.</a:t>
             </a:r>
           </a:p>
         </p:txBody>
@@ -1359,7 +1360,7 @@
           <a:p>
             <a:r>
               <a:rPr lang="en-US" dirty="0"/>
-              <a:t>convert turns a markdown wiki into an HTML wiki in place, without an LLM, keeping a backup. The built-in guide documents everything, and the Claude skill built from it lets Claude drive the tool.</a:t>
+              <a:t>Choose the page format per wiki at init. Markdown suits Obsidian, editors and agents. HTML gives standalone pages with relative links, a shared stylesheet and scripts disabled. Ingest, query, search, lint and MCP work the same in both.</a:t>
             </a:r>
           </a:p>
         </p:txBody>
@@ -1418,7 +1419,7 @@
           <a:p>
             <a:r>
               <a:rPr lang="en-US" dirty="0"/>
-              <a:t>The whole workflow on one slide. Thank you.</a:t>
+              <a:t>convert turns a markdown wiki into an HTML wiki in place, without an LLM, keeping a backup. The built-in guide documents everything, and the Claude skill built from it lets Claude drive the tool.</a:t>
             </a:r>
           </a:p>
         </p:txBody>
@@ -1478,6 +1479,65 @@
             <a:r>
               <a:rPr lang="en-US" dirty="0"/>
               <a:t>Three layers. Raw is immutable. Wiki is owned by the model. The schema file tells any agent how the wiki is structured and how to maintain it.</a:t>
+            </a:r>
+          </a:p>
+        </p:txBody>
+      </p:sp>
+    </p:spTree>
+  </p:cSld>
+  <p:clrMapOvr>
+    <a:masterClrMapping/>
+  </p:clrMapOvr>
+</p:notes>
+</file>
+
+<file path=ppt/notesSlides/notesSlide30.xml><?xml version="1.0" encoding="utf-8"?>
+<p:notes xmlns:a="http://schemas.openxmlformats.org/drawingml/2006/main" xmlns:r="http://schemas.openxmlformats.org/officeDocument/2006/relationships" xmlns:p="http://schemas.openxmlformats.org/presentationml/2006/main">
+  <p:cSld>
+    <p:spTree>
+      <p:nvGrpSpPr>
+        <p:cNvPr id="1" name=""/>
+        <p:cNvGrpSpPr/>
+        <p:nvPr/>
+      </p:nvGrpSpPr>
+      <p:grpSpPr>
+        <a:xfrm>
+          <a:off x="0" y="0"/>
+          <a:ext cx="0" cy="0"/>
+          <a:chOff x="0" y="0"/>
+          <a:chExt cx="0" cy="0"/>
+        </a:xfrm>
+      </p:grpSpPr>
+      <p:sp>
+        <p:nvSpPr>
+          <p:cNvPr id="2" name="Slide Image"/>
+          <p:cNvSpPr>
+            <a:spLocks noGrp="1" noRot="1" noChangeAspect="1"/>
+          </p:cNvSpPr>
+          <p:nvPr>
+            <p:ph type="sldImg"/>
+          </p:nvPr>
+        </p:nvSpPr>
+        <p:spPr/>
+      </p:sp>
+      <p:sp>
+        <p:nvSpPr>
+          <p:cNvPr id="3" name="Notes"/>
+          <p:cNvSpPr>
+            <a:spLocks noGrp="1"/>
+          </p:cNvSpPr>
+          <p:nvPr>
+            <p:ph type="body" idx="1"/>
+          </p:nvPr>
+        </p:nvSpPr>
+        <p:spPr/>
+        <p:txBody>
+          <a:bodyPr/>
+          <a:lstStyle/>
+          <a:p>
+            <a:r>
+              <a:rPr lang="en-US" dirty="0"/>
+              <a:t>The whole workflow on one slide. Thank you.</a:t>
             </a:r>
           </a:p>
         </p:txBody>
@@ -10039,7 +10099,7 @@
         <p:spPr>
           <a:xfrm>
             <a:off x="571500" y="4695368"/>
-            <a:ext cx="3810000" cy="587793"/>
+            <a:ext cx="3620036" cy="783353"/>
           </a:xfrm>
           <a:prstGeom prst="rect">
             <a:avLst/>
@@ -10075,7 +10135,7 @@
                 <a:ea typeface="Avenir Next"/>
                 <a:cs typeface="Avenir Next"/>
               </a:rPr>
-              <a:t>A dedicated parser model converts the document to markdown. The original stays untouched in </a:t>
+              <a:t>PDF, Word, PowerPoint, Excel and images become markdown — by a dedicated parser model, or locally for spreadsheets. The original stays untouched in </a:t>
             </a:r>
             <a:r>
               <a:rPr lang="en-US" kern="100" sz="1100" b="0" dirty="0">
@@ -10755,7 +10815,7 @@
         <p:spPr>
           <a:xfrm>
             <a:off x="806450" y="2928460"/>
-            <a:ext cx="2501640" cy="366198"/>
+            <a:ext cx="2873764" cy="547173"/>
           </a:xfrm>
           <a:prstGeom prst="rect">
             <a:avLst/>
@@ -10791,7 +10851,7 @@
                 <a:ea typeface="Avenir Next"/>
                 <a:cs typeface="Avenir Next"/>
               </a:rPr>
-              <a:t>Any PDF or DOCX, copied into </a:t>
+              <a:t>A PDF, DOCX, PPTX or image, copied into </a:t>
             </a:r>
             <a:r>
               <a:rPr lang="en-US" kern="100" sz="950" b="0" dirty="0">
@@ -10817,7 +10877,7 @@
                 <a:ea typeface="Avenir Next"/>
                 <a:cs typeface="Avenir Next"/>
               </a:rPr>
-              <a:t> if it was elsewhere. It is never modified.</a:t>
+              <a:t> if it was elsewhere. It is never modified. (XLSX skips the model — see slide 18.)</a:t>
             </a:r>
             <a:endParaRPr lang="en-US" kern="100" sz="950" b="0" dirty="0">
               <a:solidFill>
@@ -11341,7 +11401,7 @@
         <p:spPr>
           <a:xfrm>
             <a:off x="800100" y="5001197"/>
-            <a:ext cx="7932126" cy="650224"/>
+            <a:ext cx="8015605" cy="650224"/>
           </a:xfrm>
           <a:prstGeom prst="rect">
             <a:avLst/>
@@ -11409,7 +11469,7 @@
                 <a:ea typeface="Menlo"/>
                 <a:cs typeface="Menlo"/>
               </a:rPr>
-              <a:t>$ llm-wiki parse raw/contract.docx           </a:t>
+              <a:t>$ llm-wiki parse raw/q3-review.pptx          </a:t>
             </a:r>
             <a:r>
               <a:rPr lang="en-US" kern="100" sz="1050" b="0" dirty="0">
@@ -11422,7 +11482,7 @@
                 <a:ea typeface="Menlo"/>
                 <a:cs typeface="Menlo"/>
               </a:rPr>
-              <a:t># convert only — review raw/contract.docx.md first</a:t>
+              <a:t># convert only — review raw/q3-review.pptx.md first</a:t>
             </a:r>
             <a:br>
               <a:rPr lang="en-US" kern="100" sz="1050" b="0" dirty="0">
@@ -12857,6 +12917,1199 @@
     <p:bg>
       <p:bgPr>
         <a:solidFill>
+          <a:srgbClr val="FFFFFF"/>
+        </a:solidFill>
+        <a:effectLst/>
+      </p:bgPr>
+    </p:bg>
+    <p:spTree>
+      <p:nvGrpSpPr>
+        <p:cNvPr id="1" name=""/>
+        <p:cNvGrpSpPr/>
+        <p:nvPr/>
+      </p:nvGrpSpPr>
+      <p:grpSpPr>
+        <a:xfrm>
+          <a:off x="0" y="0"/>
+          <a:ext cx="0" cy="0"/>
+          <a:chOff x="0" y="0"/>
+          <a:chExt cx="0" cy="0"/>
+        </a:xfrm>
+      </p:grpSpPr>
+      <p:sp>
+        <p:nvSpPr>
+          <p:cNvPr id="2" name="Text 2"/>
+          <p:cNvSpPr txBox="1"/>
+          <p:nvPr/>
+        </p:nvSpPr>
+        <p:spPr>
+          <a:xfrm>
+            <a:off x="571500" y="448247"/>
+            <a:ext cx="1121751" cy="116903"/>
+          </a:xfrm>
+          <a:prstGeom prst="rect">
+            <a:avLst/>
+          </a:prstGeom>
+          <a:noFill/>
+        </p:spPr>
+        <p:txBody>
+          <a:bodyPr wrap="none" lIns="0" tIns="0" rIns="0" bIns="0" rtlCol="0" anchor="t" anchorCtr="0">
+            <a:noAutofit/>
+          </a:bodyPr>
+          <a:lstStyle/>
+          <a:p>
+            <a:pPr algn="l">
+              <a:lnSpc>
+                <a:spcPct val="98958"/>
+              </a:lnSpc>
+              <a:spcBef>
+                <a:spcPts val="0"/>
+              </a:spcBef>
+              <a:spcAft>
+                <a:spcPts val="0"/>
+              </a:spcAft>
+              <a:buNone/>
+            </a:pPr>
+            <a:r>
+              <a:rPr lang="en-US" kern="100" sz="800" b="1" cap="all" spc="125" dirty="0">
+                <a:solidFill>
+                  <a:srgbClr val="C8623A"/>
+                </a:solidFill>
+                <a:latin typeface="Menlo"/>
+                <a:ea typeface="Menlo"/>
+                <a:cs typeface="Menlo"/>
+              </a:rPr>
+              <a:t>03 · Documents</a:t>
+            </a:r>
+            <a:endParaRPr lang="en-US" kern="100" sz="800" b="1" cap="all" spc="125" dirty="0">
+              <a:solidFill>
+                <a:srgbClr val="C8623A"/>
+              </a:solidFill>
+              <a:latin typeface="Menlo"/>
+              <a:ea typeface="Menlo"/>
+              <a:cs typeface="Menlo"/>
+            </a:endParaRPr>
+          </a:p>
+        </p:txBody>
+      </p:sp>
+      <p:sp>
+        <p:nvSpPr>
+          <p:cNvPr id="3" name="Text 3"/>
+          <p:cNvSpPr txBox="1"/>
+          <p:nvPr/>
+        </p:nvSpPr>
+        <p:spPr>
+          <a:xfrm>
+            <a:off x="571500" y="725449"/>
+            <a:ext cx="4878808" cy="343891"/>
+          </a:xfrm>
+          <a:prstGeom prst="rect">
+            <a:avLst/>
+          </a:prstGeom>
+          <a:noFill/>
+        </p:spPr>
+        <p:txBody>
+          <a:bodyPr wrap="none" lIns="0" tIns="0" rIns="0" bIns="0" rtlCol="0" anchor="t" anchorCtr="0">
+            <a:noAutofit/>
+          </a:bodyPr>
+          <a:lstStyle/>
+          <a:p>
+            <a:pPr algn="l">
+              <a:lnSpc>
+                <a:spcPct val="87500"/>
+              </a:lnSpc>
+              <a:spcBef>
+                <a:spcPts val="0"/>
+              </a:spcBef>
+              <a:spcAft>
+                <a:spcPts val="0"/>
+              </a:spcAft>
+              <a:buNone/>
+            </a:pPr>
+            <a:r>
+              <a:rPr lang="en-US" kern="100" sz="2800" b="0" spc="-50" dirty="0">
+                <a:solidFill>
+                  <a:srgbClr val="1B1D21"/>
+                </a:solidFill>
+                <a:latin typeface="Avenir Next Ultra Light"/>
+                <a:ea typeface="Avenir Next Ultra Light"/>
+                <a:cs typeface="Avenir Next Ultra Light"/>
+              </a:rPr>
+              <a:t>Slides, sheets and pictures, </a:t>
+            </a:r>
+            <a:r>
+              <a:rPr lang="en-US" kern="100" sz="2800" b="0" i="1" spc="-50" dirty="0">
+                <a:solidFill>
+                  <a:srgbClr val="C8623A"/>
+                </a:solidFill>
+                <a:latin typeface="Avenir Next"/>
+                <a:ea typeface="Avenir Next"/>
+                <a:cs typeface="Avenir Next"/>
+              </a:rPr>
+              <a:t>too</a:t>
+            </a:r>
+            <a:r>
+              <a:rPr lang="en-US" kern="100" sz="2800" b="0" spc="-50" dirty="0">
+                <a:solidFill>
+                  <a:srgbClr val="1B1D21"/>
+                </a:solidFill>
+                <a:latin typeface="Avenir Next Ultra Light"/>
+                <a:ea typeface="Avenir Next Ultra Light"/>
+                <a:cs typeface="Avenir Next Ultra Light"/>
+              </a:rPr>
+              <a:t>.</a:t>
+            </a:r>
+            <a:endParaRPr lang="en-US" kern="100" sz="2800" b="0" spc="-50" dirty="0">
+              <a:solidFill>
+                <a:srgbClr val="1B1D21"/>
+              </a:solidFill>
+              <a:latin typeface="Avenir Next Ultra Light"/>
+              <a:ea typeface="Avenir Next Ultra Light"/>
+              <a:cs typeface="Avenir Next Ultra Light"/>
+            </a:endParaRPr>
+          </a:p>
+        </p:txBody>
+      </p:sp>
+      <p:sp>
+        <p:nvSpPr>
+          <p:cNvPr id="4" name="Shape 4"/>
+          <p:cNvSpPr/>
+          <p:nvPr/>
+        </p:nvSpPr>
+        <p:spPr>
+          <a:xfrm>
+            <a:off x="571500" y="1841500"/>
+            <a:ext cx="381000" cy="19050"/>
+          </a:xfrm>
+          <a:prstGeom prst="rect">
+            <a:avLst/>
+          </a:prstGeom>
+          <a:solidFill>
+            <a:srgbClr val="C8623A"/>
+          </a:solidFill>
+          <a:ln>
+            <a:noFill/>
+          </a:ln>
+        </p:spPr>
+        <p:txBody>
+          <a:bodyPr rtlCol="0" anchor="ctr"/>
+          <a:lstStyle/>
+          <a:p>
+            <a:endParaRPr lang="en-US" dirty="0"/>
+          </a:p>
+        </p:txBody>
+      </p:sp>
+      <p:sp>
+        <p:nvSpPr>
+          <p:cNvPr id="5" name="Shape 5"/>
+          <p:cNvSpPr/>
+          <p:nvPr/>
+        </p:nvSpPr>
+        <p:spPr>
+          <a:xfrm>
+            <a:off x="571500" y="2159000"/>
+            <a:ext cx="3530600" cy="1563291"/>
+          </a:xfrm>
+          <a:prstGeom prst="roundRect">
+            <a:avLst>
+              <a:gd name="adj" fmla="val 6499"/>
+            </a:avLst>
+          </a:prstGeom>
+          <a:solidFill>
+            <a:srgbClr val="FFFFFF"/>
+          </a:solidFill>
+          <a:ln>
+            <a:noFill/>
+          </a:ln>
+          <a:effectLst>
+            <a:outerShdw blurRad="411480" dist="114300" dir="5400000" sx="91367" sy="80503" algn="ctr" rotWithShape="0">
+              <a:srgbClr val="1B1D21">
+                <a:alpha val="18000"/>
+              </a:srgbClr>
+            </a:outerShdw>
+          </a:effectLst>
+        </p:spPr>
+        <p:txBody>
+          <a:bodyPr rtlCol="0" anchor="ctr"/>
+          <a:lstStyle/>
+          <a:p>
+            <a:endParaRPr lang="en-US" dirty="0"/>
+          </a:p>
+        </p:txBody>
+      </p:sp>
+      <p:sp>
+        <p:nvSpPr>
+          <p:cNvPr id="6" name="Shape 6"/>
+          <p:cNvSpPr/>
+          <p:nvPr/>
+        </p:nvSpPr>
+        <p:spPr>
+          <a:xfrm>
+            <a:off x="4330700" y="2159000"/>
+            <a:ext cx="3530600" cy="1563291"/>
+          </a:xfrm>
+          <a:prstGeom prst="roundRect">
+            <a:avLst>
+              <a:gd name="adj" fmla="val 6499"/>
+            </a:avLst>
+          </a:prstGeom>
+          <a:solidFill>
+            <a:srgbClr val="FFFFFF"/>
+          </a:solidFill>
+          <a:ln>
+            <a:noFill/>
+          </a:ln>
+          <a:effectLst>
+            <a:outerShdw blurRad="411480" dist="114300" dir="5400000" sx="91367" sy="80503" algn="ctr" rotWithShape="0">
+              <a:srgbClr val="1B1D21">
+                <a:alpha val="18000"/>
+              </a:srgbClr>
+            </a:outerShdw>
+          </a:effectLst>
+        </p:spPr>
+        <p:txBody>
+          <a:bodyPr rtlCol="0" anchor="ctr"/>
+          <a:lstStyle/>
+          <a:p>
+            <a:endParaRPr lang="en-US" dirty="0"/>
+          </a:p>
+        </p:txBody>
+      </p:sp>
+      <p:sp>
+        <p:nvSpPr>
+          <p:cNvPr id="7" name="Shape 7"/>
+          <p:cNvSpPr/>
+          <p:nvPr/>
+        </p:nvSpPr>
+        <p:spPr>
+          <a:xfrm>
+            <a:off x="8089900" y="2159000"/>
+            <a:ext cx="3530600" cy="1563291"/>
+          </a:xfrm>
+          <a:prstGeom prst="roundRect">
+            <a:avLst>
+              <a:gd name="adj" fmla="val 6499"/>
+            </a:avLst>
+          </a:prstGeom>
+          <a:solidFill>
+            <a:srgbClr val="FFFFFF"/>
+          </a:solidFill>
+          <a:ln>
+            <a:noFill/>
+          </a:ln>
+          <a:effectLst>
+            <a:outerShdw blurRad="411480" dist="114300" dir="5400000" sx="91367" sy="80503" algn="ctr" rotWithShape="0">
+              <a:srgbClr val="1B1D21">
+                <a:alpha val="18000"/>
+              </a:srgbClr>
+            </a:outerShdw>
+          </a:effectLst>
+        </p:spPr>
+        <p:txBody>
+          <a:bodyPr rtlCol="0" anchor="ctr"/>
+          <a:lstStyle/>
+          <a:p>
+            <a:endParaRPr lang="en-US" dirty="0"/>
+          </a:p>
+        </p:txBody>
+      </p:sp>
+      <p:sp>
+        <p:nvSpPr>
+          <p:cNvPr id="8" name="Text 8"/>
+          <p:cNvSpPr txBox="1"/>
+          <p:nvPr/>
+        </p:nvSpPr>
+        <p:spPr>
+          <a:xfrm>
+            <a:off x="800100" y="2366137"/>
+            <a:ext cx="1182838" cy="91313"/>
+          </a:xfrm>
+          <a:prstGeom prst="rect">
+            <a:avLst/>
+          </a:prstGeom>
+          <a:noFill/>
+        </p:spPr>
+        <p:txBody>
+          <a:bodyPr wrap="none" lIns="0" tIns="0" rIns="0" bIns="0" rtlCol="0" anchor="t" anchorCtr="0">
+            <a:noAutofit/>
+          </a:bodyPr>
+          <a:lstStyle/>
+          <a:p>
+            <a:pPr algn="l">
+              <a:lnSpc>
+                <a:spcPct val="96154"/>
+              </a:lnSpc>
+              <a:spcBef>
+                <a:spcPts val="0"/>
+              </a:spcBef>
+              <a:spcAft>
+                <a:spcPts val="0"/>
+              </a:spcAft>
+              <a:buNone/>
+            </a:pPr>
+            <a:r>
+              <a:rPr lang="en-US" kern="100" sz="650" b="1" cap="all" spc="80" dirty="0">
+                <a:solidFill>
+                  <a:srgbClr val="C8623A"/>
+                </a:solidFill>
+                <a:latin typeface="Menlo"/>
+                <a:ea typeface="Menlo"/>
+                <a:cs typeface="Menlo"/>
+              </a:rPr>
+              <a:t>pptx · parser model</a:t>
+            </a:r>
+            <a:endParaRPr lang="en-US" kern="100" sz="650" b="1" cap="all" spc="80" dirty="0">
+              <a:solidFill>
+                <a:srgbClr val="C8623A"/>
+              </a:solidFill>
+              <a:latin typeface="Menlo"/>
+              <a:ea typeface="Menlo"/>
+              <a:cs typeface="Menlo"/>
+            </a:endParaRPr>
+          </a:p>
+        </p:txBody>
+      </p:sp>
+      <p:sp>
+        <p:nvSpPr>
+          <p:cNvPr id="9" name="Text 9"/>
+          <p:cNvSpPr txBox="1"/>
+          <p:nvPr/>
+        </p:nvSpPr>
+        <p:spPr>
+          <a:xfrm>
+            <a:off x="800100" y="2522372"/>
+            <a:ext cx="1686187" cy="192888"/>
+          </a:xfrm>
+          <a:prstGeom prst="rect">
+            <a:avLst/>
+          </a:prstGeom>
+          <a:noFill/>
+        </p:spPr>
+        <p:txBody>
+          <a:bodyPr wrap="none" lIns="0" tIns="0" rIns="0" bIns="0" rtlCol="0" anchor="t" anchorCtr="0">
+            <a:noAutofit/>
+          </a:bodyPr>
+          <a:lstStyle/>
+          <a:p>
+            <a:pPr algn="l">
+              <a:lnSpc>
+                <a:spcPct val="100000"/>
+              </a:lnSpc>
+              <a:spcBef>
+                <a:spcPts val="0"/>
+              </a:spcBef>
+              <a:spcAft>
+                <a:spcPts val="0"/>
+              </a:spcAft>
+              <a:buNone/>
+            </a:pPr>
+            <a:r>
+              <a:rPr lang="en-US" kern="100" sz="1300" b="0" dirty="0">
+                <a:solidFill>
+                  <a:srgbClr val="1B1D21"/>
+                </a:solidFill>
+                <a:latin typeface="Avenir Next Demi Bold"/>
+                <a:ea typeface="Avenir Next Demi Bold"/>
+                <a:cs typeface="Avenir Next Demi Bold"/>
+              </a:rPr>
+              <a:t>One section per slide</a:t>
+            </a:r>
+            <a:endParaRPr lang="en-US" kern="100" sz="1300" b="0" dirty="0">
+              <a:solidFill>
+                <a:srgbClr val="1B1D21"/>
+              </a:solidFill>
+              <a:latin typeface="Avenir Next Demi Bold"/>
+              <a:ea typeface="Avenir Next Demi Bold"/>
+              <a:cs typeface="Avenir Next Demi Bold"/>
+            </a:endParaRPr>
+          </a:p>
+        </p:txBody>
+      </p:sp>
+      <p:sp>
+        <p:nvSpPr>
+          <p:cNvPr id="10" name="Text 10"/>
+          <p:cNvSpPr txBox="1"/>
+          <p:nvPr/>
+        </p:nvSpPr>
+        <p:spPr>
+          <a:xfrm>
+            <a:off x="800100" y="2789355"/>
+            <a:ext cx="3074325" cy="728148"/>
+          </a:xfrm>
+          <a:prstGeom prst="rect">
+            <a:avLst/>
+          </a:prstGeom>
+          <a:noFill/>
+        </p:spPr>
+        <p:txBody>
+          <a:bodyPr wrap="square" lIns="0" tIns="0" rIns="0" bIns="0" rtlCol="0" anchor="t" anchorCtr="0">
+            <a:noAutofit/>
+          </a:bodyPr>
+          <a:lstStyle/>
+          <a:p>
+            <a:pPr algn="l">
+              <a:lnSpc>
+                <a:spcPct val="125000"/>
+              </a:lnSpc>
+              <a:spcBef>
+                <a:spcPts val="0"/>
+              </a:spcBef>
+              <a:spcAft>
+                <a:spcPts val="0"/>
+              </a:spcAft>
+              <a:buNone/>
+            </a:pPr>
+            <a:r>
+              <a:rPr lang="en-US" kern="100" sz="950" b="0" dirty="0">
+                <a:solidFill>
+                  <a:srgbClr val="1B1D21">
+                    <a:alpha val="78000"/>
+                  </a:srgbClr>
+                </a:solidFill>
+                <a:latin typeface="Avenir Next"/>
+                <a:ea typeface="Avenir Next"/>
+                <a:cs typeface="Avenir Next"/>
+              </a:rPr>
+              <a:t>Titles, text in reading order, tables, the numbers behind charts and speaker notes are read locally; the slide pictures go along, so the model transcribes screenshots and diagrams.</a:t>
+            </a:r>
+            <a:endParaRPr lang="en-US" kern="100" sz="950" b="0" dirty="0">
+              <a:solidFill>
+                <a:srgbClr val="1B1D21">
+                  <a:alpha val="78000"/>
+                </a:srgbClr>
+              </a:solidFill>
+              <a:latin typeface="Avenir Next"/>
+              <a:ea typeface="Avenir Next"/>
+              <a:cs typeface="Avenir Next"/>
+            </a:endParaRPr>
+          </a:p>
+        </p:txBody>
+      </p:sp>
+      <p:sp>
+        <p:nvSpPr>
+          <p:cNvPr id="11" name="Text 11"/>
+          <p:cNvSpPr txBox="1"/>
+          <p:nvPr/>
+        </p:nvSpPr>
+        <p:spPr>
+          <a:xfrm>
+            <a:off x="4559300" y="2366137"/>
+            <a:ext cx="809300" cy="91313"/>
+          </a:xfrm>
+          <a:prstGeom prst="rect">
+            <a:avLst/>
+          </a:prstGeom>
+          <a:noFill/>
+        </p:spPr>
+        <p:txBody>
+          <a:bodyPr wrap="none" lIns="0" tIns="0" rIns="0" bIns="0" rtlCol="0" anchor="t" anchorCtr="0">
+            <a:noAutofit/>
+          </a:bodyPr>
+          <a:lstStyle/>
+          <a:p>
+            <a:pPr algn="l">
+              <a:lnSpc>
+                <a:spcPct val="96154"/>
+              </a:lnSpc>
+              <a:spcBef>
+                <a:spcPts val="0"/>
+              </a:spcBef>
+              <a:spcAft>
+                <a:spcPts val="0"/>
+              </a:spcAft>
+              <a:buNone/>
+            </a:pPr>
+            <a:r>
+              <a:rPr lang="en-US" kern="100" sz="650" b="1" cap="all" spc="80" dirty="0">
+                <a:solidFill>
+                  <a:srgbClr val="C8623A"/>
+                </a:solidFill>
+                <a:latin typeface="Menlo"/>
+                <a:ea typeface="Menlo"/>
+                <a:cs typeface="Menlo"/>
+              </a:rPr>
+              <a:t>xlsx · no LLM</a:t>
+            </a:r>
+            <a:endParaRPr lang="en-US" kern="100" sz="650" b="1" cap="all" spc="80" dirty="0">
+              <a:solidFill>
+                <a:srgbClr val="C8623A"/>
+              </a:solidFill>
+              <a:latin typeface="Menlo"/>
+              <a:ea typeface="Menlo"/>
+              <a:cs typeface="Menlo"/>
+            </a:endParaRPr>
+          </a:p>
+        </p:txBody>
+      </p:sp>
+      <p:sp>
+        <p:nvSpPr>
+          <p:cNvPr id="12" name="Text 12"/>
+          <p:cNvSpPr txBox="1"/>
+          <p:nvPr/>
+        </p:nvSpPr>
+        <p:spPr>
+          <a:xfrm>
+            <a:off x="4559300" y="2522372"/>
+            <a:ext cx="959231" cy="192888"/>
+          </a:xfrm>
+          <a:prstGeom prst="rect">
+            <a:avLst/>
+          </a:prstGeom>
+          <a:noFill/>
+        </p:spPr>
+        <p:txBody>
+          <a:bodyPr wrap="none" lIns="0" tIns="0" rIns="0" bIns="0" rtlCol="0" anchor="t" anchorCtr="0">
+            <a:noAutofit/>
+          </a:bodyPr>
+          <a:lstStyle/>
+          <a:p>
+            <a:pPr algn="l">
+              <a:lnSpc>
+                <a:spcPct val="100000"/>
+              </a:lnSpc>
+              <a:spcBef>
+                <a:spcPts val="0"/>
+              </a:spcBef>
+              <a:spcAft>
+                <a:spcPts val="0"/>
+              </a:spcAft>
+              <a:buNone/>
+            </a:pPr>
+            <a:r>
+              <a:rPr lang="en-US" kern="100" sz="1300" b="0" dirty="0">
+                <a:solidFill>
+                  <a:srgbClr val="1B1D21"/>
+                </a:solidFill>
+                <a:latin typeface="Avenir Next Demi Bold"/>
+                <a:ea typeface="Avenir Next Demi Bold"/>
+                <a:cs typeface="Avenir Next Demi Bold"/>
+              </a:rPr>
+              <a:t>Exact tables</a:t>
+            </a:r>
+            <a:endParaRPr lang="en-US" kern="100" sz="1300" b="0" dirty="0">
+              <a:solidFill>
+                <a:srgbClr val="1B1D21"/>
+              </a:solidFill>
+              <a:latin typeface="Avenir Next Demi Bold"/>
+              <a:ea typeface="Avenir Next Demi Bold"/>
+              <a:cs typeface="Avenir Next Demi Bold"/>
+            </a:endParaRPr>
+          </a:p>
+        </p:txBody>
+      </p:sp>
+      <p:sp>
+        <p:nvSpPr>
+          <p:cNvPr id="13" name="Text 13"/>
+          <p:cNvSpPr txBox="1"/>
+          <p:nvPr/>
+        </p:nvSpPr>
+        <p:spPr>
+          <a:xfrm>
+            <a:off x="4559300" y="2789355"/>
+            <a:ext cx="3073400" cy="547173"/>
+          </a:xfrm>
+          <a:prstGeom prst="rect">
+            <a:avLst/>
+          </a:prstGeom>
+          <a:noFill/>
+        </p:spPr>
+        <p:txBody>
+          <a:bodyPr wrap="square" lIns="0" tIns="0" rIns="0" bIns="0" rtlCol="0" anchor="t" anchorCtr="0">
+            <a:noAutofit/>
+          </a:bodyPr>
+          <a:lstStyle/>
+          <a:p>
+            <a:pPr algn="l">
+              <a:lnSpc>
+                <a:spcPct val="125000"/>
+              </a:lnSpc>
+              <a:spcBef>
+                <a:spcPts val="0"/>
+              </a:spcBef>
+              <a:spcAft>
+                <a:spcPts val="0"/>
+              </a:spcAft>
+              <a:buNone/>
+            </a:pPr>
+            <a:r>
+              <a:rPr lang="en-US" kern="100" sz="950" b="0" dirty="0">
+                <a:solidFill>
+                  <a:srgbClr val="1B1D21">
+                    <a:alpha val="78000"/>
+                  </a:srgbClr>
+                </a:solidFill>
+                <a:latin typeface="Avenir Next"/>
+                <a:ea typeface="Avenir Next"/>
+                <a:cs typeface="Avenir Next"/>
+              </a:rPr>
+              <a:t>One markdown table per sheet, converted locally: stored values, ISO dates, percentages, formulas as their result. Not a single number passes through a model.</a:t>
+            </a:r>
+            <a:endParaRPr lang="en-US" kern="100" sz="950" b="0" dirty="0">
+              <a:solidFill>
+                <a:srgbClr val="1B1D21">
+                  <a:alpha val="78000"/>
+                </a:srgbClr>
+              </a:solidFill>
+              <a:latin typeface="Avenir Next"/>
+              <a:ea typeface="Avenir Next"/>
+              <a:cs typeface="Avenir Next"/>
+            </a:endParaRPr>
+          </a:p>
+        </p:txBody>
+      </p:sp>
+      <p:sp>
+        <p:nvSpPr>
+          <p:cNvPr id="14" name="Text 14"/>
+          <p:cNvSpPr txBox="1"/>
+          <p:nvPr/>
+        </p:nvSpPr>
+        <p:spPr>
+          <a:xfrm>
+            <a:off x="8318500" y="2366137"/>
+            <a:ext cx="1369608" cy="91313"/>
+          </a:xfrm>
+          <a:prstGeom prst="rect">
+            <a:avLst/>
+          </a:prstGeom>
+          <a:noFill/>
+        </p:spPr>
+        <p:txBody>
+          <a:bodyPr wrap="none" lIns="0" tIns="0" rIns="0" bIns="0" rtlCol="0" anchor="t" anchorCtr="0">
+            <a:noAutofit/>
+          </a:bodyPr>
+          <a:lstStyle/>
+          <a:p>
+            <a:pPr algn="l">
+              <a:lnSpc>
+                <a:spcPct val="96154"/>
+              </a:lnSpc>
+              <a:spcBef>
+                <a:spcPts val="0"/>
+              </a:spcBef>
+              <a:spcAft>
+                <a:spcPts val="0"/>
+              </a:spcAft>
+              <a:buNone/>
+            </a:pPr>
+            <a:r>
+              <a:rPr lang="en-US" kern="100" sz="650" b="1" cap="all" spc="80" dirty="0">
+                <a:solidFill>
+                  <a:srgbClr val="C8623A"/>
+                </a:solidFill>
+                <a:latin typeface="Menlo"/>
+                <a:ea typeface="Menlo"/>
+                <a:cs typeface="Menlo"/>
+              </a:rPr>
+              <a:t>png · jpg · gif · webp</a:t>
+            </a:r>
+            <a:endParaRPr lang="en-US" kern="100" sz="650" b="1" cap="all" spc="80" dirty="0">
+              <a:solidFill>
+                <a:srgbClr val="C8623A"/>
+              </a:solidFill>
+              <a:latin typeface="Menlo"/>
+              <a:ea typeface="Menlo"/>
+              <a:cs typeface="Menlo"/>
+            </a:endParaRPr>
+          </a:p>
+        </p:txBody>
+      </p:sp>
+      <p:sp>
+        <p:nvSpPr>
+          <p:cNvPr id="15" name="Text 15"/>
+          <p:cNvSpPr txBox="1"/>
+          <p:nvPr/>
+        </p:nvSpPr>
+        <p:spPr>
+          <a:xfrm>
+            <a:off x="8318500" y="2522372"/>
+            <a:ext cx="1842103" cy="192888"/>
+          </a:xfrm>
+          <a:prstGeom prst="rect">
+            <a:avLst/>
+          </a:prstGeom>
+          <a:noFill/>
+        </p:spPr>
+        <p:txBody>
+          <a:bodyPr wrap="none" lIns="0" tIns="0" rIns="0" bIns="0" rtlCol="0" anchor="t" anchorCtr="0">
+            <a:noAutofit/>
+          </a:bodyPr>
+          <a:lstStyle/>
+          <a:p>
+            <a:pPr algn="l">
+              <a:lnSpc>
+                <a:spcPct val="100000"/>
+              </a:lnSpc>
+              <a:spcBef>
+                <a:spcPts val="0"/>
+              </a:spcBef>
+              <a:spcAft>
+                <a:spcPts val="0"/>
+              </a:spcAft>
+              <a:buNone/>
+            </a:pPr>
+            <a:r>
+              <a:rPr lang="en-US" kern="100" sz="1300" b="0" dirty="0">
+                <a:solidFill>
+                  <a:srgbClr val="1B1D21"/>
+                </a:solidFill>
+                <a:latin typeface="Avenir Next Demi Bold"/>
+                <a:ea typeface="Avenir Next Demi Bold"/>
+                <a:cs typeface="Avenir Next Demi Bold"/>
+              </a:rPr>
+              <a:t>Read by a vision model</a:t>
+            </a:r>
+            <a:endParaRPr lang="en-US" kern="100" sz="1300" b="0" dirty="0">
+              <a:solidFill>
+                <a:srgbClr val="1B1D21"/>
+              </a:solidFill>
+              <a:latin typeface="Avenir Next Demi Bold"/>
+              <a:ea typeface="Avenir Next Demi Bold"/>
+              <a:cs typeface="Avenir Next Demi Bold"/>
+            </a:endParaRPr>
+          </a:p>
+        </p:txBody>
+      </p:sp>
+      <p:sp>
+        <p:nvSpPr>
+          <p:cNvPr id="16" name="Text 16"/>
+          <p:cNvSpPr txBox="1"/>
+          <p:nvPr/>
+        </p:nvSpPr>
+        <p:spPr>
+          <a:xfrm>
+            <a:off x="8318500" y="2789355"/>
+            <a:ext cx="3073400" cy="547173"/>
+          </a:xfrm>
+          <a:prstGeom prst="rect">
+            <a:avLst/>
+          </a:prstGeom>
+          <a:noFill/>
+        </p:spPr>
+        <p:txBody>
+          <a:bodyPr wrap="square" lIns="0" tIns="0" rIns="0" bIns="0" rtlCol="0" anchor="t" anchorCtr="0">
+            <a:noAutofit/>
+          </a:bodyPr>
+          <a:lstStyle/>
+          <a:p>
+            <a:pPr algn="l">
+              <a:lnSpc>
+                <a:spcPct val="125000"/>
+              </a:lnSpc>
+              <a:spcBef>
+                <a:spcPts val="0"/>
+              </a:spcBef>
+              <a:spcAft>
+                <a:spcPts val="0"/>
+              </a:spcAft>
+              <a:buNone/>
+            </a:pPr>
+            <a:r>
+              <a:rPr lang="en-US" kern="100" sz="950" b="0" dirty="0">
+                <a:solidFill>
+                  <a:srgbClr val="1B1D21">
+                    <a:alpha val="78000"/>
+                  </a:srgbClr>
+                </a:solidFill>
+                <a:latin typeface="Avenir Next"/>
+                <a:ea typeface="Avenir Next"/>
+                <a:cs typeface="Avenir Next"/>
+              </a:rPr>
+              <a:t>Whiteboards, screenshots, scanned notes: every visible word transcribed, charts as data tables, diagrams and photos described.</a:t>
+            </a:r>
+            <a:endParaRPr lang="en-US" kern="100" sz="950" b="0" dirty="0">
+              <a:solidFill>
+                <a:srgbClr val="1B1D21">
+                  <a:alpha val="78000"/>
+                </a:srgbClr>
+              </a:solidFill>
+              <a:latin typeface="Avenir Next"/>
+              <a:ea typeface="Avenir Next"/>
+              <a:cs typeface="Avenir Next"/>
+            </a:endParaRPr>
+          </a:p>
+        </p:txBody>
+      </p:sp>
+      <p:sp>
+        <p:nvSpPr>
+          <p:cNvPr id="17" name="Shape 17"/>
+          <p:cNvSpPr/>
+          <p:nvPr/>
+        </p:nvSpPr>
+        <p:spPr>
+          <a:xfrm>
+            <a:off x="571500" y="4445000"/>
+            <a:ext cx="11049000" cy="807641"/>
+          </a:xfrm>
+          <a:prstGeom prst="roundRect">
+            <a:avLst>
+              <a:gd name="adj" fmla="val 12580"/>
+            </a:avLst>
+          </a:prstGeom>
+          <a:solidFill>
+            <a:srgbClr val="1B1D21"/>
+          </a:solidFill>
+          <a:ln>
+            <a:noFill/>
+          </a:ln>
+        </p:spPr>
+        <p:txBody>
+          <a:bodyPr rtlCol="0" anchor="ctr"/>
+          <a:lstStyle/>
+          <a:p>
+            <a:endParaRPr lang="en-US" dirty="0"/>
+          </a:p>
+        </p:txBody>
+      </p:sp>
+      <p:sp>
+        <p:nvSpPr>
+          <p:cNvPr id="18" name="Text 18"/>
+          <p:cNvSpPr txBox="1"/>
+          <p:nvPr/>
+        </p:nvSpPr>
+        <p:spPr>
+          <a:xfrm>
+            <a:off x="800100" y="4620197"/>
+            <a:ext cx="7848648" cy="436904"/>
+          </a:xfrm>
+          <a:prstGeom prst="rect">
+            <a:avLst/>
+          </a:prstGeom>
+          <a:noFill/>
+        </p:spPr>
+        <p:txBody>
+          <a:bodyPr wrap="none" lIns="0" tIns="0" rIns="0" bIns="0" rtlCol="0" anchor="t" anchorCtr="0">
+            <a:noAutofit/>
+          </a:bodyPr>
+          <a:lstStyle/>
+          <a:p>
+            <a:pPr algn="l">
+              <a:lnSpc>
+                <a:spcPct val="133333"/>
+              </a:lnSpc>
+              <a:spcBef>
+                <a:spcPts val="0"/>
+              </a:spcBef>
+              <a:spcAft>
+                <a:spcPts val="0"/>
+              </a:spcAft>
+              <a:buNone/>
+            </a:pPr>
+            <a:r>
+              <a:rPr lang="en-US" kern="100" sz="1050" b="0" dirty="0">
+                <a:solidFill>
+                  <a:srgbClr val="F6F3EC"/>
+                </a:solidFill>
+                <a:latin typeface="Menlo"/>
+                <a:ea typeface="Menlo"/>
+                <a:cs typeface="Menlo"/>
+              </a:rPr>
+              <a:t>$ llm-wiki --wiki club ingest ~/Downloads/q3-review.pptx   </a:t>
+            </a:r>
+            <a:r>
+              <a:rPr lang="en-US" kern="100" sz="1050" b="0" dirty="0">
+                <a:solidFill>
+                  <a:srgbClr val="F6F3EC">
+                    <a:alpha val="50000"/>
+                  </a:srgbClr>
+                </a:solidFill>
+                <a:latin typeface="Menlo"/>
+                <a:ea typeface="Menlo"/>
+                <a:cs typeface="Menlo"/>
+              </a:rPr>
+              <a:t># 5 slides, 1 picture sent</a:t>
+            </a:r>
+            <a:br>
+              <a:rPr lang="en-US" kern="100" sz="1050" b="0" dirty="0">
+                <a:solidFill>
+                  <a:srgbClr val="F6F3EC"/>
+                </a:solidFill>
+                <a:latin typeface="Menlo"/>
+                <a:ea typeface="Menlo"/>
+                <a:cs typeface="Menlo"/>
+              </a:rPr>
+            </a:br>
+            <a:r>
+              <a:rPr lang="en-US" kern="100" sz="1050" b="0" dirty="0">
+                <a:solidFill>
+                  <a:srgbClr val="F6F3EC"/>
+                </a:solidFill>
+                <a:latin typeface="Menlo"/>
+                <a:ea typeface="Menlo"/>
+                <a:cs typeface="Menlo"/>
+              </a:rPr>
+              <a:t>$ llm-wiki --wiki club parse budget.xlsx whiteboard.jpg     </a:t>
+            </a:r>
+            <a:r>
+              <a:rPr lang="en-US" kern="100" sz="1050" b="0" dirty="0">
+                <a:solidFill>
+                  <a:srgbClr val="F6F3EC">
+                    <a:alpha val="50000"/>
+                  </a:srgbClr>
+                </a:solidFill>
+                <a:latin typeface="Menlo"/>
+                <a:ea typeface="Menlo"/>
+                <a:cs typeface="Menlo"/>
+              </a:rPr>
+              <a:t># review raw/*.md before ingesting</a:t>
+            </a:r>
+            <a:endParaRPr lang="en-US" kern="100" sz="1050" b="0" dirty="0">
+              <a:solidFill>
+                <a:srgbClr val="F6F3EC">
+                  <a:alpha val="50000"/>
+                </a:srgbClr>
+              </a:solidFill>
+              <a:latin typeface="Menlo"/>
+              <a:ea typeface="Menlo"/>
+              <a:cs typeface="Menlo"/>
+            </a:endParaRPr>
+          </a:p>
+        </p:txBody>
+      </p:sp>
+      <p:sp>
+        <p:nvSpPr>
+          <p:cNvPr id="19" name="Text 19"/>
+          <p:cNvSpPr txBox="1"/>
+          <p:nvPr/>
+        </p:nvSpPr>
+        <p:spPr>
+          <a:xfrm>
+            <a:off x="571500" y="6032768"/>
+            <a:ext cx="5645491" cy="121691"/>
+          </a:xfrm>
+          <a:prstGeom prst="rect">
+            <a:avLst/>
+          </a:prstGeom>
+          <a:noFill/>
+        </p:spPr>
+        <p:txBody>
+          <a:bodyPr wrap="none" lIns="0" tIns="0" rIns="0" bIns="0" rtlCol="0" anchor="t" anchorCtr="0">
+            <a:noAutofit/>
+          </a:bodyPr>
+          <a:lstStyle/>
+          <a:p>
+            <a:pPr algn="l">
+              <a:lnSpc>
+                <a:spcPct val="116667"/>
+              </a:lnSpc>
+              <a:spcBef>
+                <a:spcPts val="0"/>
+              </a:spcBef>
+              <a:spcAft>
+                <a:spcPts val="0"/>
+              </a:spcAft>
+              <a:buNone/>
+            </a:pPr>
+            <a:r>
+              <a:rPr lang="en-US" kern="100" sz="700" b="0" dirty="0">
+                <a:solidFill>
+                  <a:srgbClr val="1B1D21">
+                    <a:alpha val="50000"/>
+                  </a:srgbClr>
+                </a:solidFill>
+                <a:latin typeface="Avenir Next"/>
+                <a:ea typeface="Avenir Next"/>
+                <a:cs typeface="Avenir Next"/>
+              </a:rPr>
+              <a:t>Refused with a hint: .doc .ppt .xls (save as the x format), .heic .tif (convert to JPEG/PNG). Limits per format: </a:t>
+            </a:r>
+            <a:r>
+              <a:rPr lang="en-US" kern="100" sz="700" b="0" dirty="0">
+                <a:solidFill>
+                  <a:srgbClr val="1B1D21">
+                    <a:alpha val="50000"/>
+                  </a:srgbClr>
+                </a:solidFill>
+                <a:latin typeface="Menlo"/>
+                <a:ea typeface="Menlo"/>
+                <a:cs typeface="Menlo"/>
+              </a:rPr>
+              <a:t>llm-wiki guide layout</a:t>
+            </a:r>
+            <a:r>
+              <a:rPr lang="en-US" kern="100" sz="700" b="0" dirty="0">
+                <a:solidFill>
+                  <a:srgbClr val="1B1D21">
+                    <a:alpha val="50000"/>
+                  </a:srgbClr>
+                </a:solidFill>
+                <a:latin typeface="Avenir Next"/>
+                <a:ea typeface="Avenir Next"/>
+                <a:cs typeface="Avenir Next"/>
+              </a:rPr>
+              <a:t>.</a:t>
+            </a:r>
+            <a:endParaRPr lang="en-US" kern="100" sz="700" b="0" dirty="0">
+              <a:solidFill>
+                <a:srgbClr val="1B1D21">
+                  <a:alpha val="50000"/>
+                </a:srgbClr>
+              </a:solidFill>
+              <a:latin typeface="Avenir Next"/>
+              <a:ea typeface="Avenir Next"/>
+              <a:cs typeface="Avenir Next"/>
+            </a:endParaRPr>
+          </a:p>
+        </p:txBody>
+      </p:sp>
+      <p:pic>
+        <p:nvPicPr>
+          <p:cNvPr id="20" name="Picture 20" descr=""/>
+          <p:cNvPicPr>
+            <a:picLocks noChangeAspect="1"/>
+          </p:cNvPicPr>
+          <p:nvPr/>
+        </p:nvPicPr>
+        <p:blipFill>
+          <a:blip r:embed="rId2"/>
+          <a:srcRect/>
+          <a:stretch>
+            <a:fillRect/>
+          </a:stretch>
+        </p:blipFill>
+        <p:spPr>
+          <a:xfrm>
+            <a:off x="342900" y="6451600"/>
+            <a:ext cx="900853" cy="177800"/>
+          </a:xfrm>
+          <a:prstGeom prst="rect">
+            <a:avLst/>
+          </a:prstGeom>
+        </p:spPr>
+      </p:pic>
+      <p:sp>
+        <p:nvSpPr>
+          <p:cNvPr id="21" name="Text 21"/>
+          <p:cNvSpPr txBox="1"/>
+          <p:nvPr/>
+        </p:nvSpPr>
+        <p:spPr>
+          <a:xfrm>
+            <a:off x="11704538" y="6459106"/>
+            <a:ext cx="157262" cy="160769"/>
+          </a:xfrm>
+          <a:prstGeom prst="rect">
+            <a:avLst/>
+          </a:prstGeom>
+          <a:noFill/>
+        </p:spPr>
+        <p:txBody>
+          <a:bodyPr wrap="none" lIns="0" tIns="0" rIns="0" bIns="0" rtlCol="0" anchor="t" anchorCtr="0">
+            <a:noAutofit/>
+          </a:bodyPr>
+          <a:lstStyle/>
+          <a:p>
+            <a:pPr algn="l">
+              <a:lnSpc>
+                <a:spcPct val="115741"/>
+              </a:lnSpc>
+              <a:spcBef>
+                <a:spcPts val="0"/>
+              </a:spcBef>
+              <a:spcAft>
+                <a:spcPts val="0"/>
+              </a:spcAft>
+              <a:buNone/>
+            </a:pPr>
+            <a:r>
+              <a:rPr lang="en-US" kern="100" sz="900" b="0" spc="20" dirty="0">
+                <a:solidFill>
+                  <a:srgbClr val="1B1D21">
+                    <a:alpha val="55000"/>
+                  </a:srgbClr>
+                </a:solidFill>
+                <a:latin typeface="Avenir Next Demi Bold"/>
+                <a:ea typeface="Avenir Next Demi Bold"/>
+                <a:cs typeface="Avenir Next Demi Bold"/>
+              </a:rPr>
+              <a:t>18</a:t>
+            </a:r>
+            <a:endParaRPr lang="en-US" kern="100" sz="900" b="0" spc="20" dirty="0">
+              <a:solidFill>
+                <a:srgbClr val="1B1D21">
+                  <a:alpha val="55000"/>
+                </a:srgbClr>
+              </a:solidFill>
+              <a:latin typeface="Avenir Next Demi Bold"/>
+              <a:ea typeface="Avenir Next Demi Bold"/>
+              <a:cs typeface="Avenir Next Demi Bold"/>
+            </a:endParaRPr>
+          </a:p>
+        </p:txBody>
+      </p:sp>
+      <p:sp>
+        <p:nvSpPr>
+          <p:cNvPr id="22" name="Text 22"/>
+          <p:cNvSpPr txBox="1"/>
+          <p:nvPr/>
+        </p:nvSpPr>
+        <p:spPr>
+          <a:xfrm>
+            <a:off x="1358900" y="6459106"/>
+            <a:ext cx="1137539" cy="160769"/>
+          </a:xfrm>
+          <a:prstGeom prst="rect">
+            <a:avLst/>
+          </a:prstGeom>
+          <a:noFill/>
+        </p:spPr>
+        <p:txBody>
+          <a:bodyPr wrap="none" lIns="0" tIns="0" rIns="0" bIns="0" rtlCol="0" anchor="t" anchorCtr="0">
+            <a:noAutofit/>
+          </a:bodyPr>
+          <a:lstStyle/>
+          <a:p>
+            <a:pPr algn="l">
+              <a:lnSpc>
+                <a:spcPct val="115741"/>
+              </a:lnSpc>
+              <a:spcBef>
+                <a:spcPts val="0"/>
+              </a:spcBef>
+              <a:spcAft>
+                <a:spcPts val="0"/>
+              </a:spcAft>
+              <a:buNone/>
+            </a:pPr>
+            <a:r>
+              <a:rPr lang="en-US" kern="100" sz="900" b="0" spc="20" dirty="0">
+                <a:solidFill>
+                  <a:srgbClr val="1B1D21">
+                    <a:alpha val="38500"/>
+                  </a:srgbClr>
+                </a:solidFill>
+                <a:latin typeface="Avenir Next"/>
+                <a:ea typeface="Avenir Next"/>
+                <a:cs typeface="Avenir Next"/>
+              </a:rPr>
+              <a:t>llm-wiki · user guide</a:t>
+            </a:r>
+            <a:endParaRPr lang="en-US" kern="100" sz="900" b="0" spc="20" dirty="0">
+              <a:solidFill>
+                <a:srgbClr val="1B1D21">
+                  <a:alpha val="38500"/>
+                </a:srgbClr>
+              </a:solidFill>
+              <a:latin typeface="Avenir Next"/>
+              <a:ea typeface="Avenir Next"/>
+              <a:cs typeface="Avenir Next"/>
+            </a:endParaRPr>
+          </a:p>
+        </p:txBody>
+      </p:sp>
+    </p:spTree>
+  </p:cSld>
+  <p:clrMapOvr>
+    <a:masterClrMapping/>
+  </p:clrMapOvr>
+</p:sld>
+</file>
+
+<file path=ppt/slides/slide19.xml><?xml version="1.0" encoding="utf-8"?>
+<p:sld xmlns:a="http://schemas.openxmlformats.org/drawingml/2006/main" xmlns:r="http://schemas.openxmlformats.org/officeDocument/2006/relationships" xmlns:p="http://schemas.openxmlformats.org/presentationml/2006/main">
+  <p:cSld>
+    <p:bg>
+      <p:bgPr>
+        <a:solidFill>
           <a:srgbClr val="1B1D21"/>
         </a:solidFill>
         <a:effectLst/>
@@ -13197,7 +14450,7 @@
                 <a:ea typeface="Avenir Next Demi Bold"/>
                 <a:cs typeface="Avenir Next Demi Bold"/>
               </a:rPr>
-              <a:t>18</a:t>
+              <a:t>19</a:t>
             </a:r>
             <a:endParaRPr lang="en-US" kern="100" sz="900" b="0" spc="20" dirty="0">
               <a:solidFill>
@@ -13263,1389 +14516,6 @@
               <a:solidFill>
                 <a:srgbClr val="FFFFFF">
                   <a:alpha val="49000"/>
-                </a:srgbClr>
-              </a:solidFill>
-              <a:latin typeface="Avenir Next"/>
-              <a:ea typeface="Avenir Next"/>
-              <a:cs typeface="Avenir Next"/>
-            </a:endParaRPr>
-          </a:p>
-        </p:txBody>
-      </p:sp>
-    </p:spTree>
-  </p:cSld>
-  <p:clrMapOvr>
-    <a:masterClrMapping/>
-  </p:clrMapOvr>
-</p:sld>
-</file>
-
-<file path=ppt/slides/slide19.xml><?xml version="1.0" encoding="utf-8"?>
-<p:sld xmlns:a="http://schemas.openxmlformats.org/drawingml/2006/main" xmlns:r="http://schemas.openxmlformats.org/officeDocument/2006/relationships" xmlns:p="http://schemas.openxmlformats.org/presentationml/2006/main">
-  <p:cSld>
-    <p:bg>
-      <p:bgPr>
-        <a:solidFill>
-          <a:srgbClr val="FFFFFF"/>
-        </a:solidFill>
-        <a:effectLst/>
-      </p:bgPr>
-    </p:bg>
-    <p:spTree>
-      <p:nvGrpSpPr>
-        <p:cNvPr id="1" name=""/>
-        <p:cNvGrpSpPr/>
-        <p:nvPr/>
-      </p:nvGrpSpPr>
-      <p:grpSpPr>
-        <a:xfrm>
-          <a:off x="0" y="0"/>
-          <a:ext cx="0" cy="0"/>
-          <a:chOff x="0" y="0"/>
-          <a:chExt cx="0" cy="0"/>
-        </a:xfrm>
-      </p:grpSpPr>
-      <p:sp>
-        <p:nvSpPr>
-          <p:cNvPr id="2" name="Text 2"/>
-          <p:cNvSpPr txBox="1"/>
-          <p:nvPr/>
-        </p:nvSpPr>
-        <p:spPr>
-          <a:xfrm>
-            <a:off x="571500" y="448247"/>
-            <a:ext cx="881428" cy="116903"/>
-          </a:xfrm>
-          <a:prstGeom prst="rect">
-            <a:avLst/>
-          </a:prstGeom>
-          <a:noFill/>
-        </p:spPr>
-        <p:txBody>
-          <a:bodyPr wrap="none" lIns="0" tIns="0" rIns="0" bIns="0" rtlCol="0" anchor="t" anchorCtr="0">
-            <a:noAutofit/>
-          </a:bodyPr>
-          <a:lstStyle/>
-          <a:p>
-            <a:pPr algn="l">
-              <a:lnSpc>
-                <a:spcPct val="98958"/>
-              </a:lnSpc>
-              <a:spcBef>
-                <a:spcPts val="0"/>
-              </a:spcBef>
-              <a:spcAft>
-                <a:spcPts val="0"/>
-              </a:spcAft>
-              <a:buNone/>
-            </a:pPr>
-            <a:r>
-              <a:rPr lang="en-US" kern="100" sz="800" b="1" cap="all" spc="125" dirty="0">
-                <a:solidFill>
-                  <a:srgbClr val="C8623A"/>
-                </a:solidFill>
-                <a:latin typeface="Menlo"/>
-                <a:ea typeface="Menlo"/>
-                <a:cs typeface="Menlo"/>
-              </a:rPr>
-              <a:t>04 · Agents</a:t>
-            </a:r>
-            <a:endParaRPr lang="en-US" kern="100" sz="800" b="1" cap="all" spc="125" dirty="0">
-              <a:solidFill>
-                <a:srgbClr val="C8623A"/>
-              </a:solidFill>
-              <a:latin typeface="Menlo"/>
-              <a:ea typeface="Menlo"/>
-              <a:cs typeface="Menlo"/>
-            </a:endParaRPr>
-          </a:p>
-        </p:txBody>
-      </p:sp>
-      <p:sp>
-        <p:nvSpPr>
-          <p:cNvPr id="3" name="Text 3"/>
-          <p:cNvSpPr txBox="1"/>
-          <p:nvPr/>
-        </p:nvSpPr>
-        <p:spPr>
-          <a:xfrm>
-            <a:off x="571500" y="725449"/>
-            <a:ext cx="8762683" cy="343891"/>
-          </a:xfrm>
-          <a:prstGeom prst="rect">
-            <a:avLst/>
-          </a:prstGeom>
-          <a:noFill/>
-        </p:spPr>
-        <p:txBody>
-          <a:bodyPr wrap="none" lIns="0" tIns="0" rIns="0" bIns="0" rtlCol="0" anchor="t" anchorCtr="0">
-            <a:noAutofit/>
-          </a:bodyPr>
-          <a:lstStyle/>
-          <a:p>
-            <a:pPr algn="l">
-              <a:lnSpc>
-                <a:spcPct val="87500"/>
-              </a:lnSpc>
-              <a:spcBef>
-                <a:spcPts val="0"/>
-              </a:spcBef>
-              <a:spcAft>
-                <a:spcPts val="0"/>
-              </a:spcAft>
-              <a:buNone/>
-            </a:pPr>
-            <a:r>
-              <a:rPr lang="en-US" kern="100" sz="2800" b="0" spc="-50" dirty="0">
-                <a:solidFill>
-                  <a:srgbClr val="1B1D21"/>
-                </a:solidFill>
-                <a:latin typeface="Avenir Next Ultra Light"/>
-                <a:ea typeface="Avenir Next Ultra Light"/>
-                <a:cs typeface="Avenir Next Ultra Light"/>
-              </a:rPr>
-              <a:t>The schema turns any coding agent into the </a:t>
-            </a:r>
-            <a:r>
-              <a:rPr lang="en-US" kern="100" sz="2800" b="0" i="1" spc="-50" dirty="0">
-                <a:solidFill>
-                  <a:srgbClr val="C8623A"/>
-                </a:solidFill>
-                <a:latin typeface="Avenir Next"/>
-                <a:ea typeface="Avenir Next"/>
-                <a:cs typeface="Avenir Next"/>
-              </a:rPr>
-              <a:t>maintainer</a:t>
-            </a:r>
-            <a:r>
-              <a:rPr lang="en-US" kern="100" sz="2800" b="0" spc="-50" dirty="0">
-                <a:solidFill>
-                  <a:srgbClr val="1B1D21"/>
-                </a:solidFill>
-                <a:latin typeface="Avenir Next Ultra Light"/>
-                <a:ea typeface="Avenir Next Ultra Light"/>
-                <a:cs typeface="Avenir Next Ultra Light"/>
-              </a:rPr>
-              <a:t>.</a:t>
-            </a:r>
-            <a:endParaRPr lang="en-US" kern="100" sz="2800" b="0" spc="-50" dirty="0">
-              <a:solidFill>
-                <a:srgbClr val="1B1D21"/>
-              </a:solidFill>
-              <a:latin typeface="Avenir Next Ultra Light"/>
-              <a:ea typeface="Avenir Next Ultra Light"/>
-              <a:cs typeface="Avenir Next Ultra Light"/>
-            </a:endParaRPr>
-          </a:p>
-        </p:txBody>
-      </p:sp>
-      <p:sp>
-        <p:nvSpPr>
-          <p:cNvPr id="4" name="Shape 4"/>
-          <p:cNvSpPr/>
-          <p:nvPr/>
-        </p:nvSpPr>
-        <p:spPr>
-          <a:xfrm>
-            <a:off x="571500" y="1841500"/>
-            <a:ext cx="381000" cy="19050"/>
-          </a:xfrm>
-          <a:prstGeom prst="rect">
-            <a:avLst/>
-          </a:prstGeom>
-          <a:solidFill>
-            <a:srgbClr val="C8623A"/>
-          </a:solidFill>
-          <a:ln>
-            <a:noFill/>
-          </a:ln>
-        </p:spPr>
-        <p:txBody>
-          <a:bodyPr rtlCol="0" anchor="ctr"/>
-          <a:lstStyle/>
-          <a:p>
-            <a:endParaRPr lang="en-US" dirty="0"/>
-          </a:p>
-        </p:txBody>
-      </p:sp>
-      <p:sp>
-        <p:nvSpPr>
-          <p:cNvPr id="5" name="Shape 5"/>
-          <p:cNvSpPr/>
-          <p:nvPr/>
-        </p:nvSpPr>
-        <p:spPr>
-          <a:xfrm>
-            <a:off x="2797572" y="3207941"/>
-            <a:ext cx="364232" cy="158750"/>
-          </a:xfrm>
-          <a:prstGeom prst="roundRect">
-            <a:avLst>
-              <a:gd name="adj" fmla="val 20000"/>
-            </a:avLst>
-          </a:prstGeom>
-          <a:solidFill>
-            <a:srgbClr val="1B1D21">
-              <a:alpha val="6000"/>
-            </a:srgbClr>
-          </a:solidFill>
-          <a:ln>
-            <a:noFill/>
-          </a:ln>
-        </p:spPr>
-        <p:txBody>
-          <a:bodyPr rtlCol="0" anchor="ctr"/>
-          <a:lstStyle/>
-          <a:p>
-            <a:endParaRPr lang="en-US" dirty="0"/>
-          </a:p>
-        </p:txBody>
-      </p:sp>
-      <p:sp>
-        <p:nvSpPr>
-          <p:cNvPr id="6" name="Shape 6"/>
-          <p:cNvSpPr/>
-          <p:nvPr/>
-        </p:nvSpPr>
-        <p:spPr>
-          <a:xfrm>
-            <a:off x="4632623" y="3207941"/>
-            <a:ext cx="1052314" cy="158750"/>
-          </a:xfrm>
-          <a:prstGeom prst="roundRect">
-            <a:avLst>
-              <a:gd name="adj" fmla="val 20000"/>
-            </a:avLst>
-          </a:prstGeom>
-          <a:solidFill>
-            <a:srgbClr val="1B1D21">
-              <a:alpha val="6000"/>
-            </a:srgbClr>
-          </a:solidFill>
-          <a:ln>
-            <a:noFill/>
-          </a:ln>
-        </p:spPr>
-        <p:txBody>
-          <a:bodyPr rtlCol="0" anchor="ctr"/>
-          <a:lstStyle/>
-          <a:p>
-            <a:endParaRPr lang="en-US" dirty="0"/>
-          </a:p>
-        </p:txBody>
-      </p:sp>
-      <p:sp>
-        <p:nvSpPr>
-          <p:cNvPr id="7" name="Shape 7"/>
-          <p:cNvSpPr/>
-          <p:nvPr/>
-        </p:nvSpPr>
-        <p:spPr>
-          <a:xfrm>
-            <a:off x="8883452" y="3017441"/>
-            <a:ext cx="364232" cy="158750"/>
-          </a:xfrm>
-          <a:prstGeom prst="roundRect">
-            <a:avLst>
-              <a:gd name="adj" fmla="val 20000"/>
-            </a:avLst>
-          </a:prstGeom>
-          <a:solidFill>
-            <a:srgbClr val="1B1D21">
-              <a:alpha val="6000"/>
-            </a:srgbClr>
-          </a:solidFill>
-          <a:ln>
-            <a:noFill/>
-          </a:ln>
-        </p:spPr>
-        <p:txBody>
-          <a:bodyPr rtlCol="0" anchor="ctr"/>
-          <a:lstStyle/>
-          <a:p>
-            <a:endParaRPr lang="en-US" dirty="0"/>
-          </a:p>
-        </p:txBody>
-      </p:sp>
-      <p:sp>
-        <p:nvSpPr>
-          <p:cNvPr id="8" name="Text 8"/>
-          <p:cNvSpPr txBox="1"/>
-          <p:nvPr/>
-        </p:nvSpPr>
-        <p:spPr>
-          <a:xfrm>
-            <a:off x="571500" y="2194154"/>
-            <a:ext cx="447008" cy="368071"/>
-          </a:xfrm>
-          <a:prstGeom prst="rect">
-            <a:avLst/>
-          </a:prstGeom>
-          <a:noFill/>
-        </p:spPr>
-        <p:txBody>
-          <a:bodyPr wrap="none" lIns="0" tIns="0" rIns="0" bIns="0" rtlCol="0" anchor="t" anchorCtr="0">
-            <a:noAutofit/>
-          </a:bodyPr>
-          <a:lstStyle/>
-          <a:p>
-            <a:pPr algn="l">
-              <a:lnSpc>
-                <a:spcPct val="83333"/>
-              </a:lnSpc>
-              <a:spcBef>
-                <a:spcPts val="0"/>
-              </a:spcBef>
-              <a:spcAft>
-                <a:spcPts val="0"/>
-              </a:spcAft>
-              <a:buNone/>
-            </a:pPr>
-            <a:r>
-              <a:rPr lang="en-US" kern="100" sz="3200" b="0" spc="-100" dirty="0">
-                <a:solidFill>
-                  <a:srgbClr val="C8623A"/>
-                </a:solidFill>
-                <a:latin typeface="Avenir Next Ultra Light"/>
-                <a:ea typeface="Avenir Next Ultra Light"/>
-                <a:cs typeface="Avenir Next Ultra Light"/>
-              </a:rPr>
-              <a:t>§1</a:t>
-            </a:r>
-            <a:endParaRPr lang="en-US" kern="100" sz="3200" b="0" spc="-100" dirty="0">
-              <a:solidFill>
-                <a:srgbClr val="C8623A"/>
-              </a:solidFill>
-              <a:latin typeface="Avenir Next Ultra Light"/>
-              <a:ea typeface="Avenir Next Ultra Light"/>
-              <a:cs typeface="Avenir Next Ultra Light"/>
-            </a:endParaRPr>
-          </a:p>
-        </p:txBody>
-      </p:sp>
-      <p:sp>
-        <p:nvSpPr>
-          <p:cNvPr id="9" name="Text 9"/>
-          <p:cNvSpPr txBox="1"/>
-          <p:nvPr/>
-        </p:nvSpPr>
-        <p:spPr>
-          <a:xfrm>
-            <a:off x="571500" y="2719222"/>
-            <a:ext cx="1726327" cy="192888"/>
-          </a:xfrm>
-          <a:prstGeom prst="rect">
-            <a:avLst/>
-          </a:prstGeom>
-          <a:noFill/>
-        </p:spPr>
-        <p:txBody>
-          <a:bodyPr wrap="none" lIns="0" tIns="0" rIns="0" bIns="0" rtlCol="0" anchor="t" anchorCtr="0">
-            <a:noAutofit/>
-          </a:bodyPr>
-          <a:lstStyle/>
-          <a:p>
-            <a:pPr algn="l">
-              <a:lnSpc>
-                <a:spcPct val="100000"/>
-              </a:lnSpc>
-              <a:spcBef>
-                <a:spcPts val="0"/>
-              </a:spcBef>
-              <a:spcAft>
-                <a:spcPts val="0"/>
-              </a:spcAft>
-              <a:buNone/>
-            </a:pPr>
-            <a:r>
-              <a:rPr lang="en-US" kern="100" sz="1300" b="0" dirty="0">
-                <a:solidFill>
-                  <a:srgbClr val="1B1D21"/>
-                </a:solidFill>
-                <a:latin typeface="Avenir Next Demi Bold"/>
-                <a:ea typeface="Avenir Next Demi Bold"/>
-                <a:cs typeface="Avenir Next Demi Bold"/>
-              </a:rPr>
-              <a:t>Layout &amp; page format</a:t>
-            </a:r>
-            <a:endParaRPr lang="en-US" kern="100" sz="1300" b="0" dirty="0">
-              <a:solidFill>
-                <a:srgbClr val="1B1D21"/>
-              </a:solidFill>
-              <a:latin typeface="Avenir Next Demi Bold"/>
-              <a:ea typeface="Avenir Next Demi Bold"/>
-              <a:cs typeface="Avenir Next Demi Bold"/>
-            </a:endParaRPr>
-          </a:p>
-        </p:txBody>
-      </p:sp>
-      <p:sp>
-        <p:nvSpPr>
-          <p:cNvPr id="10" name="Text 10"/>
-          <p:cNvSpPr txBox="1"/>
-          <p:nvPr/>
-        </p:nvSpPr>
-        <p:spPr>
-          <a:xfrm>
-            <a:off x="571500" y="2998264"/>
-            <a:ext cx="3564199" cy="574802"/>
-          </a:xfrm>
-          <a:prstGeom prst="rect">
-            <a:avLst/>
-          </a:prstGeom>
-          <a:noFill/>
-        </p:spPr>
-        <p:txBody>
-          <a:bodyPr wrap="none" lIns="0" tIns="0" rIns="0" bIns="0" rtlCol="0" anchor="t" anchorCtr="0">
-            <a:noAutofit/>
-          </a:bodyPr>
-          <a:lstStyle/>
-          <a:p>
-            <a:pPr algn="l">
-              <a:lnSpc>
-                <a:spcPct val="125000"/>
-              </a:lnSpc>
-              <a:spcBef>
-                <a:spcPts val="0"/>
-              </a:spcBef>
-              <a:spcAft>
-                <a:spcPts val="0"/>
-              </a:spcAft>
-              <a:buNone/>
-            </a:pPr>
-            <a:r>
-              <a:rPr lang="en-US" kern="100" sz="1000" b="0" dirty="0">
-                <a:solidFill>
-                  <a:srgbClr val="1B1D21">
-                    <a:alpha val="78000"/>
-                  </a:srgbClr>
-                </a:solidFill>
-                <a:latin typeface="Avenir Next"/>
-                <a:ea typeface="Avenir Next"/>
-                <a:cs typeface="Avenir Next"/>
-              </a:rPr>
-              <a:t>Where each page type lives, the frontmatter keys, kebab-</a:t>
-            </a:r>
-            <a:br>
-              <a:rPr lang="en-US" kern="100" sz="1000" b="0" dirty="0">
-                <a:solidFill>
-                  <a:srgbClr val="1B1D21">
-                    <a:alpha val="78000"/>
-                  </a:srgbClr>
-                </a:solidFill>
-                <a:latin typeface="Avenir Next"/>
-                <a:ea typeface="Avenir Next"/>
-                <a:cs typeface="Avenir Next"/>
-              </a:rPr>
-            </a:br>
-            <a:r>
-              <a:rPr lang="en-US" kern="100" sz="1000" b="0" dirty="0">
-                <a:solidFill>
-                  <a:srgbClr val="1B1D21">
-                    <a:alpha val="78000"/>
-                  </a:srgbClr>
-                </a:solidFill>
-                <a:latin typeface="Avenir Next"/>
-                <a:ea typeface="Avenir Next"/>
-                <a:cs typeface="Avenir Next"/>
-              </a:rPr>
-              <a:t>case slugs, wikilink conventions, citing </a:t>
-            </a:r>
-            <a:r>
-              <a:rPr lang="en-US" kern="100" sz="900" b="0" spc="350" dirty="0">
-                <a:solidFill>
-                  <a:srgbClr val="1B1D21">
-                    <a:alpha val="78000"/>
-                  </a:srgbClr>
-                </a:solidFill>
-                <a:latin typeface="Menlo"/>
-                <a:ea typeface="Menlo"/>
-                <a:cs typeface="Menlo"/>
-              </a:rPr>
-              <a:t>​</a:t>
-            </a:r>
-            <a:r>
-              <a:rPr lang="en-US" kern="100" sz="900" b="0" dirty="0">
-                <a:solidFill>
-                  <a:srgbClr val="1B1D21">
-                    <a:alpha val="78000"/>
-                  </a:srgbClr>
-                </a:solidFill>
-                <a:latin typeface="Menlo"/>
-                <a:ea typeface="Menlo"/>
-                <a:cs typeface="Menlo"/>
-              </a:rPr>
-              <a:t>raw/</a:t>
-            </a:r>
-            <a:r>
-              <a:rPr lang="en-US" kern="100" sz="900" b="0" spc="350" dirty="0">
-                <a:solidFill>
-                  <a:srgbClr val="1B1D21">
-                    <a:alpha val="78000"/>
-                  </a:srgbClr>
-                </a:solidFill>
-                <a:latin typeface="Menlo"/>
-                <a:ea typeface="Menlo"/>
-                <a:cs typeface="Menlo"/>
-              </a:rPr>
-              <a:t>​</a:t>
-            </a:r>
-            <a:r>
-              <a:rPr lang="en-US" kern="100" sz="1000" b="0" dirty="0">
-                <a:solidFill>
-                  <a:srgbClr val="1B1D21">
-                    <a:alpha val="78000"/>
-                  </a:srgbClr>
-                </a:solidFill>
-                <a:latin typeface="Avenir Next"/>
-                <a:ea typeface="Avenir Next"/>
-                <a:cs typeface="Avenir Next"/>
-              </a:rPr>
-              <a:t> for every non-</a:t>
-            </a:r>
-            <a:br>
-              <a:rPr lang="en-US" kern="100" sz="1000" b="0" dirty="0">
-                <a:solidFill>
-                  <a:srgbClr val="1B1D21">
-                    <a:alpha val="78000"/>
-                  </a:srgbClr>
-                </a:solidFill>
-                <a:latin typeface="Avenir Next"/>
-                <a:ea typeface="Avenir Next"/>
-                <a:cs typeface="Avenir Next"/>
-              </a:rPr>
-            </a:br>
-            <a:r>
-              <a:rPr lang="en-US" kern="100" sz="1000" b="0" dirty="0">
-                <a:solidFill>
-                  <a:srgbClr val="1B1D21">
-                    <a:alpha val="78000"/>
-                  </a:srgbClr>
-                </a:solidFill>
-                <a:latin typeface="Avenir Next"/>
-                <a:ea typeface="Avenir Next"/>
-                <a:cs typeface="Avenir Next"/>
-              </a:rPr>
-              <a:t>obvious claim.</a:t>
-            </a:r>
-            <a:endParaRPr lang="en-US" kern="100" sz="1000" b="0" dirty="0">
-              <a:solidFill>
-                <a:srgbClr val="1B1D21">
-                  <a:alpha val="78000"/>
-                </a:srgbClr>
-              </a:solidFill>
-              <a:latin typeface="Avenir Next"/>
-              <a:ea typeface="Avenir Next"/>
-              <a:cs typeface="Avenir Next"/>
-            </a:endParaRPr>
-          </a:p>
-        </p:txBody>
-      </p:sp>
-      <p:sp>
-        <p:nvSpPr>
-          <p:cNvPr id="11" name="Text 11"/>
-          <p:cNvSpPr txBox="1"/>
-          <p:nvPr/>
-        </p:nvSpPr>
-        <p:spPr>
-          <a:xfrm>
-            <a:off x="4356100" y="2194154"/>
-            <a:ext cx="447008" cy="368071"/>
-          </a:xfrm>
-          <a:prstGeom prst="rect">
-            <a:avLst/>
-          </a:prstGeom>
-          <a:noFill/>
-        </p:spPr>
-        <p:txBody>
-          <a:bodyPr wrap="none" lIns="0" tIns="0" rIns="0" bIns="0" rtlCol="0" anchor="t" anchorCtr="0">
-            <a:noAutofit/>
-          </a:bodyPr>
-          <a:lstStyle/>
-          <a:p>
-            <a:pPr algn="l">
-              <a:lnSpc>
-                <a:spcPct val="83333"/>
-              </a:lnSpc>
-              <a:spcBef>
-                <a:spcPts val="0"/>
-              </a:spcBef>
-              <a:spcAft>
-                <a:spcPts val="0"/>
-              </a:spcAft>
-              <a:buNone/>
-            </a:pPr>
-            <a:r>
-              <a:rPr lang="en-US" kern="100" sz="3200" b="0" spc="-100" dirty="0">
-                <a:solidFill>
-                  <a:srgbClr val="C8623A"/>
-                </a:solidFill>
-                <a:latin typeface="Avenir Next Ultra Light"/>
-                <a:ea typeface="Avenir Next Ultra Light"/>
-                <a:cs typeface="Avenir Next Ultra Light"/>
-              </a:rPr>
-              <a:t>§2</a:t>
-            </a:r>
-            <a:endParaRPr lang="en-US" kern="100" sz="3200" b="0" spc="-100" dirty="0">
-              <a:solidFill>
-                <a:srgbClr val="C8623A"/>
-              </a:solidFill>
-              <a:latin typeface="Avenir Next Ultra Light"/>
-              <a:ea typeface="Avenir Next Ultra Light"/>
-              <a:cs typeface="Avenir Next Ultra Light"/>
-            </a:endParaRPr>
-          </a:p>
-        </p:txBody>
-      </p:sp>
-      <p:sp>
-        <p:nvSpPr>
-          <p:cNvPr id="12" name="Text 12"/>
-          <p:cNvSpPr txBox="1"/>
-          <p:nvPr/>
-        </p:nvSpPr>
-        <p:spPr>
-          <a:xfrm>
-            <a:off x="4356100" y="2719222"/>
-            <a:ext cx="891334" cy="192888"/>
-          </a:xfrm>
-          <a:prstGeom prst="rect">
-            <a:avLst/>
-          </a:prstGeom>
-          <a:noFill/>
-        </p:spPr>
-        <p:txBody>
-          <a:bodyPr wrap="none" lIns="0" tIns="0" rIns="0" bIns="0" rtlCol="0" anchor="t" anchorCtr="0">
-            <a:noAutofit/>
-          </a:bodyPr>
-          <a:lstStyle/>
-          <a:p>
-            <a:pPr algn="l">
-              <a:lnSpc>
-                <a:spcPct val="100000"/>
-              </a:lnSpc>
-              <a:spcBef>
-                <a:spcPts val="0"/>
-              </a:spcBef>
-              <a:spcAft>
-                <a:spcPts val="0"/>
-              </a:spcAft>
-              <a:buNone/>
-            </a:pPr>
-            <a:r>
-              <a:rPr lang="en-US" kern="100" sz="1300" b="0" dirty="0">
-                <a:solidFill>
-                  <a:srgbClr val="1B1D21"/>
-                </a:solidFill>
-                <a:latin typeface="Avenir Next Demi Bold"/>
-                <a:ea typeface="Avenir Next Demi Bold"/>
-                <a:cs typeface="Avenir Next Demi Bold"/>
-              </a:rPr>
-              <a:t>Operations</a:t>
-            </a:r>
-            <a:endParaRPr lang="en-US" kern="100" sz="1300" b="0" dirty="0">
-              <a:solidFill>
-                <a:srgbClr val="1B1D21"/>
-              </a:solidFill>
-              <a:latin typeface="Avenir Next Demi Bold"/>
-              <a:ea typeface="Avenir Next Demi Bold"/>
-              <a:cs typeface="Avenir Next Demi Bold"/>
-            </a:endParaRPr>
-          </a:p>
-        </p:txBody>
-      </p:sp>
-      <p:sp>
-        <p:nvSpPr>
-          <p:cNvPr id="13" name="Text 13"/>
-          <p:cNvSpPr txBox="1"/>
-          <p:nvPr/>
-        </p:nvSpPr>
-        <p:spPr>
-          <a:xfrm>
-            <a:off x="4356100" y="2998264"/>
-            <a:ext cx="3575447" cy="574802"/>
-          </a:xfrm>
-          <a:prstGeom prst="rect">
-            <a:avLst/>
-          </a:prstGeom>
-          <a:noFill/>
-        </p:spPr>
-        <p:txBody>
-          <a:bodyPr wrap="none" lIns="0" tIns="0" rIns="0" bIns="0" rtlCol="0" anchor="t" anchorCtr="0">
-            <a:noAutofit/>
-          </a:bodyPr>
-          <a:lstStyle/>
-          <a:p>
-            <a:pPr algn="l">
-              <a:lnSpc>
-                <a:spcPct val="125000"/>
-              </a:lnSpc>
-              <a:spcBef>
-                <a:spcPts val="0"/>
-              </a:spcBef>
-              <a:spcAft>
-                <a:spcPts val="0"/>
-              </a:spcAft>
-              <a:buNone/>
-            </a:pPr>
-            <a:r>
-              <a:rPr lang="en-US" kern="100" sz="1000" b="0" dirty="0">
-                <a:solidFill>
-                  <a:srgbClr val="1B1D21">
-                    <a:alpha val="78000"/>
-                  </a:srgbClr>
-                </a:solidFill>
-                <a:latin typeface="Avenir Next"/>
-                <a:ea typeface="Avenir Next"/>
-                <a:cs typeface="Avenir Next"/>
-              </a:rPr>
-              <a:t>Step-by-step ingest, query and lint workflows — including</a:t>
-            </a:r>
-            <a:br>
-              <a:rPr lang="en-US" kern="100" sz="1000" b="0" dirty="0">
-                <a:solidFill>
-                  <a:srgbClr val="1B1D21">
-                    <a:alpha val="78000"/>
-                  </a:srgbClr>
-                </a:solidFill>
-                <a:latin typeface="Avenir Next"/>
-                <a:ea typeface="Avenir Next"/>
-                <a:cs typeface="Avenir Next"/>
-              </a:rPr>
-            </a:br>
-            <a:r>
-              <a:rPr lang="en-US" kern="100" sz="1000" b="0" dirty="0">
-                <a:solidFill>
-                  <a:srgbClr val="1B1D21">
-                    <a:alpha val="78000"/>
-                  </a:srgbClr>
-                </a:solidFill>
-                <a:latin typeface="Avenir Next"/>
-                <a:ea typeface="Avenir Next"/>
-                <a:cs typeface="Avenir Next"/>
-              </a:rPr>
-              <a:t>"run </a:t>
-            </a:r>
-            <a:r>
-              <a:rPr lang="en-US" kern="100" sz="900" b="0" spc="350" dirty="0">
-                <a:solidFill>
-                  <a:srgbClr val="1B1D21">
-                    <a:alpha val="78000"/>
-                  </a:srgbClr>
-                </a:solidFill>
-                <a:latin typeface="Menlo"/>
-                <a:ea typeface="Menlo"/>
-                <a:cs typeface="Menlo"/>
-              </a:rPr>
-              <a:t>​</a:t>
-            </a:r>
-            <a:r>
-              <a:rPr lang="en-US" kern="100" sz="900" b="0" dirty="0">
-                <a:solidFill>
-                  <a:srgbClr val="1B1D21">
-                    <a:alpha val="78000"/>
-                  </a:srgbClr>
-                </a:solidFill>
-                <a:latin typeface="Menlo"/>
-                <a:ea typeface="Menlo"/>
-                <a:cs typeface="Menlo"/>
-              </a:rPr>
-              <a:t>llm-wiki index</a:t>
-            </a:r>
-            <a:r>
-              <a:rPr lang="en-US" kern="100" sz="900" b="0" spc="350" dirty="0">
-                <a:solidFill>
-                  <a:srgbClr val="1B1D21">
-                    <a:alpha val="78000"/>
-                  </a:srgbClr>
-                </a:solidFill>
-                <a:latin typeface="Menlo"/>
-                <a:ea typeface="Menlo"/>
-                <a:cs typeface="Menlo"/>
-              </a:rPr>
-              <a:t>​</a:t>
-            </a:r>
-            <a:r>
-              <a:rPr lang="en-US" kern="100" sz="1000" b="0" dirty="0">
-                <a:solidFill>
-                  <a:srgbClr val="1B1D21">
-                    <a:alpha val="78000"/>
-                  </a:srgbClr>
-                </a:solidFill>
-                <a:latin typeface="Avenir Next"/>
-                <a:ea typeface="Avenir Next"/>
-                <a:cs typeface="Avenir Next"/>
-              </a:rPr>
-              <a:t> after editing pages" and how to flag</a:t>
-            </a:r>
-            <a:br>
-              <a:rPr lang="en-US" kern="100" sz="1000" b="0" dirty="0">
-                <a:solidFill>
-                  <a:srgbClr val="1B1D21">
-                    <a:alpha val="78000"/>
-                  </a:srgbClr>
-                </a:solidFill>
-                <a:latin typeface="Avenir Next"/>
-                <a:ea typeface="Avenir Next"/>
-                <a:cs typeface="Avenir Next"/>
-              </a:rPr>
-            </a:br>
-            <a:r>
-              <a:rPr lang="en-US" kern="100" sz="1000" b="0" dirty="0">
-                <a:solidFill>
-                  <a:srgbClr val="1B1D21">
-                    <a:alpha val="78000"/>
-                  </a:srgbClr>
-                </a:solidFill>
-                <a:latin typeface="Avenir Next"/>
-                <a:ea typeface="Avenir Next"/>
-                <a:cs typeface="Avenir Next"/>
-              </a:rPr>
-              <a:t>a contradiction.</a:t>
-            </a:r>
-            <a:endParaRPr lang="en-US" kern="100" sz="1000" b="0" dirty="0">
-              <a:solidFill>
-                <a:srgbClr val="1B1D21">
-                  <a:alpha val="78000"/>
-                </a:srgbClr>
-              </a:solidFill>
-              <a:latin typeface="Avenir Next"/>
-              <a:ea typeface="Avenir Next"/>
-              <a:cs typeface="Avenir Next"/>
-            </a:endParaRPr>
-          </a:p>
-        </p:txBody>
-      </p:sp>
-      <p:sp>
-        <p:nvSpPr>
-          <p:cNvPr id="14" name="Text 14"/>
-          <p:cNvSpPr txBox="1"/>
-          <p:nvPr/>
-        </p:nvSpPr>
-        <p:spPr>
-          <a:xfrm>
-            <a:off x="8140700" y="2194154"/>
-            <a:ext cx="447008" cy="368071"/>
-          </a:xfrm>
-          <a:prstGeom prst="rect">
-            <a:avLst/>
-          </a:prstGeom>
-          <a:noFill/>
-        </p:spPr>
-        <p:txBody>
-          <a:bodyPr wrap="none" lIns="0" tIns="0" rIns="0" bIns="0" rtlCol="0" anchor="t" anchorCtr="0">
-            <a:noAutofit/>
-          </a:bodyPr>
-          <a:lstStyle/>
-          <a:p>
-            <a:pPr algn="l">
-              <a:lnSpc>
-                <a:spcPct val="83333"/>
-              </a:lnSpc>
-              <a:spcBef>
-                <a:spcPts val="0"/>
-              </a:spcBef>
-              <a:spcAft>
-                <a:spcPts val="0"/>
-              </a:spcAft>
-              <a:buNone/>
-            </a:pPr>
-            <a:r>
-              <a:rPr lang="en-US" kern="100" sz="3200" b="0" spc="-100" dirty="0">
-                <a:solidFill>
-                  <a:srgbClr val="C8623A"/>
-                </a:solidFill>
-                <a:latin typeface="Avenir Next Ultra Light"/>
-                <a:ea typeface="Avenir Next Ultra Light"/>
-                <a:cs typeface="Avenir Next Ultra Light"/>
-              </a:rPr>
-              <a:t>§3</a:t>
-            </a:r>
-            <a:endParaRPr lang="en-US" kern="100" sz="3200" b="0" spc="-100" dirty="0">
-              <a:solidFill>
-                <a:srgbClr val="C8623A"/>
-              </a:solidFill>
-              <a:latin typeface="Avenir Next Ultra Light"/>
-              <a:ea typeface="Avenir Next Ultra Light"/>
-              <a:cs typeface="Avenir Next Ultra Light"/>
-            </a:endParaRPr>
-          </a:p>
-        </p:txBody>
-      </p:sp>
-      <p:sp>
-        <p:nvSpPr>
-          <p:cNvPr id="15" name="Text 15"/>
-          <p:cNvSpPr txBox="1"/>
-          <p:nvPr/>
-        </p:nvSpPr>
-        <p:spPr>
-          <a:xfrm>
-            <a:off x="8140700" y="2719222"/>
-            <a:ext cx="1091414" cy="192888"/>
-          </a:xfrm>
-          <a:prstGeom prst="rect">
-            <a:avLst/>
-          </a:prstGeom>
-          <a:noFill/>
-        </p:spPr>
-        <p:txBody>
-          <a:bodyPr wrap="none" lIns="0" tIns="0" rIns="0" bIns="0" rtlCol="0" anchor="t" anchorCtr="0">
-            <a:noAutofit/>
-          </a:bodyPr>
-          <a:lstStyle/>
-          <a:p>
-            <a:pPr algn="l">
-              <a:lnSpc>
-                <a:spcPct val="100000"/>
-              </a:lnSpc>
-              <a:spcBef>
-                <a:spcPts val="0"/>
-              </a:spcBef>
-              <a:spcAft>
-                <a:spcPts val="0"/>
-              </a:spcAft>
-              <a:buNone/>
-            </a:pPr>
-            <a:r>
-              <a:rPr lang="en-US" kern="100" sz="1300" b="0" dirty="0">
-                <a:solidFill>
-                  <a:srgbClr val="1B1D21"/>
-                </a:solidFill>
-                <a:latin typeface="Avenir Next Demi Bold"/>
-                <a:ea typeface="Avenir Next Demi Bold"/>
-                <a:cs typeface="Avenir Next Demi Bold"/>
-              </a:rPr>
-              <a:t>Working style</a:t>
-            </a:r>
-            <a:endParaRPr lang="en-US" kern="100" sz="1300" b="0" dirty="0">
-              <a:solidFill>
-                <a:srgbClr val="1B1D21"/>
-              </a:solidFill>
-              <a:latin typeface="Avenir Next Demi Bold"/>
-              <a:ea typeface="Avenir Next Demi Bold"/>
-              <a:cs typeface="Avenir Next Demi Bold"/>
-            </a:endParaRPr>
-          </a:p>
-        </p:txBody>
-      </p:sp>
-      <p:sp>
-        <p:nvSpPr>
-          <p:cNvPr id="16" name="Text 16"/>
-          <p:cNvSpPr txBox="1"/>
-          <p:nvPr/>
-        </p:nvSpPr>
-        <p:spPr>
-          <a:xfrm>
-            <a:off x="8140700" y="2998264"/>
-            <a:ext cx="3390844" cy="574802"/>
-          </a:xfrm>
-          <a:prstGeom prst="rect">
-            <a:avLst/>
-          </a:prstGeom>
-          <a:noFill/>
-        </p:spPr>
-        <p:txBody>
-          <a:bodyPr wrap="none" lIns="0" tIns="0" rIns="0" bIns="0" rtlCol="0" anchor="t" anchorCtr="0">
-            <a:noAutofit/>
-          </a:bodyPr>
-          <a:lstStyle/>
-          <a:p>
-            <a:pPr algn="l">
-              <a:lnSpc>
-                <a:spcPct val="125000"/>
-              </a:lnSpc>
-              <a:spcBef>
-                <a:spcPts val="0"/>
-              </a:spcBef>
-              <a:spcAft>
-                <a:spcPts val="0"/>
-              </a:spcAft>
-              <a:buNone/>
-            </a:pPr>
-            <a:r>
-              <a:rPr lang="en-US" kern="100" sz="1000" b="0" dirty="0">
-                <a:solidFill>
-                  <a:srgbClr val="1B1D21">
-                    <a:alpha val="78000"/>
-                  </a:srgbClr>
-                </a:solidFill>
-                <a:latin typeface="Avenir Next"/>
-                <a:ea typeface="Avenir Next"/>
-                <a:cs typeface="Avenir Next"/>
-              </a:rPr>
-              <a:t>Never touch </a:t>
-            </a:r>
-            <a:r>
-              <a:rPr lang="en-US" kern="100" sz="900" b="0" spc="350" dirty="0">
-                <a:solidFill>
-                  <a:srgbClr val="1B1D21">
-                    <a:alpha val="78000"/>
-                  </a:srgbClr>
-                </a:solidFill>
-                <a:latin typeface="Menlo"/>
-                <a:ea typeface="Menlo"/>
-                <a:cs typeface="Menlo"/>
-              </a:rPr>
-              <a:t>​</a:t>
-            </a:r>
-            <a:r>
-              <a:rPr lang="en-US" kern="100" sz="900" b="0" dirty="0">
-                <a:solidFill>
-                  <a:srgbClr val="1B1D21">
-                    <a:alpha val="78000"/>
-                  </a:srgbClr>
-                </a:solidFill>
-                <a:latin typeface="Menlo"/>
-                <a:ea typeface="Menlo"/>
-                <a:cs typeface="Menlo"/>
-              </a:rPr>
-              <a:t>raw/</a:t>
-            </a:r>
-            <a:r>
-              <a:rPr lang="en-US" kern="100" sz="900" b="0" spc="350" dirty="0">
-                <a:solidFill>
-                  <a:srgbClr val="1B1D21">
-                    <a:alpha val="78000"/>
-                  </a:srgbClr>
-                </a:solidFill>
-                <a:latin typeface="Menlo"/>
-                <a:ea typeface="Menlo"/>
-                <a:cs typeface="Menlo"/>
-              </a:rPr>
-              <a:t>​</a:t>
-            </a:r>
-            <a:r>
-              <a:rPr lang="en-US" kern="100" sz="1000" b="0" dirty="0">
-                <a:solidFill>
-                  <a:srgbClr val="1B1D21">
-                    <a:alpha val="78000"/>
-                  </a:srgbClr>
-                </a:solidFill>
-                <a:latin typeface="Avenir Next"/>
-                <a:ea typeface="Avenir Next"/>
-                <a:cs typeface="Avenir Next"/>
-              </a:rPr>
-              <a:t>; keep pages atomic; prefer updating</a:t>
-            </a:r>
-            <a:br>
-              <a:rPr lang="en-US" kern="100" sz="1000" b="0" dirty="0">
-                <a:solidFill>
-                  <a:srgbClr val="1B1D21">
-                    <a:alpha val="78000"/>
-                  </a:srgbClr>
-                </a:solidFill>
-                <a:latin typeface="Avenir Next"/>
-                <a:ea typeface="Avenir Next"/>
-                <a:cs typeface="Avenir Next"/>
-              </a:rPr>
-            </a:br>
-            <a:r>
-              <a:rPr lang="en-US" kern="100" sz="1000" b="0" dirty="0">
-                <a:solidFill>
-                  <a:srgbClr val="1B1D21">
-                    <a:alpha val="78000"/>
-                  </a:srgbClr>
-                </a:solidFill>
-                <a:latin typeface="Avenir Next"/>
-                <a:ea typeface="Avenir Next"/>
-                <a:cs typeface="Avenir Next"/>
-              </a:rPr>
-              <a:t>over duplicating; mark possible duplicates for the next</a:t>
-            </a:r>
-            <a:br>
-              <a:rPr lang="en-US" kern="100" sz="1000" b="0" dirty="0">
-                <a:solidFill>
-                  <a:srgbClr val="1B1D21">
-                    <a:alpha val="78000"/>
-                  </a:srgbClr>
-                </a:solidFill>
-                <a:latin typeface="Avenir Next"/>
-                <a:ea typeface="Avenir Next"/>
-                <a:cs typeface="Avenir Next"/>
-              </a:rPr>
-            </a:br>
-            <a:r>
-              <a:rPr lang="en-US" kern="100" sz="1000" b="0" dirty="0">
-                <a:solidFill>
-                  <a:srgbClr val="1B1D21">
-                    <a:alpha val="78000"/>
-                  </a:srgbClr>
-                </a:solidFill>
-                <a:latin typeface="Avenir Next"/>
-                <a:ea typeface="Avenir Next"/>
-                <a:cs typeface="Avenir Next"/>
-              </a:rPr>
-              <a:t>lint pass.</a:t>
-            </a:r>
-            <a:endParaRPr lang="en-US" kern="100" sz="1000" b="0" dirty="0">
-              <a:solidFill>
-                <a:srgbClr val="1B1D21">
-                  <a:alpha val="78000"/>
-                </a:srgbClr>
-              </a:solidFill>
-              <a:latin typeface="Avenir Next"/>
-              <a:ea typeface="Avenir Next"/>
-              <a:cs typeface="Avenir Next"/>
-            </a:endParaRPr>
-          </a:p>
-        </p:txBody>
-      </p:sp>
-      <p:sp>
-        <p:nvSpPr>
-          <p:cNvPr id="17" name="Shape 17"/>
-          <p:cNvSpPr/>
-          <p:nvPr/>
-        </p:nvSpPr>
-        <p:spPr>
-          <a:xfrm>
-            <a:off x="571500" y="4826000"/>
-            <a:ext cx="11049000" cy="807641"/>
-          </a:xfrm>
-          <a:prstGeom prst="roundRect">
-            <a:avLst>
-              <a:gd name="adj" fmla="val 12580"/>
-            </a:avLst>
-          </a:prstGeom>
-          <a:solidFill>
-            <a:srgbClr val="1B1D21"/>
-          </a:solidFill>
-          <a:ln>
-            <a:noFill/>
-          </a:ln>
-        </p:spPr>
-        <p:txBody>
-          <a:bodyPr rtlCol="0" anchor="ctr"/>
-          <a:lstStyle/>
-          <a:p>
-            <a:endParaRPr lang="en-US" dirty="0"/>
-          </a:p>
-        </p:txBody>
-      </p:sp>
-      <p:sp>
-        <p:nvSpPr>
-          <p:cNvPr id="18" name="Text 18"/>
-          <p:cNvSpPr txBox="1"/>
-          <p:nvPr/>
-        </p:nvSpPr>
-        <p:spPr>
-          <a:xfrm>
-            <a:off x="800100" y="5001197"/>
-            <a:ext cx="8767016" cy="436904"/>
-          </a:xfrm>
-          <a:prstGeom prst="rect">
-            <a:avLst/>
-          </a:prstGeom>
-          <a:noFill/>
-        </p:spPr>
-        <p:txBody>
-          <a:bodyPr wrap="none" lIns="0" tIns="0" rIns="0" bIns="0" rtlCol="0" anchor="t" anchorCtr="0">
-            <a:noAutofit/>
-          </a:bodyPr>
-          <a:lstStyle/>
-          <a:p>
-            <a:pPr algn="l">
-              <a:lnSpc>
-                <a:spcPct val="133333"/>
-              </a:lnSpc>
-              <a:spcBef>
-                <a:spcPts val="0"/>
-              </a:spcBef>
-              <a:spcAft>
-                <a:spcPts val="0"/>
-              </a:spcAft>
-              <a:buNone/>
-            </a:pPr>
-            <a:r>
-              <a:rPr lang="en-US" kern="100" sz="1050" b="0" dirty="0">
-                <a:solidFill>
-                  <a:srgbClr val="F6F3EC"/>
-                </a:solidFill>
-                <a:latin typeface="Menlo"/>
-                <a:ea typeface="Menlo"/>
-                <a:cs typeface="Menlo"/>
-              </a:rPr>
-              <a:t>$ cd ~/notes-wiki &amp;&amp; claude          </a:t>
-            </a:r>
-            <a:r>
-              <a:rPr lang="en-US" kern="100" sz="1050" b="0" dirty="0">
-                <a:solidFill>
-                  <a:srgbClr val="F6F3EC">
-                    <a:alpha val="50000"/>
-                  </a:srgbClr>
-                </a:solidFill>
-                <a:latin typeface="Menlo"/>
-                <a:ea typeface="Menlo"/>
-                <a:cs typeface="Menlo"/>
-              </a:rPr>
-              <a:t># CLAUDE.md is read automatically; AGENTS.md serves Codex and others</a:t>
-            </a:r>
-            <a:br>
-              <a:rPr lang="en-US" kern="100" sz="1050" b="0" dirty="0">
-                <a:solidFill>
-                  <a:srgbClr val="F6F3EC"/>
-                </a:solidFill>
-                <a:latin typeface="Menlo"/>
-                <a:ea typeface="Menlo"/>
-                <a:cs typeface="Menlo"/>
-              </a:rPr>
-            </a:br>
-            <a:r>
-              <a:rPr lang="en-US" kern="100" sz="1050" b="0" dirty="0">
-                <a:solidFill>
-                  <a:srgbClr val="F6F3EC"/>
-                </a:solidFill>
-                <a:latin typeface="Menlo"/>
-                <a:ea typeface="Menlo"/>
-                <a:cs typeface="Menlo"/>
-              </a:rPr>
-              <a:t>&gt; ingest raw/podcast-notes.md and tell me what changed in the overview</a:t>
-            </a:r>
-            <a:endParaRPr lang="en-US" kern="100" sz="1050" b="0" dirty="0">
-              <a:solidFill>
-                <a:srgbClr val="F6F3EC"/>
-              </a:solidFill>
-              <a:latin typeface="Menlo"/>
-              <a:ea typeface="Menlo"/>
-              <a:cs typeface="Menlo"/>
-            </a:endParaRPr>
-          </a:p>
-        </p:txBody>
-      </p:sp>
-      <p:pic>
-        <p:nvPicPr>
-          <p:cNvPr id="19" name="Picture 19" descr=""/>
-          <p:cNvPicPr>
-            <a:picLocks noChangeAspect="1"/>
-          </p:cNvPicPr>
-          <p:nvPr/>
-        </p:nvPicPr>
-        <p:blipFill>
-          <a:blip r:embed="rId2"/>
-          <a:srcRect/>
-          <a:stretch>
-            <a:fillRect/>
-          </a:stretch>
-        </p:blipFill>
-        <p:spPr>
-          <a:xfrm>
-            <a:off x="342900" y="6451600"/>
-            <a:ext cx="900853" cy="177800"/>
-          </a:xfrm>
-          <a:prstGeom prst="rect">
-            <a:avLst/>
-          </a:prstGeom>
-        </p:spPr>
-      </p:pic>
-      <p:sp>
-        <p:nvSpPr>
-          <p:cNvPr id="20" name="Text 20"/>
-          <p:cNvSpPr txBox="1"/>
-          <p:nvPr/>
-        </p:nvSpPr>
-        <p:spPr>
-          <a:xfrm>
-            <a:off x="11704538" y="6459106"/>
-            <a:ext cx="157262" cy="160769"/>
-          </a:xfrm>
-          <a:prstGeom prst="rect">
-            <a:avLst/>
-          </a:prstGeom>
-          <a:noFill/>
-        </p:spPr>
-        <p:txBody>
-          <a:bodyPr wrap="none" lIns="0" tIns="0" rIns="0" bIns="0" rtlCol="0" anchor="t" anchorCtr="0">
-            <a:noAutofit/>
-          </a:bodyPr>
-          <a:lstStyle/>
-          <a:p>
-            <a:pPr algn="l">
-              <a:lnSpc>
-                <a:spcPct val="115741"/>
-              </a:lnSpc>
-              <a:spcBef>
-                <a:spcPts val="0"/>
-              </a:spcBef>
-              <a:spcAft>
-                <a:spcPts val="0"/>
-              </a:spcAft>
-              <a:buNone/>
-            </a:pPr>
-            <a:r>
-              <a:rPr lang="en-US" kern="100" sz="900" b="0" spc="20" dirty="0">
-                <a:solidFill>
-                  <a:srgbClr val="1B1D21">
-                    <a:alpha val="55000"/>
-                  </a:srgbClr>
-                </a:solidFill>
-                <a:latin typeface="Avenir Next Demi Bold"/>
-                <a:ea typeface="Avenir Next Demi Bold"/>
-                <a:cs typeface="Avenir Next Demi Bold"/>
-              </a:rPr>
-              <a:t>19</a:t>
-            </a:r>
-            <a:endParaRPr lang="en-US" kern="100" sz="900" b="0" spc="20" dirty="0">
-              <a:solidFill>
-                <a:srgbClr val="1B1D21">
-                  <a:alpha val="55000"/>
-                </a:srgbClr>
-              </a:solidFill>
-              <a:latin typeface="Avenir Next Demi Bold"/>
-              <a:ea typeface="Avenir Next Demi Bold"/>
-              <a:cs typeface="Avenir Next Demi Bold"/>
-            </a:endParaRPr>
-          </a:p>
-        </p:txBody>
-      </p:sp>
-      <p:sp>
-        <p:nvSpPr>
-          <p:cNvPr id="21" name="Text 21"/>
-          <p:cNvSpPr txBox="1"/>
-          <p:nvPr/>
-        </p:nvSpPr>
-        <p:spPr>
-          <a:xfrm>
-            <a:off x="1358900" y="6459106"/>
-            <a:ext cx="1137539" cy="160769"/>
-          </a:xfrm>
-          <a:prstGeom prst="rect">
-            <a:avLst/>
-          </a:prstGeom>
-          <a:noFill/>
-        </p:spPr>
-        <p:txBody>
-          <a:bodyPr wrap="none" lIns="0" tIns="0" rIns="0" bIns="0" rtlCol="0" anchor="t" anchorCtr="0">
-            <a:noAutofit/>
-          </a:bodyPr>
-          <a:lstStyle/>
-          <a:p>
-            <a:pPr algn="l">
-              <a:lnSpc>
-                <a:spcPct val="115741"/>
-              </a:lnSpc>
-              <a:spcBef>
-                <a:spcPts val="0"/>
-              </a:spcBef>
-              <a:spcAft>
-                <a:spcPts val="0"/>
-              </a:spcAft>
-              <a:buNone/>
-            </a:pPr>
-            <a:r>
-              <a:rPr lang="en-US" kern="100" sz="900" b="0" spc="20" dirty="0">
-                <a:solidFill>
-                  <a:srgbClr val="1B1D21">
-                    <a:alpha val="38500"/>
-                  </a:srgbClr>
-                </a:solidFill>
-                <a:latin typeface="Avenir Next"/>
-                <a:ea typeface="Avenir Next"/>
-                <a:cs typeface="Avenir Next"/>
-              </a:rPr>
-              <a:t>llm-wiki · user guide</a:t>
-            </a:r>
-            <a:endParaRPr lang="en-US" kern="100" sz="900" b="0" spc="20" dirty="0">
-              <a:solidFill>
-                <a:srgbClr val="1B1D21">
-                  <a:alpha val="38500"/>
                 </a:srgbClr>
               </a:solidFill>
               <a:latin typeface="Avenir Next"/>
@@ -15821,6 +15691,1389 @@
     <p:bg>
       <p:bgPr>
         <a:solidFill>
+          <a:srgbClr val="FFFFFF"/>
+        </a:solidFill>
+        <a:effectLst/>
+      </p:bgPr>
+    </p:bg>
+    <p:spTree>
+      <p:nvGrpSpPr>
+        <p:cNvPr id="1" name=""/>
+        <p:cNvGrpSpPr/>
+        <p:nvPr/>
+      </p:nvGrpSpPr>
+      <p:grpSpPr>
+        <a:xfrm>
+          <a:off x="0" y="0"/>
+          <a:ext cx="0" cy="0"/>
+          <a:chOff x="0" y="0"/>
+          <a:chExt cx="0" cy="0"/>
+        </a:xfrm>
+      </p:grpSpPr>
+      <p:sp>
+        <p:nvSpPr>
+          <p:cNvPr id="2" name="Text 2"/>
+          <p:cNvSpPr txBox="1"/>
+          <p:nvPr/>
+        </p:nvSpPr>
+        <p:spPr>
+          <a:xfrm>
+            <a:off x="571500" y="448247"/>
+            <a:ext cx="881428" cy="116903"/>
+          </a:xfrm>
+          <a:prstGeom prst="rect">
+            <a:avLst/>
+          </a:prstGeom>
+          <a:noFill/>
+        </p:spPr>
+        <p:txBody>
+          <a:bodyPr wrap="none" lIns="0" tIns="0" rIns="0" bIns="0" rtlCol="0" anchor="t" anchorCtr="0">
+            <a:noAutofit/>
+          </a:bodyPr>
+          <a:lstStyle/>
+          <a:p>
+            <a:pPr algn="l">
+              <a:lnSpc>
+                <a:spcPct val="98958"/>
+              </a:lnSpc>
+              <a:spcBef>
+                <a:spcPts val="0"/>
+              </a:spcBef>
+              <a:spcAft>
+                <a:spcPts val="0"/>
+              </a:spcAft>
+              <a:buNone/>
+            </a:pPr>
+            <a:r>
+              <a:rPr lang="en-US" kern="100" sz="800" b="1" cap="all" spc="125" dirty="0">
+                <a:solidFill>
+                  <a:srgbClr val="C8623A"/>
+                </a:solidFill>
+                <a:latin typeface="Menlo"/>
+                <a:ea typeface="Menlo"/>
+                <a:cs typeface="Menlo"/>
+              </a:rPr>
+              <a:t>04 · Agents</a:t>
+            </a:r>
+            <a:endParaRPr lang="en-US" kern="100" sz="800" b="1" cap="all" spc="125" dirty="0">
+              <a:solidFill>
+                <a:srgbClr val="C8623A"/>
+              </a:solidFill>
+              <a:latin typeface="Menlo"/>
+              <a:ea typeface="Menlo"/>
+              <a:cs typeface="Menlo"/>
+            </a:endParaRPr>
+          </a:p>
+        </p:txBody>
+      </p:sp>
+      <p:sp>
+        <p:nvSpPr>
+          <p:cNvPr id="3" name="Text 3"/>
+          <p:cNvSpPr txBox="1"/>
+          <p:nvPr/>
+        </p:nvSpPr>
+        <p:spPr>
+          <a:xfrm>
+            <a:off x="571500" y="725449"/>
+            <a:ext cx="8762683" cy="343891"/>
+          </a:xfrm>
+          <a:prstGeom prst="rect">
+            <a:avLst/>
+          </a:prstGeom>
+          <a:noFill/>
+        </p:spPr>
+        <p:txBody>
+          <a:bodyPr wrap="none" lIns="0" tIns="0" rIns="0" bIns="0" rtlCol="0" anchor="t" anchorCtr="0">
+            <a:noAutofit/>
+          </a:bodyPr>
+          <a:lstStyle/>
+          <a:p>
+            <a:pPr algn="l">
+              <a:lnSpc>
+                <a:spcPct val="87500"/>
+              </a:lnSpc>
+              <a:spcBef>
+                <a:spcPts val="0"/>
+              </a:spcBef>
+              <a:spcAft>
+                <a:spcPts val="0"/>
+              </a:spcAft>
+              <a:buNone/>
+            </a:pPr>
+            <a:r>
+              <a:rPr lang="en-US" kern="100" sz="2800" b="0" spc="-50" dirty="0">
+                <a:solidFill>
+                  <a:srgbClr val="1B1D21"/>
+                </a:solidFill>
+                <a:latin typeface="Avenir Next Ultra Light"/>
+                <a:ea typeface="Avenir Next Ultra Light"/>
+                <a:cs typeface="Avenir Next Ultra Light"/>
+              </a:rPr>
+              <a:t>The schema turns any coding agent into the </a:t>
+            </a:r>
+            <a:r>
+              <a:rPr lang="en-US" kern="100" sz="2800" b="0" i="1" spc="-50" dirty="0">
+                <a:solidFill>
+                  <a:srgbClr val="C8623A"/>
+                </a:solidFill>
+                <a:latin typeface="Avenir Next"/>
+                <a:ea typeface="Avenir Next"/>
+                <a:cs typeface="Avenir Next"/>
+              </a:rPr>
+              <a:t>maintainer</a:t>
+            </a:r>
+            <a:r>
+              <a:rPr lang="en-US" kern="100" sz="2800" b="0" spc="-50" dirty="0">
+                <a:solidFill>
+                  <a:srgbClr val="1B1D21"/>
+                </a:solidFill>
+                <a:latin typeface="Avenir Next Ultra Light"/>
+                <a:ea typeface="Avenir Next Ultra Light"/>
+                <a:cs typeface="Avenir Next Ultra Light"/>
+              </a:rPr>
+              <a:t>.</a:t>
+            </a:r>
+            <a:endParaRPr lang="en-US" kern="100" sz="2800" b="0" spc="-50" dirty="0">
+              <a:solidFill>
+                <a:srgbClr val="1B1D21"/>
+              </a:solidFill>
+              <a:latin typeface="Avenir Next Ultra Light"/>
+              <a:ea typeface="Avenir Next Ultra Light"/>
+              <a:cs typeface="Avenir Next Ultra Light"/>
+            </a:endParaRPr>
+          </a:p>
+        </p:txBody>
+      </p:sp>
+      <p:sp>
+        <p:nvSpPr>
+          <p:cNvPr id="4" name="Shape 4"/>
+          <p:cNvSpPr/>
+          <p:nvPr/>
+        </p:nvSpPr>
+        <p:spPr>
+          <a:xfrm>
+            <a:off x="571500" y="1841500"/>
+            <a:ext cx="381000" cy="19050"/>
+          </a:xfrm>
+          <a:prstGeom prst="rect">
+            <a:avLst/>
+          </a:prstGeom>
+          <a:solidFill>
+            <a:srgbClr val="C8623A"/>
+          </a:solidFill>
+          <a:ln>
+            <a:noFill/>
+          </a:ln>
+        </p:spPr>
+        <p:txBody>
+          <a:bodyPr rtlCol="0" anchor="ctr"/>
+          <a:lstStyle/>
+          <a:p>
+            <a:endParaRPr lang="en-US" dirty="0"/>
+          </a:p>
+        </p:txBody>
+      </p:sp>
+      <p:sp>
+        <p:nvSpPr>
+          <p:cNvPr id="5" name="Shape 5"/>
+          <p:cNvSpPr/>
+          <p:nvPr/>
+        </p:nvSpPr>
+        <p:spPr>
+          <a:xfrm>
+            <a:off x="2797572" y="3207941"/>
+            <a:ext cx="364232" cy="158750"/>
+          </a:xfrm>
+          <a:prstGeom prst="roundRect">
+            <a:avLst>
+              <a:gd name="adj" fmla="val 20000"/>
+            </a:avLst>
+          </a:prstGeom>
+          <a:solidFill>
+            <a:srgbClr val="1B1D21">
+              <a:alpha val="6000"/>
+            </a:srgbClr>
+          </a:solidFill>
+          <a:ln>
+            <a:noFill/>
+          </a:ln>
+        </p:spPr>
+        <p:txBody>
+          <a:bodyPr rtlCol="0" anchor="ctr"/>
+          <a:lstStyle/>
+          <a:p>
+            <a:endParaRPr lang="en-US" dirty="0"/>
+          </a:p>
+        </p:txBody>
+      </p:sp>
+      <p:sp>
+        <p:nvSpPr>
+          <p:cNvPr id="6" name="Shape 6"/>
+          <p:cNvSpPr/>
+          <p:nvPr/>
+        </p:nvSpPr>
+        <p:spPr>
+          <a:xfrm>
+            <a:off x="4632623" y="3207941"/>
+            <a:ext cx="1052314" cy="158750"/>
+          </a:xfrm>
+          <a:prstGeom prst="roundRect">
+            <a:avLst>
+              <a:gd name="adj" fmla="val 20000"/>
+            </a:avLst>
+          </a:prstGeom>
+          <a:solidFill>
+            <a:srgbClr val="1B1D21">
+              <a:alpha val="6000"/>
+            </a:srgbClr>
+          </a:solidFill>
+          <a:ln>
+            <a:noFill/>
+          </a:ln>
+        </p:spPr>
+        <p:txBody>
+          <a:bodyPr rtlCol="0" anchor="ctr"/>
+          <a:lstStyle/>
+          <a:p>
+            <a:endParaRPr lang="en-US" dirty="0"/>
+          </a:p>
+        </p:txBody>
+      </p:sp>
+      <p:sp>
+        <p:nvSpPr>
+          <p:cNvPr id="7" name="Shape 7"/>
+          <p:cNvSpPr/>
+          <p:nvPr/>
+        </p:nvSpPr>
+        <p:spPr>
+          <a:xfrm>
+            <a:off x="8883452" y="3017441"/>
+            <a:ext cx="364232" cy="158750"/>
+          </a:xfrm>
+          <a:prstGeom prst="roundRect">
+            <a:avLst>
+              <a:gd name="adj" fmla="val 20000"/>
+            </a:avLst>
+          </a:prstGeom>
+          <a:solidFill>
+            <a:srgbClr val="1B1D21">
+              <a:alpha val="6000"/>
+            </a:srgbClr>
+          </a:solidFill>
+          <a:ln>
+            <a:noFill/>
+          </a:ln>
+        </p:spPr>
+        <p:txBody>
+          <a:bodyPr rtlCol="0" anchor="ctr"/>
+          <a:lstStyle/>
+          <a:p>
+            <a:endParaRPr lang="en-US" dirty="0"/>
+          </a:p>
+        </p:txBody>
+      </p:sp>
+      <p:sp>
+        <p:nvSpPr>
+          <p:cNvPr id="8" name="Text 8"/>
+          <p:cNvSpPr txBox="1"/>
+          <p:nvPr/>
+        </p:nvSpPr>
+        <p:spPr>
+          <a:xfrm>
+            <a:off x="571500" y="2194154"/>
+            <a:ext cx="447008" cy="368071"/>
+          </a:xfrm>
+          <a:prstGeom prst="rect">
+            <a:avLst/>
+          </a:prstGeom>
+          <a:noFill/>
+        </p:spPr>
+        <p:txBody>
+          <a:bodyPr wrap="none" lIns="0" tIns="0" rIns="0" bIns="0" rtlCol="0" anchor="t" anchorCtr="0">
+            <a:noAutofit/>
+          </a:bodyPr>
+          <a:lstStyle/>
+          <a:p>
+            <a:pPr algn="l">
+              <a:lnSpc>
+                <a:spcPct val="83333"/>
+              </a:lnSpc>
+              <a:spcBef>
+                <a:spcPts val="0"/>
+              </a:spcBef>
+              <a:spcAft>
+                <a:spcPts val="0"/>
+              </a:spcAft>
+              <a:buNone/>
+            </a:pPr>
+            <a:r>
+              <a:rPr lang="en-US" kern="100" sz="3200" b="0" spc="-100" dirty="0">
+                <a:solidFill>
+                  <a:srgbClr val="C8623A"/>
+                </a:solidFill>
+                <a:latin typeface="Avenir Next Ultra Light"/>
+                <a:ea typeface="Avenir Next Ultra Light"/>
+                <a:cs typeface="Avenir Next Ultra Light"/>
+              </a:rPr>
+              <a:t>§1</a:t>
+            </a:r>
+            <a:endParaRPr lang="en-US" kern="100" sz="3200" b="0" spc="-100" dirty="0">
+              <a:solidFill>
+                <a:srgbClr val="C8623A"/>
+              </a:solidFill>
+              <a:latin typeface="Avenir Next Ultra Light"/>
+              <a:ea typeface="Avenir Next Ultra Light"/>
+              <a:cs typeface="Avenir Next Ultra Light"/>
+            </a:endParaRPr>
+          </a:p>
+        </p:txBody>
+      </p:sp>
+      <p:sp>
+        <p:nvSpPr>
+          <p:cNvPr id="9" name="Text 9"/>
+          <p:cNvSpPr txBox="1"/>
+          <p:nvPr/>
+        </p:nvSpPr>
+        <p:spPr>
+          <a:xfrm>
+            <a:off x="571500" y="2719222"/>
+            <a:ext cx="1726327" cy="192888"/>
+          </a:xfrm>
+          <a:prstGeom prst="rect">
+            <a:avLst/>
+          </a:prstGeom>
+          <a:noFill/>
+        </p:spPr>
+        <p:txBody>
+          <a:bodyPr wrap="none" lIns="0" tIns="0" rIns="0" bIns="0" rtlCol="0" anchor="t" anchorCtr="0">
+            <a:noAutofit/>
+          </a:bodyPr>
+          <a:lstStyle/>
+          <a:p>
+            <a:pPr algn="l">
+              <a:lnSpc>
+                <a:spcPct val="100000"/>
+              </a:lnSpc>
+              <a:spcBef>
+                <a:spcPts val="0"/>
+              </a:spcBef>
+              <a:spcAft>
+                <a:spcPts val="0"/>
+              </a:spcAft>
+              <a:buNone/>
+            </a:pPr>
+            <a:r>
+              <a:rPr lang="en-US" kern="100" sz="1300" b="0" dirty="0">
+                <a:solidFill>
+                  <a:srgbClr val="1B1D21"/>
+                </a:solidFill>
+                <a:latin typeface="Avenir Next Demi Bold"/>
+                <a:ea typeface="Avenir Next Demi Bold"/>
+                <a:cs typeface="Avenir Next Demi Bold"/>
+              </a:rPr>
+              <a:t>Layout &amp; page format</a:t>
+            </a:r>
+            <a:endParaRPr lang="en-US" kern="100" sz="1300" b="0" dirty="0">
+              <a:solidFill>
+                <a:srgbClr val="1B1D21"/>
+              </a:solidFill>
+              <a:latin typeface="Avenir Next Demi Bold"/>
+              <a:ea typeface="Avenir Next Demi Bold"/>
+              <a:cs typeface="Avenir Next Demi Bold"/>
+            </a:endParaRPr>
+          </a:p>
+        </p:txBody>
+      </p:sp>
+      <p:sp>
+        <p:nvSpPr>
+          <p:cNvPr id="10" name="Text 10"/>
+          <p:cNvSpPr txBox="1"/>
+          <p:nvPr/>
+        </p:nvSpPr>
+        <p:spPr>
+          <a:xfrm>
+            <a:off x="571500" y="2998264"/>
+            <a:ext cx="3564199" cy="574802"/>
+          </a:xfrm>
+          <a:prstGeom prst="rect">
+            <a:avLst/>
+          </a:prstGeom>
+          <a:noFill/>
+        </p:spPr>
+        <p:txBody>
+          <a:bodyPr wrap="none" lIns="0" tIns="0" rIns="0" bIns="0" rtlCol="0" anchor="t" anchorCtr="0">
+            <a:noAutofit/>
+          </a:bodyPr>
+          <a:lstStyle/>
+          <a:p>
+            <a:pPr algn="l">
+              <a:lnSpc>
+                <a:spcPct val="125000"/>
+              </a:lnSpc>
+              <a:spcBef>
+                <a:spcPts val="0"/>
+              </a:spcBef>
+              <a:spcAft>
+                <a:spcPts val="0"/>
+              </a:spcAft>
+              <a:buNone/>
+            </a:pPr>
+            <a:r>
+              <a:rPr lang="en-US" kern="100" sz="1000" b="0" dirty="0">
+                <a:solidFill>
+                  <a:srgbClr val="1B1D21">
+                    <a:alpha val="78000"/>
+                  </a:srgbClr>
+                </a:solidFill>
+                <a:latin typeface="Avenir Next"/>
+                <a:ea typeface="Avenir Next"/>
+                <a:cs typeface="Avenir Next"/>
+              </a:rPr>
+              <a:t>Where each page type lives, the frontmatter keys, kebab-</a:t>
+            </a:r>
+            <a:br>
+              <a:rPr lang="en-US" kern="100" sz="1000" b="0" dirty="0">
+                <a:solidFill>
+                  <a:srgbClr val="1B1D21">
+                    <a:alpha val="78000"/>
+                  </a:srgbClr>
+                </a:solidFill>
+                <a:latin typeface="Avenir Next"/>
+                <a:ea typeface="Avenir Next"/>
+                <a:cs typeface="Avenir Next"/>
+              </a:rPr>
+            </a:br>
+            <a:r>
+              <a:rPr lang="en-US" kern="100" sz="1000" b="0" dirty="0">
+                <a:solidFill>
+                  <a:srgbClr val="1B1D21">
+                    <a:alpha val="78000"/>
+                  </a:srgbClr>
+                </a:solidFill>
+                <a:latin typeface="Avenir Next"/>
+                <a:ea typeface="Avenir Next"/>
+                <a:cs typeface="Avenir Next"/>
+              </a:rPr>
+              <a:t>case slugs, wikilink conventions, citing </a:t>
+            </a:r>
+            <a:r>
+              <a:rPr lang="en-US" kern="100" sz="900" b="0" spc="350" dirty="0">
+                <a:solidFill>
+                  <a:srgbClr val="1B1D21">
+                    <a:alpha val="78000"/>
+                  </a:srgbClr>
+                </a:solidFill>
+                <a:latin typeface="Menlo"/>
+                <a:ea typeface="Menlo"/>
+                <a:cs typeface="Menlo"/>
+              </a:rPr>
+              <a:t>​</a:t>
+            </a:r>
+            <a:r>
+              <a:rPr lang="en-US" kern="100" sz="900" b="0" dirty="0">
+                <a:solidFill>
+                  <a:srgbClr val="1B1D21">
+                    <a:alpha val="78000"/>
+                  </a:srgbClr>
+                </a:solidFill>
+                <a:latin typeface="Menlo"/>
+                <a:ea typeface="Menlo"/>
+                <a:cs typeface="Menlo"/>
+              </a:rPr>
+              <a:t>raw/</a:t>
+            </a:r>
+            <a:r>
+              <a:rPr lang="en-US" kern="100" sz="900" b="0" spc="350" dirty="0">
+                <a:solidFill>
+                  <a:srgbClr val="1B1D21">
+                    <a:alpha val="78000"/>
+                  </a:srgbClr>
+                </a:solidFill>
+                <a:latin typeface="Menlo"/>
+                <a:ea typeface="Menlo"/>
+                <a:cs typeface="Menlo"/>
+              </a:rPr>
+              <a:t>​</a:t>
+            </a:r>
+            <a:r>
+              <a:rPr lang="en-US" kern="100" sz="1000" b="0" dirty="0">
+                <a:solidFill>
+                  <a:srgbClr val="1B1D21">
+                    <a:alpha val="78000"/>
+                  </a:srgbClr>
+                </a:solidFill>
+                <a:latin typeface="Avenir Next"/>
+                <a:ea typeface="Avenir Next"/>
+                <a:cs typeface="Avenir Next"/>
+              </a:rPr>
+              <a:t> for every non-</a:t>
+            </a:r>
+            <a:br>
+              <a:rPr lang="en-US" kern="100" sz="1000" b="0" dirty="0">
+                <a:solidFill>
+                  <a:srgbClr val="1B1D21">
+                    <a:alpha val="78000"/>
+                  </a:srgbClr>
+                </a:solidFill>
+                <a:latin typeface="Avenir Next"/>
+                <a:ea typeface="Avenir Next"/>
+                <a:cs typeface="Avenir Next"/>
+              </a:rPr>
+            </a:br>
+            <a:r>
+              <a:rPr lang="en-US" kern="100" sz="1000" b="0" dirty="0">
+                <a:solidFill>
+                  <a:srgbClr val="1B1D21">
+                    <a:alpha val="78000"/>
+                  </a:srgbClr>
+                </a:solidFill>
+                <a:latin typeface="Avenir Next"/>
+                <a:ea typeface="Avenir Next"/>
+                <a:cs typeface="Avenir Next"/>
+              </a:rPr>
+              <a:t>obvious claim.</a:t>
+            </a:r>
+            <a:endParaRPr lang="en-US" kern="100" sz="1000" b="0" dirty="0">
+              <a:solidFill>
+                <a:srgbClr val="1B1D21">
+                  <a:alpha val="78000"/>
+                </a:srgbClr>
+              </a:solidFill>
+              <a:latin typeface="Avenir Next"/>
+              <a:ea typeface="Avenir Next"/>
+              <a:cs typeface="Avenir Next"/>
+            </a:endParaRPr>
+          </a:p>
+        </p:txBody>
+      </p:sp>
+      <p:sp>
+        <p:nvSpPr>
+          <p:cNvPr id="11" name="Text 11"/>
+          <p:cNvSpPr txBox="1"/>
+          <p:nvPr/>
+        </p:nvSpPr>
+        <p:spPr>
+          <a:xfrm>
+            <a:off x="4356100" y="2194154"/>
+            <a:ext cx="447008" cy="368071"/>
+          </a:xfrm>
+          <a:prstGeom prst="rect">
+            <a:avLst/>
+          </a:prstGeom>
+          <a:noFill/>
+        </p:spPr>
+        <p:txBody>
+          <a:bodyPr wrap="none" lIns="0" tIns="0" rIns="0" bIns="0" rtlCol="0" anchor="t" anchorCtr="0">
+            <a:noAutofit/>
+          </a:bodyPr>
+          <a:lstStyle/>
+          <a:p>
+            <a:pPr algn="l">
+              <a:lnSpc>
+                <a:spcPct val="83333"/>
+              </a:lnSpc>
+              <a:spcBef>
+                <a:spcPts val="0"/>
+              </a:spcBef>
+              <a:spcAft>
+                <a:spcPts val="0"/>
+              </a:spcAft>
+              <a:buNone/>
+            </a:pPr>
+            <a:r>
+              <a:rPr lang="en-US" kern="100" sz="3200" b="0" spc="-100" dirty="0">
+                <a:solidFill>
+                  <a:srgbClr val="C8623A"/>
+                </a:solidFill>
+                <a:latin typeface="Avenir Next Ultra Light"/>
+                <a:ea typeface="Avenir Next Ultra Light"/>
+                <a:cs typeface="Avenir Next Ultra Light"/>
+              </a:rPr>
+              <a:t>§2</a:t>
+            </a:r>
+            <a:endParaRPr lang="en-US" kern="100" sz="3200" b="0" spc="-100" dirty="0">
+              <a:solidFill>
+                <a:srgbClr val="C8623A"/>
+              </a:solidFill>
+              <a:latin typeface="Avenir Next Ultra Light"/>
+              <a:ea typeface="Avenir Next Ultra Light"/>
+              <a:cs typeface="Avenir Next Ultra Light"/>
+            </a:endParaRPr>
+          </a:p>
+        </p:txBody>
+      </p:sp>
+      <p:sp>
+        <p:nvSpPr>
+          <p:cNvPr id="12" name="Text 12"/>
+          <p:cNvSpPr txBox="1"/>
+          <p:nvPr/>
+        </p:nvSpPr>
+        <p:spPr>
+          <a:xfrm>
+            <a:off x="4356100" y="2719222"/>
+            <a:ext cx="891334" cy="192888"/>
+          </a:xfrm>
+          <a:prstGeom prst="rect">
+            <a:avLst/>
+          </a:prstGeom>
+          <a:noFill/>
+        </p:spPr>
+        <p:txBody>
+          <a:bodyPr wrap="none" lIns="0" tIns="0" rIns="0" bIns="0" rtlCol="0" anchor="t" anchorCtr="0">
+            <a:noAutofit/>
+          </a:bodyPr>
+          <a:lstStyle/>
+          <a:p>
+            <a:pPr algn="l">
+              <a:lnSpc>
+                <a:spcPct val="100000"/>
+              </a:lnSpc>
+              <a:spcBef>
+                <a:spcPts val="0"/>
+              </a:spcBef>
+              <a:spcAft>
+                <a:spcPts val="0"/>
+              </a:spcAft>
+              <a:buNone/>
+            </a:pPr>
+            <a:r>
+              <a:rPr lang="en-US" kern="100" sz="1300" b="0" dirty="0">
+                <a:solidFill>
+                  <a:srgbClr val="1B1D21"/>
+                </a:solidFill>
+                <a:latin typeface="Avenir Next Demi Bold"/>
+                <a:ea typeface="Avenir Next Demi Bold"/>
+                <a:cs typeface="Avenir Next Demi Bold"/>
+              </a:rPr>
+              <a:t>Operations</a:t>
+            </a:r>
+            <a:endParaRPr lang="en-US" kern="100" sz="1300" b="0" dirty="0">
+              <a:solidFill>
+                <a:srgbClr val="1B1D21"/>
+              </a:solidFill>
+              <a:latin typeface="Avenir Next Demi Bold"/>
+              <a:ea typeface="Avenir Next Demi Bold"/>
+              <a:cs typeface="Avenir Next Demi Bold"/>
+            </a:endParaRPr>
+          </a:p>
+        </p:txBody>
+      </p:sp>
+      <p:sp>
+        <p:nvSpPr>
+          <p:cNvPr id="13" name="Text 13"/>
+          <p:cNvSpPr txBox="1"/>
+          <p:nvPr/>
+        </p:nvSpPr>
+        <p:spPr>
+          <a:xfrm>
+            <a:off x="4356100" y="2998264"/>
+            <a:ext cx="3575447" cy="574802"/>
+          </a:xfrm>
+          <a:prstGeom prst="rect">
+            <a:avLst/>
+          </a:prstGeom>
+          <a:noFill/>
+        </p:spPr>
+        <p:txBody>
+          <a:bodyPr wrap="none" lIns="0" tIns="0" rIns="0" bIns="0" rtlCol="0" anchor="t" anchorCtr="0">
+            <a:noAutofit/>
+          </a:bodyPr>
+          <a:lstStyle/>
+          <a:p>
+            <a:pPr algn="l">
+              <a:lnSpc>
+                <a:spcPct val="125000"/>
+              </a:lnSpc>
+              <a:spcBef>
+                <a:spcPts val="0"/>
+              </a:spcBef>
+              <a:spcAft>
+                <a:spcPts val="0"/>
+              </a:spcAft>
+              <a:buNone/>
+            </a:pPr>
+            <a:r>
+              <a:rPr lang="en-US" kern="100" sz="1000" b="0" dirty="0">
+                <a:solidFill>
+                  <a:srgbClr val="1B1D21">
+                    <a:alpha val="78000"/>
+                  </a:srgbClr>
+                </a:solidFill>
+                <a:latin typeface="Avenir Next"/>
+                <a:ea typeface="Avenir Next"/>
+                <a:cs typeface="Avenir Next"/>
+              </a:rPr>
+              <a:t>Step-by-step ingest, query and lint workflows — including</a:t>
+            </a:r>
+            <a:br>
+              <a:rPr lang="en-US" kern="100" sz="1000" b="0" dirty="0">
+                <a:solidFill>
+                  <a:srgbClr val="1B1D21">
+                    <a:alpha val="78000"/>
+                  </a:srgbClr>
+                </a:solidFill>
+                <a:latin typeface="Avenir Next"/>
+                <a:ea typeface="Avenir Next"/>
+                <a:cs typeface="Avenir Next"/>
+              </a:rPr>
+            </a:br>
+            <a:r>
+              <a:rPr lang="en-US" kern="100" sz="1000" b="0" dirty="0">
+                <a:solidFill>
+                  <a:srgbClr val="1B1D21">
+                    <a:alpha val="78000"/>
+                  </a:srgbClr>
+                </a:solidFill>
+                <a:latin typeface="Avenir Next"/>
+                <a:ea typeface="Avenir Next"/>
+                <a:cs typeface="Avenir Next"/>
+              </a:rPr>
+              <a:t>"run </a:t>
+            </a:r>
+            <a:r>
+              <a:rPr lang="en-US" kern="100" sz="900" b="0" spc="350" dirty="0">
+                <a:solidFill>
+                  <a:srgbClr val="1B1D21">
+                    <a:alpha val="78000"/>
+                  </a:srgbClr>
+                </a:solidFill>
+                <a:latin typeface="Menlo"/>
+                <a:ea typeface="Menlo"/>
+                <a:cs typeface="Menlo"/>
+              </a:rPr>
+              <a:t>​</a:t>
+            </a:r>
+            <a:r>
+              <a:rPr lang="en-US" kern="100" sz="900" b="0" dirty="0">
+                <a:solidFill>
+                  <a:srgbClr val="1B1D21">
+                    <a:alpha val="78000"/>
+                  </a:srgbClr>
+                </a:solidFill>
+                <a:latin typeface="Menlo"/>
+                <a:ea typeface="Menlo"/>
+                <a:cs typeface="Menlo"/>
+              </a:rPr>
+              <a:t>llm-wiki index</a:t>
+            </a:r>
+            <a:r>
+              <a:rPr lang="en-US" kern="100" sz="900" b="0" spc="350" dirty="0">
+                <a:solidFill>
+                  <a:srgbClr val="1B1D21">
+                    <a:alpha val="78000"/>
+                  </a:srgbClr>
+                </a:solidFill>
+                <a:latin typeface="Menlo"/>
+                <a:ea typeface="Menlo"/>
+                <a:cs typeface="Menlo"/>
+              </a:rPr>
+              <a:t>​</a:t>
+            </a:r>
+            <a:r>
+              <a:rPr lang="en-US" kern="100" sz="1000" b="0" dirty="0">
+                <a:solidFill>
+                  <a:srgbClr val="1B1D21">
+                    <a:alpha val="78000"/>
+                  </a:srgbClr>
+                </a:solidFill>
+                <a:latin typeface="Avenir Next"/>
+                <a:ea typeface="Avenir Next"/>
+                <a:cs typeface="Avenir Next"/>
+              </a:rPr>
+              <a:t> after editing pages" and how to flag</a:t>
+            </a:r>
+            <a:br>
+              <a:rPr lang="en-US" kern="100" sz="1000" b="0" dirty="0">
+                <a:solidFill>
+                  <a:srgbClr val="1B1D21">
+                    <a:alpha val="78000"/>
+                  </a:srgbClr>
+                </a:solidFill>
+                <a:latin typeface="Avenir Next"/>
+                <a:ea typeface="Avenir Next"/>
+                <a:cs typeface="Avenir Next"/>
+              </a:rPr>
+            </a:br>
+            <a:r>
+              <a:rPr lang="en-US" kern="100" sz="1000" b="0" dirty="0">
+                <a:solidFill>
+                  <a:srgbClr val="1B1D21">
+                    <a:alpha val="78000"/>
+                  </a:srgbClr>
+                </a:solidFill>
+                <a:latin typeface="Avenir Next"/>
+                <a:ea typeface="Avenir Next"/>
+                <a:cs typeface="Avenir Next"/>
+              </a:rPr>
+              <a:t>a contradiction.</a:t>
+            </a:r>
+            <a:endParaRPr lang="en-US" kern="100" sz="1000" b="0" dirty="0">
+              <a:solidFill>
+                <a:srgbClr val="1B1D21">
+                  <a:alpha val="78000"/>
+                </a:srgbClr>
+              </a:solidFill>
+              <a:latin typeface="Avenir Next"/>
+              <a:ea typeface="Avenir Next"/>
+              <a:cs typeface="Avenir Next"/>
+            </a:endParaRPr>
+          </a:p>
+        </p:txBody>
+      </p:sp>
+      <p:sp>
+        <p:nvSpPr>
+          <p:cNvPr id="14" name="Text 14"/>
+          <p:cNvSpPr txBox="1"/>
+          <p:nvPr/>
+        </p:nvSpPr>
+        <p:spPr>
+          <a:xfrm>
+            <a:off x="8140700" y="2194154"/>
+            <a:ext cx="447008" cy="368071"/>
+          </a:xfrm>
+          <a:prstGeom prst="rect">
+            <a:avLst/>
+          </a:prstGeom>
+          <a:noFill/>
+        </p:spPr>
+        <p:txBody>
+          <a:bodyPr wrap="none" lIns="0" tIns="0" rIns="0" bIns="0" rtlCol="0" anchor="t" anchorCtr="0">
+            <a:noAutofit/>
+          </a:bodyPr>
+          <a:lstStyle/>
+          <a:p>
+            <a:pPr algn="l">
+              <a:lnSpc>
+                <a:spcPct val="83333"/>
+              </a:lnSpc>
+              <a:spcBef>
+                <a:spcPts val="0"/>
+              </a:spcBef>
+              <a:spcAft>
+                <a:spcPts val="0"/>
+              </a:spcAft>
+              <a:buNone/>
+            </a:pPr>
+            <a:r>
+              <a:rPr lang="en-US" kern="100" sz="3200" b="0" spc="-100" dirty="0">
+                <a:solidFill>
+                  <a:srgbClr val="C8623A"/>
+                </a:solidFill>
+                <a:latin typeface="Avenir Next Ultra Light"/>
+                <a:ea typeface="Avenir Next Ultra Light"/>
+                <a:cs typeface="Avenir Next Ultra Light"/>
+              </a:rPr>
+              <a:t>§3</a:t>
+            </a:r>
+            <a:endParaRPr lang="en-US" kern="100" sz="3200" b="0" spc="-100" dirty="0">
+              <a:solidFill>
+                <a:srgbClr val="C8623A"/>
+              </a:solidFill>
+              <a:latin typeface="Avenir Next Ultra Light"/>
+              <a:ea typeface="Avenir Next Ultra Light"/>
+              <a:cs typeface="Avenir Next Ultra Light"/>
+            </a:endParaRPr>
+          </a:p>
+        </p:txBody>
+      </p:sp>
+      <p:sp>
+        <p:nvSpPr>
+          <p:cNvPr id="15" name="Text 15"/>
+          <p:cNvSpPr txBox="1"/>
+          <p:nvPr/>
+        </p:nvSpPr>
+        <p:spPr>
+          <a:xfrm>
+            <a:off x="8140700" y="2719222"/>
+            <a:ext cx="1091414" cy="192888"/>
+          </a:xfrm>
+          <a:prstGeom prst="rect">
+            <a:avLst/>
+          </a:prstGeom>
+          <a:noFill/>
+        </p:spPr>
+        <p:txBody>
+          <a:bodyPr wrap="none" lIns="0" tIns="0" rIns="0" bIns="0" rtlCol="0" anchor="t" anchorCtr="0">
+            <a:noAutofit/>
+          </a:bodyPr>
+          <a:lstStyle/>
+          <a:p>
+            <a:pPr algn="l">
+              <a:lnSpc>
+                <a:spcPct val="100000"/>
+              </a:lnSpc>
+              <a:spcBef>
+                <a:spcPts val="0"/>
+              </a:spcBef>
+              <a:spcAft>
+                <a:spcPts val="0"/>
+              </a:spcAft>
+              <a:buNone/>
+            </a:pPr>
+            <a:r>
+              <a:rPr lang="en-US" kern="100" sz="1300" b="0" dirty="0">
+                <a:solidFill>
+                  <a:srgbClr val="1B1D21"/>
+                </a:solidFill>
+                <a:latin typeface="Avenir Next Demi Bold"/>
+                <a:ea typeface="Avenir Next Demi Bold"/>
+                <a:cs typeface="Avenir Next Demi Bold"/>
+              </a:rPr>
+              <a:t>Working style</a:t>
+            </a:r>
+            <a:endParaRPr lang="en-US" kern="100" sz="1300" b="0" dirty="0">
+              <a:solidFill>
+                <a:srgbClr val="1B1D21"/>
+              </a:solidFill>
+              <a:latin typeface="Avenir Next Demi Bold"/>
+              <a:ea typeface="Avenir Next Demi Bold"/>
+              <a:cs typeface="Avenir Next Demi Bold"/>
+            </a:endParaRPr>
+          </a:p>
+        </p:txBody>
+      </p:sp>
+      <p:sp>
+        <p:nvSpPr>
+          <p:cNvPr id="16" name="Text 16"/>
+          <p:cNvSpPr txBox="1"/>
+          <p:nvPr/>
+        </p:nvSpPr>
+        <p:spPr>
+          <a:xfrm>
+            <a:off x="8140700" y="2998264"/>
+            <a:ext cx="3390844" cy="574802"/>
+          </a:xfrm>
+          <a:prstGeom prst="rect">
+            <a:avLst/>
+          </a:prstGeom>
+          <a:noFill/>
+        </p:spPr>
+        <p:txBody>
+          <a:bodyPr wrap="none" lIns="0" tIns="0" rIns="0" bIns="0" rtlCol="0" anchor="t" anchorCtr="0">
+            <a:noAutofit/>
+          </a:bodyPr>
+          <a:lstStyle/>
+          <a:p>
+            <a:pPr algn="l">
+              <a:lnSpc>
+                <a:spcPct val="125000"/>
+              </a:lnSpc>
+              <a:spcBef>
+                <a:spcPts val="0"/>
+              </a:spcBef>
+              <a:spcAft>
+                <a:spcPts val="0"/>
+              </a:spcAft>
+              <a:buNone/>
+            </a:pPr>
+            <a:r>
+              <a:rPr lang="en-US" kern="100" sz="1000" b="0" dirty="0">
+                <a:solidFill>
+                  <a:srgbClr val="1B1D21">
+                    <a:alpha val="78000"/>
+                  </a:srgbClr>
+                </a:solidFill>
+                <a:latin typeface="Avenir Next"/>
+                <a:ea typeface="Avenir Next"/>
+                <a:cs typeface="Avenir Next"/>
+              </a:rPr>
+              <a:t>Never touch </a:t>
+            </a:r>
+            <a:r>
+              <a:rPr lang="en-US" kern="100" sz="900" b="0" spc="350" dirty="0">
+                <a:solidFill>
+                  <a:srgbClr val="1B1D21">
+                    <a:alpha val="78000"/>
+                  </a:srgbClr>
+                </a:solidFill>
+                <a:latin typeface="Menlo"/>
+                <a:ea typeface="Menlo"/>
+                <a:cs typeface="Menlo"/>
+              </a:rPr>
+              <a:t>​</a:t>
+            </a:r>
+            <a:r>
+              <a:rPr lang="en-US" kern="100" sz="900" b="0" dirty="0">
+                <a:solidFill>
+                  <a:srgbClr val="1B1D21">
+                    <a:alpha val="78000"/>
+                  </a:srgbClr>
+                </a:solidFill>
+                <a:latin typeface="Menlo"/>
+                <a:ea typeface="Menlo"/>
+                <a:cs typeface="Menlo"/>
+              </a:rPr>
+              <a:t>raw/</a:t>
+            </a:r>
+            <a:r>
+              <a:rPr lang="en-US" kern="100" sz="900" b="0" spc="350" dirty="0">
+                <a:solidFill>
+                  <a:srgbClr val="1B1D21">
+                    <a:alpha val="78000"/>
+                  </a:srgbClr>
+                </a:solidFill>
+                <a:latin typeface="Menlo"/>
+                <a:ea typeface="Menlo"/>
+                <a:cs typeface="Menlo"/>
+              </a:rPr>
+              <a:t>​</a:t>
+            </a:r>
+            <a:r>
+              <a:rPr lang="en-US" kern="100" sz="1000" b="0" dirty="0">
+                <a:solidFill>
+                  <a:srgbClr val="1B1D21">
+                    <a:alpha val="78000"/>
+                  </a:srgbClr>
+                </a:solidFill>
+                <a:latin typeface="Avenir Next"/>
+                <a:ea typeface="Avenir Next"/>
+                <a:cs typeface="Avenir Next"/>
+              </a:rPr>
+              <a:t>; keep pages atomic; prefer updating</a:t>
+            </a:r>
+            <a:br>
+              <a:rPr lang="en-US" kern="100" sz="1000" b="0" dirty="0">
+                <a:solidFill>
+                  <a:srgbClr val="1B1D21">
+                    <a:alpha val="78000"/>
+                  </a:srgbClr>
+                </a:solidFill>
+                <a:latin typeface="Avenir Next"/>
+                <a:ea typeface="Avenir Next"/>
+                <a:cs typeface="Avenir Next"/>
+              </a:rPr>
+            </a:br>
+            <a:r>
+              <a:rPr lang="en-US" kern="100" sz="1000" b="0" dirty="0">
+                <a:solidFill>
+                  <a:srgbClr val="1B1D21">
+                    <a:alpha val="78000"/>
+                  </a:srgbClr>
+                </a:solidFill>
+                <a:latin typeface="Avenir Next"/>
+                <a:ea typeface="Avenir Next"/>
+                <a:cs typeface="Avenir Next"/>
+              </a:rPr>
+              <a:t>over duplicating; mark possible duplicates for the next</a:t>
+            </a:r>
+            <a:br>
+              <a:rPr lang="en-US" kern="100" sz="1000" b="0" dirty="0">
+                <a:solidFill>
+                  <a:srgbClr val="1B1D21">
+                    <a:alpha val="78000"/>
+                  </a:srgbClr>
+                </a:solidFill>
+                <a:latin typeface="Avenir Next"/>
+                <a:ea typeface="Avenir Next"/>
+                <a:cs typeface="Avenir Next"/>
+              </a:rPr>
+            </a:br>
+            <a:r>
+              <a:rPr lang="en-US" kern="100" sz="1000" b="0" dirty="0">
+                <a:solidFill>
+                  <a:srgbClr val="1B1D21">
+                    <a:alpha val="78000"/>
+                  </a:srgbClr>
+                </a:solidFill>
+                <a:latin typeface="Avenir Next"/>
+                <a:ea typeface="Avenir Next"/>
+                <a:cs typeface="Avenir Next"/>
+              </a:rPr>
+              <a:t>lint pass.</a:t>
+            </a:r>
+            <a:endParaRPr lang="en-US" kern="100" sz="1000" b="0" dirty="0">
+              <a:solidFill>
+                <a:srgbClr val="1B1D21">
+                  <a:alpha val="78000"/>
+                </a:srgbClr>
+              </a:solidFill>
+              <a:latin typeface="Avenir Next"/>
+              <a:ea typeface="Avenir Next"/>
+              <a:cs typeface="Avenir Next"/>
+            </a:endParaRPr>
+          </a:p>
+        </p:txBody>
+      </p:sp>
+      <p:sp>
+        <p:nvSpPr>
+          <p:cNvPr id="17" name="Shape 17"/>
+          <p:cNvSpPr/>
+          <p:nvPr/>
+        </p:nvSpPr>
+        <p:spPr>
+          <a:xfrm>
+            <a:off x="571500" y="4826000"/>
+            <a:ext cx="11049000" cy="807641"/>
+          </a:xfrm>
+          <a:prstGeom prst="roundRect">
+            <a:avLst>
+              <a:gd name="adj" fmla="val 12580"/>
+            </a:avLst>
+          </a:prstGeom>
+          <a:solidFill>
+            <a:srgbClr val="1B1D21"/>
+          </a:solidFill>
+          <a:ln>
+            <a:noFill/>
+          </a:ln>
+        </p:spPr>
+        <p:txBody>
+          <a:bodyPr rtlCol="0" anchor="ctr"/>
+          <a:lstStyle/>
+          <a:p>
+            <a:endParaRPr lang="en-US" dirty="0"/>
+          </a:p>
+        </p:txBody>
+      </p:sp>
+      <p:sp>
+        <p:nvSpPr>
+          <p:cNvPr id="18" name="Text 18"/>
+          <p:cNvSpPr txBox="1"/>
+          <p:nvPr/>
+        </p:nvSpPr>
+        <p:spPr>
+          <a:xfrm>
+            <a:off x="800100" y="5001197"/>
+            <a:ext cx="8767016" cy="436904"/>
+          </a:xfrm>
+          <a:prstGeom prst="rect">
+            <a:avLst/>
+          </a:prstGeom>
+          <a:noFill/>
+        </p:spPr>
+        <p:txBody>
+          <a:bodyPr wrap="none" lIns="0" tIns="0" rIns="0" bIns="0" rtlCol="0" anchor="t" anchorCtr="0">
+            <a:noAutofit/>
+          </a:bodyPr>
+          <a:lstStyle/>
+          <a:p>
+            <a:pPr algn="l">
+              <a:lnSpc>
+                <a:spcPct val="133333"/>
+              </a:lnSpc>
+              <a:spcBef>
+                <a:spcPts val="0"/>
+              </a:spcBef>
+              <a:spcAft>
+                <a:spcPts val="0"/>
+              </a:spcAft>
+              <a:buNone/>
+            </a:pPr>
+            <a:r>
+              <a:rPr lang="en-US" kern="100" sz="1050" b="0" dirty="0">
+                <a:solidFill>
+                  <a:srgbClr val="F6F3EC"/>
+                </a:solidFill>
+                <a:latin typeface="Menlo"/>
+                <a:ea typeface="Menlo"/>
+                <a:cs typeface="Menlo"/>
+              </a:rPr>
+              <a:t>$ cd ~/notes-wiki &amp;&amp; claude          </a:t>
+            </a:r>
+            <a:r>
+              <a:rPr lang="en-US" kern="100" sz="1050" b="0" dirty="0">
+                <a:solidFill>
+                  <a:srgbClr val="F6F3EC">
+                    <a:alpha val="50000"/>
+                  </a:srgbClr>
+                </a:solidFill>
+                <a:latin typeface="Menlo"/>
+                <a:ea typeface="Menlo"/>
+                <a:cs typeface="Menlo"/>
+              </a:rPr>
+              <a:t># CLAUDE.md is read automatically; AGENTS.md serves Codex and others</a:t>
+            </a:r>
+            <a:br>
+              <a:rPr lang="en-US" kern="100" sz="1050" b="0" dirty="0">
+                <a:solidFill>
+                  <a:srgbClr val="F6F3EC"/>
+                </a:solidFill>
+                <a:latin typeface="Menlo"/>
+                <a:ea typeface="Menlo"/>
+                <a:cs typeface="Menlo"/>
+              </a:rPr>
+            </a:br>
+            <a:r>
+              <a:rPr lang="en-US" kern="100" sz="1050" b="0" dirty="0">
+                <a:solidFill>
+                  <a:srgbClr val="F6F3EC"/>
+                </a:solidFill>
+                <a:latin typeface="Menlo"/>
+                <a:ea typeface="Menlo"/>
+                <a:cs typeface="Menlo"/>
+              </a:rPr>
+              <a:t>&gt; ingest raw/podcast-notes.md and tell me what changed in the overview</a:t>
+            </a:r>
+            <a:endParaRPr lang="en-US" kern="100" sz="1050" b="0" dirty="0">
+              <a:solidFill>
+                <a:srgbClr val="F6F3EC"/>
+              </a:solidFill>
+              <a:latin typeface="Menlo"/>
+              <a:ea typeface="Menlo"/>
+              <a:cs typeface="Menlo"/>
+            </a:endParaRPr>
+          </a:p>
+        </p:txBody>
+      </p:sp>
+      <p:pic>
+        <p:nvPicPr>
+          <p:cNvPr id="19" name="Picture 19" descr=""/>
+          <p:cNvPicPr>
+            <a:picLocks noChangeAspect="1"/>
+          </p:cNvPicPr>
+          <p:nvPr/>
+        </p:nvPicPr>
+        <p:blipFill>
+          <a:blip r:embed="rId2"/>
+          <a:srcRect/>
+          <a:stretch>
+            <a:fillRect/>
+          </a:stretch>
+        </p:blipFill>
+        <p:spPr>
+          <a:xfrm>
+            <a:off x="342900" y="6451600"/>
+            <a:ext cx="900853" cy="177800"/>
+          </a:xfrm>
+          <a:prstGeom prst="rect">
+            <a:avLst/>
+          </a:prstGeom>
+        </p:spPr>
+      </p:pic>
+      <p:sp>
+        <p:nvSpPr>
+          <p:cNvPr id="20" name="Text 20"/>
+          <p:cNvSpPr txBox="1"/>
+          <p:nvPr/>
+        </p:nvSpPr>
+        <p:spPr>
+          <a:xfrm>
+            <a:off x="11704538" y="6459106"/>
+            <a:ext cx="157262" cy="160769"/>
+          </a:xfrm>
+          <a:prstGeom prst="rect">
+            <a:avLst/>
+          </a:prstGeom>
+          <a:noFill/>
+        </p:spPr>
+        <p:txBody>
+          <a:bodyPr wrap="none" lIns="0" tIns="0" rIns="0" bIns="0" rtlCol="0" anchor="t" anchorCtr="0">
+            <a:noAutofit/>
+          </a:bodyPr>
+          <a:lstStyle/>
+          <a:p>
+            <a:pPr algn="l">
+              <a:lnSpc>
+                <a:spcPct val="115741"/>
+              </a:lnSpc>
+              <a:spcBef>
+                <a:spcPts val="0"/>
+              </a:spcBef>
+              <a:spcAft>
+                <a:spcPts val="0"/>
+              </a:spcAft>
+              <a:buNone/>
+            </a:pPr>
+            <a:r>
+              <a:rPr lang="en-US" kern="100" sz="900" b="0" spc="20" dirty="0">
+                <a:solidFill>
+                  <a:srgbClr val="1B1D21">
+                    <a:alpha val="55000"/>
+                  </a:srgbClr>
+                </a:solidFill>
+                <a:latin typeface="Avenir Next Demi Bold"/>
+                <a:ea typeface="Avenir Next Demi Bold"/>
+                <a:cs typeface="Avenir Next Demi Bold"/>
+              </a:rPr>
+              <a:t>20</a:t>
+            </a:r>
+            <a:endParaRPr lang="en-US" kern="100" sz="900" b="0" spc="20" dirty="0">
+              <a:solidFill>
+                <a:srgbClr val="1B1D21">
+                  <a:alpha val="55000"/>
+                </a:srgbClr>
+              </a:solidFill>
+              <a:latin typeface="Avenir Next Demi Bold"/>
+              <a:ea typeface="Avenir Next Demi Bold"/>
+              <a:cs typeface="Avenir Next Demi Bold"/>
+            </a:endParaRPr>
+          </a:p>
+        </p:txBody>
+      </p:sp>
+      <p:sp>
+        <p:nvSpPr>
+          <p:cNvPr id="21" name="Text 21"/>
+          <p:cNvSpPr txBox="1"/>
+          <p:nvPr/>
+        </p:nvSpPr>
+        <p:spPr>
+          <a:xfrm>
+            <a:off x="1358900" y="6459106"/>
+            <a:ext cx="1137539" cy="160769"/>
+          </a:xfrm>
+          <a:prstGeom prst="rect">
+            <a:avLst/>
+          </a:prstGeom>
+          <a:noFill/>
+        </p:spPr>
+        <p:txBody>
+          <a:bodyPr wrap="none" lIns="0" tIns="0" rIns="0" bIns="0" rtlCol="0" anchor="t" anchorCtr="0">
+            <a:noAutofit/>
+          </a:bodyPr>
+          <a:lstStyle/>
+          <a:p>
+            <a:pPr algn="l">
+              <a:lnSpc>
+                <a:spcPct val="115741"/>
+              </a:lnSpc>
+              <a:spcBef>
+                <a:spcPts val="0"/>
+              </a:spcBef>
+              <a:spcAft>
+                <a:spcPts val="0"/>
+              </a:spcAft>
+              <a:buNone/>
+            </a:pPr>
+            <a:r>
+              <a:rPr lang="en-US" kern="100" sz="900" b="0" spc="20" dirty="0">
+                <a:solidFill>
+                  <a:srgbClr val="1B1D21">
+                    <a:alpha val="38500"/>
+                  </a:srgbClr>
+                </a:solidFill>
+                <a:latin typeface="Avenir Next"/>
+                <a:ea typeface="Avenir Next"/>
+                <a:cs typeface="Avenir Next"/>
+              </a:rPr>
+              <a:t>llm-wiki · user guide</a:t>
+            </a:r>
+            <a:endParaRPr lang="en-US" kern="100" sz="900" b="0" spc="20" dirty="0">
+              <a:solidFill>
+                <a:srgbClr val="1B1D21">
+                  <a:alpha val="38500"/>
+                </a:srgbClr>
+              </a:solidFill>
+              <a:latin typeface="Avenir Next"/>
+              <a:ea typeface="Avenir Next"/>
+              <a:cs typeface="Avenir Next"/>
+            </a:endParaRPr>
+          </a:p>
+        </p:txBody>
+      </p:sp>
+    </p:spTree>
+  </p:cSld>
+  <p:clrMapOvr>
+    <a:masterClrMapping/>
+  </p:clrMapOvr>
+</p:sld>
+</file>
+
+<file path=ppt/slides/slide21.xml><?xml version="1.0" encoding="utf-8"?>
+<p:sld xmlns:a="http://schemas.openxmlformats.org/drawingml/2006/main" xmlns:r="http://schemas.openxmlformats.org/officeDocument/2006/relationships" xmlns:p="http://schemas.openxmlformats.org/presentationml/2006/main">
+  <p:cSld>
+    <p:bg>
+      <p:bgPr>
+        <a:solidFill>
           <a:srgbClr val="F6F3EC"/>
         </a:solidFill>
         <a:effectLst/>
@@ -17910,7 +19163,7 @@
                 <a:ea typeface="Avenir Next Demi Bold"/>
                 <a:cs typeface="Avenir Next Demi Bold"/>
               </a:rPr>
-              <a:t>20</a:t>
+              <a:t>21</a:t>
             </a:r>
             <a:endParaRPr lang="en-US" kern="100" sz="900" b="0" spc="20" dirty="0">
               <a:solidFill>
@@ -17993,7 +19246,7 @@
 </p:sld>
 </file>
 
-<file path=ppt/slides/slide21.xml><?xml version="1.0" encoding="utf-8"?>
+<file path=ppt/slides/slide22.xml><?xml version="1.0" encoding="utf-8"?>
 <p:sld xmlns:a="http://schemas.openxmlformats.org/drawingml/2006/main" xmlns:r="http://schemas.openxmlformats.org/officeDocument/2006/relationships" xmlns:p="http://schemas.openxmlformats.org/presentationml/2006/main">
   <p:cSld>
     <p:bg>
@@ -19938,7 +21191,7 @@
                 <a:ea typeface="Avenir Next Demi Bold"/>
                 <a:cs typeface="Avenir Next Demi Bold"/>
               </a:rPr>
-              <a:t>21</a:t>
+              <a:t>22</a:t>
             </a:r>
             <a:endParaRPr lang="en-US" kern="100" sz="900" b="0" spc="20" dirty="0">
               <a:solidFill>
@@ -20021,7 +21274,7 @@
 </p:sld>
 </file>
 
-<file path=ppt/slides/slide22.xml><?xml version="1.0" encoding="utf-8"?>
+<file path=ppt/slides/slide23.xml><?xml version="1.0" encoding="utf-8"?>
 <p:sld xmlns:a="http://schemas.openxmlformats.org/drawingml/2006/main" xmlns:r="http://schemas.openxmlformats.org/officeDocument/2006/relationships" xmlns:p="http://schemas.openxmlformats.org/presentationml/2006/main">
   <p:cSld>
     <p:bg>
@@ -21526,7 +22779,7 @@
                 <a:ea typeface="Avenir Next Demi Bold"/>
                 <a:cs typeface="Avenir Next Demi Bold"/>
               </a:rPr>
-              <a:t>22</a:t>
+              <a:t>23</a:t>
             </a:r>
             <a:endParaRPr lang="en-US" kern="100" sz="900" b="0" spc="20" dirty="0">
               <a:solidFill>
@@ -21609,7 +22862,7 @@
 </p:sld>
 </file>
 
-<file path=ppt/slides/slide23.xml><?xml version="1.0" encoding="utf-8"?>
+<file path=ppt/slides/slide24.xml><?xml version="1.0" encoding="utf-8"?>
 <p:sld xmlns:a="http://schemas.openxmlformats.org/drawingml/2006/main" xmlns:r="http://schemas.openxmlformats.org/officeDocument/2006/relationships" xmlns:p="http://schemas.openxmlformats.org/presentationml/2006/main">
   <p:cSld>
     <p:bg>
@@ -22800,7 +24053,7 @@
         <p:spPr>
           <a:xfrm>
             <a:off x="571500" y="3410851"/>
-            <a:ext cx="3506827" cy="152749"/>
+            <a:ext cx="4150924" cy="152749"/>
           </a:xfrm>
           <a:prstGeom prst="rect">
             <a:avLst/>
@@ -22836,7 +24089,7 @@
                 <a:ea typeface="Menlo"/>
                 <a:cs typeface="Menlo"/>
               </a:rPr>
-              <a:t>… is a PDF/DOCX original and needs the parser LLM</a:t>
+              <a:t>… original and needs the parser LLM · … cannot read images</a:t>
             </a:r>
             <a:endParaRPr lang="en-US" kern="100" sz="900" b="0" dirty="0">
               <a:solidFill>
@@ -22859,8 +24112,8 @@
         </p:nvSpPr>
         <p:spPr>
           <a:xfrm>
-            <a:off x="5143500" y="3414578"/>
-            <a:ext cx="2703925" cy="170294"/>
+            <a:off x="5143500" y="3414883"/>
+            <a:ext cx="4677180" cy="169989"/>
           </a:xfrm>
           <a:prstGeom prst="rect">
             <a:avLst/>
@@ -22948,7 +24201,7 @@
                 <a:ea typeface="Avenir Next"/>
                 <a:cs typeface="Avenir Next"/>
               </a:rPr>
-              <a:t>.</a:t>
+              <a:t> — a model with vision for images.</a:t>
             </a:r>
             <a:endParaRPr lang="en-US" kern="100" sz="1000" b="0" dirty="0">
               <a:solidFill>
@@ -23557,7 +24810,7 @@
                 <a:ea typeface="Avenir Next Demi Bold"/>
                 <a:cs typeface="Avenir Next Demi Bold"/>
               </a:rPr>
-              <a:t>23</a:t>
+              <a:t>24</a:t>
             </a:r>
             <a:endParaRPr lang="en-US" kern="100" sz="900" b="0" spc="20" dirty="0">
               <a:solidFill>
@@ -23640,7 +24893,7 @@
 </p:sld>
 </file>
 
-<file path=ppt/slides/slide24.xml><?xml version="1.0" encoding="utf-8"?>
+<file path=ppt/slides/slide25.xml><?xml version="1.0" encoding="utf-8"?>
 <p:sld xmlns:a="http://schemas.openxmlformats.org/drawingml/2006/main" xmlns:r="http://schemas.openxmlformats.org/officeDocument/2006/relationships" xmlns:p="http://schemas.openxmlformats.org/presentationml/2006/main">
   <p:cSld>
     <p:bg>
@@ -23965,7 +25218,7 @@
                 <a:ea typeface="Avenir Next Demi Bold"/>
                 <a:cs typeface="Avenir Next Demi Bold"/>
               </a:rPr>
-              <a:t>24</a:t>
+              <a:t>25</a:t>
             </a:r>
             <a:endParaRPr lang="en-US" kern="100" sz="900" b="0" spc="20" dirty="0">
               <a:solidFill>
@@ -24048,7 +25301,7 @@
 </p:sld>
 </file>
 
-<file path=ppt/slides/slide25.xml><?xml version="1.0" encoding="utf-8"?>
+<file path=ppt/slides/slide26.xml><?xml version="1.0" encoding="utf-8"?>
 <p:sld xmlns:a="http://schemas.openxmlformats.org/drawingml/2006/main" xmlns:r="http://schemas.openxmlformats.org/officeDocument/2006/relationships" xmlns:p="http://schemas.openxmlformats.org/presentationml/2006/main">
   <p:cSld>
     <p:bg>
@@ -25592,7 +26845,7 @@
                 <a:ea typeface="Avenir Next Demi Bold"/>
                 <a:cs typeface="Avenir Next Demi Bold"/>
               </a:rPr>
-              <a:t>25</a:t>
+              <a:t>26</a:t>
             </a:r>
             <a:endParaRPr lang="en-US" kern="100" sz="900" b="0" spc="20" dirty="0">
               <a:solidFill>
@@ -25675,7 +26928,7 @@
 </p:sld>
 </file>
 
-<file path=ppt/slides/slide26.xml><?xml version="1.0" encoding="utf-8"?>
+<file path=ppt/slides/slide27.xml><?xml version="1.0" encoding="utf-8"?>
 <p:sld xmlns:a="http://schemas.openxmlformats.org/drawingml/2006/main" xmlns:r="http://schemas.openxmlformats.org/officeDocument/2006/relationships" xmlns:p="http://schemas.openxmlformats.org/presentationml/2006/main">
   <p:cSld>
     <p:bg>
@@ -26942,7 +28195,7 @@
                 <a:ea typeface="Avenir Next Demi Bold"/>
                 <a:cs typeface="Avenir Next Demi Bold"/>
               </a:rPr>
-              <a:t>26</a:t>
+              <a:t>27</a:t>
             </a:r>
             <a:endParaRPr lang="en-US" kern="100" sz="900" b="0" spc="20" dirty="0">
               <a:solidFill>
@@ -27025,7 +28278,7 @@
 </p:sld>
 </file>
 
-<file path=ppt/slides/slide27.xml><?xml version="1.0" encoding="utf-8"?>
+<file path=ppt/slides/slide28.xml><?xml version="1.0" encoding="utf-8"?>
 <p:sld xmlns:a="http://schemas.openxmlformats.org/drawingml/2006/main" xmlns:r="http://schemas.openxmlformats.org/officeDocument/2006/relationships" xmlns:p="http://schemas.openxmlformats.org/presentationml/2006/main">
   <p:cSld>
     <p:bg>
@@ -29246,7 +30499,7 @@
                 <a:ea typeface="Avenir Next Demi Bold"/>
                 <a:cs typeface="Avenir Next Demi Bold"/>
               </a:rPr>
-              <a:t>27</a:t>
+              <a:t>28</a:t>
             </a:r>
             <a:endParaRPr lang="en-US" kern="100" sz="900" b="0" spc="20" dirty="0">
               <a:solidFill>
@@ -29329,7 +30582,7 @@
 </p:sld>
 </file>
 
-<file path=ppt/slides/slide28.xml><?xml version="1.0" encoding="utf-8"?>
+<file path=ppt/slides/slide29.xml><?xml version="1.0" encoding="utf-8"?>
 <p:sld xmlns:a="http://schemas.openxmlformats.org/drawingml/2006/main" xmlns:r="http://schemas.openxmlformats.org/officeDocument/2006/relationships" xmlns:p="http://schemas.openxmlformats.org/presentationml/2006/main">
   <p:cSld>
     <p:bg>
@@ -30559,7 +31812,7 @@
                 <a:ea typeface="Avenir Next Demi Bold"/>
                 <a:cs typeface="Avenir Next Demi Bold"/>
               </a:rPr>
-              <a:t>28</a:t>
+              <a:t>29</a:t>
             </a:r>
             <a:endParaRPr lang="en-US" kern="100" sz="900" b="0" spc="20" dirty="0">
               <a:solidFill>
@@ -30625,639 +31878,6 @@
               <a:solidFill>
                 <a:srgbClr val="1B1D21">
                   <a:alpha val="38500"/>
-                </a:srgbClr>
-              </a:solidFill>
-              <a:latin typeface="Avenir Next"/>
-              <a:ea typeface="Avenir Next"/>
-              <a:cs typeface="Avenir Next"/>
-            </a:endParaRPr>
-          </a:p>
-        </p:txBody>
-      </p:sp>
-    </p:spTree>
-  </p:cSld>
-  <p:clrMapOvr>
-    <a:masterClrMapping/>
-  </p:clrMapOvr>
-</p:sld>
-</file>
-
-<file path=ppt/slides/slide29.xml><?xml version="1.0" encoding="utf-8"?>
-<p:sld xmlns:a="http://schemas.openxmlformats.org/drawingml/2006/main" xmlns:r="http://schemas.openxmlformats.org/officeDocument/2006/relationships" xmlns:p="http://schemas.openxmlformats.org/presentationml/2006/main">
-  <p:cSld>
-    <p:bg>
-      <p:bgPr>
-        <a:solidFill>
-          <a:srgbClr val="111316"/>
-        </a:solidFill>
-        <a:effectLst/>
-      </p:bgPr>
-    </p:bg>
-    <p:spTree>
-      <p:nvGrpSpPr>
-        <p:cNvPr id="1" name=""/>
-        <p:cNvGrpSpPr/>
-        <p:nvPr/>
-      </p:nvGrpSpPr>
-      <p:grpSpPr>
-        <a:xfrm>
-          <a:off x="0" y="0"/>
-          <a:ext cx="0" cy="0"/>
-          <a:chOff x="0" y="0"/>
-          <a:chExt cx="0" cy="0"/>
-        </a:xfrm>
-      </p:grpSpPr>
-      <p:sp>
-        <p:nvSpPr>
-          <p:cNvPr id="2" name="Shape 2"/>
-          <p:cNvSpPr/>
-          <p:nvPr/>
-        </p:nvSpPr>
-        <p:spPr>
-          <a:xfrm>
-            <a:off x="9779000" y="0"/>
-            <a:ext cx="2413000" cy="2413000"/>
-          </a:xfrm>
-          <a:prstGeom prst="rect">
-            <a:avLst/>
-          </a:prstGeom>
-          <a:solidFill>
-            <a:srgbClr val="C8623A"/>
-          </a:solidFill>
-          <a:ln>
-            <a:noFill/>
-          </a:ln>
-        </p:spPr>
-        <p:txBody>
-          <a:bodyPr rtlCol="0" anchor="ctr"/>
-          <a:lstStyle/>
-          <a:p>
-            <a:endParaRPr lang="en-US" dirty="0"/>
-          </a:p>
-        </p:txBody>
-      </p:sp>
-      <p:sp>
-        <p:nvSpPr>
-          <p:cNvPr id="3" name="Text 3"/>
-          <p:cNvSpPr txBox="1"/>
-          <p:nvPr/>
-        </p:nvSpPr>
-        <p:spPr>
-          <a:xfrm>
-            <a:off x="571500" y="638747"/>
-            <a:ext cx="917750" cy="116903"/>
-          </a:xfrm>
-          <a:prstGeom prst="rect">
-            <a:avLst/>
-          </a:prstGeom>
-          <a:noFill/>
-        </p:spPr>
-        <p:txBody>
-          <a:bodyPr wrap="none" lIns="0" tIns="0" rIns="0" bIns="0" rtlCol="0" anchor="t" anchorCtr="0">
-            <a:noAutofit/>
-          </a:bodyPr>
-          <a:lstStyle/>
-          <a:p>
-            <a:pPr algn="l">
-              <a:lnSpc>
-                <a:spcPct val="98958"/>
-              </a:lnSpc>
-              <a:spcBef>
-                <a:spcPts val="0"/>
-              </a:spcBef>
-              <a:spcAft>
-                <a:spcPts val="0"/>
-              </a:spcAft>
-              <a:buNone/>
-            </a:pPr>
-            <a:r>
-              <a:rPr lang="en-US" kern="100" sz="800" b="1" cap="all" spc="150" dirty="0">
-                <a:solidFill>
-                  <a:srgbClr val="C8623A"/>
-                </a:solidFill>
-                <a:latin typeface="Menlo"/>
-                <a:ea typeface="Menlo"/>
-                <a:cs typeface="Menlo"/>
-              </a:rPr>
-              <a:t>Cheat sheet</a:t>
-            </a:r>
-            <a:endParaRPr lang="en-US" kern="100" sz="800" b="1" cap="all" spc="150" dirty="0">
-              <a:solidFill>
-                <a:srgbClr val="C8623A"/>
-              </a:solidFill>
-              <a:latin typeface="Menlo"/>
-              <a:ea typeface="Menlo"/>
-              <a:cs typeface="Menlo"/>
-            </a:endParaRPr>
-          </a:p>
-        </p:txBody>
-      </p:sp>
-      <p:sp>
-        <p:nvSpPr>
-          <p:cNvPr id="4" name="Text 4"/>
-          <p:cNvSpPr txBox="1"/>
-          <p:nvPr/>
-        </p:nvSpPr>
-        <p:spPr>
-          <a:xfrm>
-            <a:off x="571500" y="995223"/>
-            <a:ext cx="4207677" cy="871677"/>
-          </a:xfrm>
-          <a:prstGeom prst="rect">
-            <a:avLst/>
-          </a:prstGeom>
-          <a:noFill/>
-        </p:spPr>
-        <p:txBody>
-          <a:bodyPr wrap="none" lIns="0" tIns="0" rIns="0" bIns="0" rtlCol="0" anchor="t" anchorCtr="0">
-            <a:noAutofit/>
-          </a:bodyPr>
-          <a:lstStyle/>
-          <a:p>
-            <a:pPr algn="l">
-              <a:lnSpc>
-                <a:spcPct val="83333"/>
-              </a:lnSpc>
-              <a:spcBef>
-                <a:spcPts val="0"/>
-              </a:spcBef>
-              <a:spcAft>
-                <a:spcPts val="0"/>
-              </a:spcAft>
-              <a:buNone/>
-            </a:pPr>
-            <a:r>
-              <a:rPr lang="en-US" kern="100" sz="3600" b="0" spc="-75" dirty="0">
-                <a:solidFill>
-                  <a:srgbClr val="F6F3EC"/>
-                </a:solidFill>
-                <a:latin typeface="Avenir Next Ultra Light"/>
-                <a:ea typeface="Avenir Next Ultra Light"/>
-                <a:cs typeface="Avenir Next Ultra Light"/>
-              </a:rPr>
-              <a:t>Your documentation,</a:t>
-            </a:r>
-            <a:br>
-              <a:rPr lang="en-US" kern="100" sz="3600" b="0" spc="-75" dirty="0">
-                <a:solidFill>
-                  <a:srgbClr val="F6F3EC"/>
-                </a:solidFill>
-                <a:latin typeface="Avenir Next Ultra Light"/>
-                <a:ea typeface="Avenir Next Ultra Light"/>
-                <a:cs typeface="Avenir Next Ultra Light"/>
-              </a:rPr>
-            </a:br>
-            <a:r>
-              <a:rPr lang="en-US" kern="100" sz="3600" b="0" i="1" spc="-75" dirty="0">
-                <a:solidFill>
-                  <a:srgbClr val="E08A5E"/>
-                </a:solidFill>
-                <a:latin typeface="Avenir Next"/>
-                <a:ea typeface="Avenir Next"/>
-                <a:cs typeface="Avenir Next"/>
-              </a:rPr>
-              <a:t>compiled.</a:t>
-            </a:r>
-            <a:endParaRPr lang="en-US" kern="100" sz="3600" b="0" i="1" spc="-75" dirty="0">
-              <a:solidFill>
-                <a:srgbClr val="E08A5E"/>
-              </a:solidFill>
-              <a:latin typeface="Avenir Next"/>
-              <a:ea typeface="Avenir Next"/>
-              <a:cs typeface="Avenir Next"/>
-            </a:endParaRPr>
-          </a:p>
-        </p:txBody>
-      </p:sp>
-      <p:sp>
-        <p:nvSpPr>
-          <p:cNvPr id="5" name="Shape 5"/>
-          <p:cNvSpPr/>
-          <p:nvPr/>
-        </p:nvSpPr>
-        <p:spPr>
-          <a:xfrm>
-            <a:off x="571500" y="2540000"/>
-            <a:ext cx="9525000" cy="2043013"/>
-          </a:xfrm>
-          <a:prstGeom prst="roundRect">
-            <a:avLst>
-              <a:gd name="adj" fmla="val 4973"/>
-            </a:avLst>
-          </a:prstGeom>
-          <a:solidFill>
-            <a:srgbClr val="1B1D21"/>
-          </a:solidFill>
-          <a:ln>
-            <a:noFill/>
-          </a:ln>
-        </p:spPr>
-        <p:txBody>
-          <a:bodyPr rtlCol="0" anchor="ctr"/>
-          <a:lstStyle/>
-          <a:p>
-            <a:endParaRPr lang="en-US" dirty="0"/>
-          </a:p>
-        </p:txBody>
-      </p:sp>
-      <p:sp>
-        <p:nvSpPr>
-          <p:cNvPr id="6" name="Text 6"/>
-          <p:cNvSpPr txBox="1"/>
-          <p:nvPr/>
-        </p:nvSpPr>
-        <p:spPr>
-          <a:xfrm>
-            <a:off x="800100" y="2716086"/>
-            <a:ext cx="8047490" cy="1675217"/>
-          </a:xfrm>
-          <a:prstGeom prst="rect">
-            <a:avLst/>
-          </a:prstGeom>
-          <a:noFill/>
-        </p:spPr>
-        <p:txBody>
-          <a:bodyPr wrap="none" lIns="0" tIns="0" rIns="0" bIns="0" rtlCol="0" anchor="t" anchorCtr="0">
-            <a:noAutofit/>
-          </a:bodyPr>
-          <a:lstStyle/>
-          <a:p>
-            <a:pPr algn="l">
-              <a:lnSpc>
-                <a:spcPct val="141667"/>
-              </a:lnSpc>
-              <a:spcBef>
-                <a:spcPts val="0"/>
-              </a:spcBef>
-              <a:spcAft>
-                <a:spcPts val="0"/>
-              </a:spcAft>
-              <a:buNone/>
-            </a:pPr>
-            <a:r>
-              <a:rPr lang="en-US" kern="100" sz="1100" b="0" dirty="0">
-                <a:solidFill>
-                  <a:srgbClr val="F6F3EC"/>
-                </a:solidFill>
-                <a:latin typeface="Menlo"/>
-                <a:ea typeface="Menlo"/>
-                <a:cs typeface="Menlo"/>
-              </a:rPr>
-              <a:t>llm-wiki init ~/notes --format markdown|html --name notes</a:t>
-            </a:r>
-            <a:br>
-              <a:rPr lang="en-US" kern="100" sz="1100" b="0" dirty="0">
-                <a:solidFill>
-                  <a:srgbClr val="F6F3EC"/>
-                </a:solidFill>
-                <a:latin typeface="Menlo"/>
-                <a:ea typeface="Menlo"/>
-                <a:cs typeface="Menlo"/>
-              </a:rPr>
-            </a:br>
-            <a:r>
-              <a:rPr lang="en-US" kern="100" sz="1100" b="0" dirty="0">
-                <a:solidFill>
-                  <a:srgbClr val="F6F3EC"/>
-                </a:solidFill>
-                <a:latin typeface="Menlo"/>
-                <a:ea typeface="Menlo"/>
-                <a:cs typeface="Menlo"/>
-              </a:rPr>
-              <a:t>llm-wiki --wiki notes ingest &lt;file&gt;     </a:t>
-            </a:r>
-            <a:r>
-              <a:rPr lang="en-US" kern="100" sz="1100" b="0" dirty="0">
-                <a:solidFill>
-                  <a:srgbClr val="F6F3EC">
-                    <a:alpha val="50000"/>
-                  </a:srgbClr>
-                </a:solidFill>
-                <a:latin typeface="Menlo"/>
-                <a:ea typeface="Menlo"/>
-                <a:cs typeface="Menlo"/>
-              </a:rPr>
-              <a:t># markdown, text, or PDF / DOCX via the parser model</a:t>
-            </a:r>
-            <a:br>
-              <a:rPr lang="en-US" kern="100" sz="1100" b="0" dirty="0">
-                <a:solidFill>
-                  <a:srgbClr val="F6F3EC"/>
-                </a:solidFill>
-                <a:latin typeface="Menlo"/>
-                <a:ea typeface="Menlo"/>
-                <a:cs typeface="Menlo"/>
-              </a:rPr>
-            </a:br>
-            <a:r>
-              <a:rPr lang="en-US" kern="100" sz="1100" b="0" dirty="0">
-                <a:solidFill>
-                  <a:srgbClr val="F6F3EC"/>
-                </a:solidFill>
-                <a:latin typeface="Menlo"/>
-                <a:ea typeface="Menlo"/>
-                <a:cs typeface="Menlo"/>
-              </a:rPr>
-              <a:t>llm-wiki --wiki notes search "&lt;terms&gt;"   </a:t>
-            </a:r>
-            <a:r>
-              <a:rPr lang="en-US" kern="100" sz="1100" b="0" dirty="0">
-                <a:solidFill>
-                  <a:srgbClr val="F6F3EC">
-                    <a:alpha val="50000"/>
-                  </a:srgbClr>
-                </a:solidFill>
-                <a:latin typeface="Menlo"/>
-                <a:ea typeface="Menlo"/>
-                <a:cs typeface="Menlo"/>
-              </a:rPr>
-              <a:t># --all-wikis · --mode hybrid after `index --embed`</a:t>
-            </a:r>
-            <a:br>
-              <a:rPr lang="en-US" kern="100" sz="1100" b="0" dirty="0">
-                <a:solidFill>
-                  <a:srgbClr val="F6F3EC"/>
-                </a:solidFill>
-                <a:latin typeface="Menlo"/>
-                <a:ea typeface="Menlo"/>
-                <a:cs typeface="Menlo"/>
-              </a:rPr>
-            </a:br>
-            <a:r>
-              <a:rPr lang="en-US" kern="100" sz="1100" b="0" dirty="0">
-                <a:solidFill>
-                  <a:srgbClr val="F6F3EC"/>
-                </a:solidFill>
-                <a:latin typeface="Menlo"/>
-                <a:ea typeface="Menlo"/>
-                <a:cs typeface="Menlo"/>
-              </a:rPr>
-              <a:t>llm-wiki --wiki notes query "&lt;q&gt;" --file </a:t>
-            </a:r>
-            <a:r>
-              <a:rPr lang="en-US" kern="100" sz="1100" b="0" dirty="0">
-                <a:solidFill>
-                  <a:srgbClr val="F6F3EC">
-                    <a:alpha val="50000"/>
-                  </a:srgbClr>
-                </a:solidFill>
-                <a:latin typeface="Menlo"/>
-                <a:ea typeface="Menlo"/>
-                <a:cs typeface="Menlo"/>
-              </a:rPr>
-              <a:t># cited answer, filed · --wikis a,b to ask several</a:t>
-            </a:r>
-            <a:br>
-              <a:rPr lang="en-US" kern="100" sz="1100" b="0" dirty="0">
-                <a:solidFill>
-                  <a:srgbClr val="F6F3EC"/>
-                </a:solidFill>
-                <a:latin typeface="Menlo"/>
-                <a:ea typeface="Menlo"/>
-                <a:cs typeface="Menlo"/>
-              </a:rPr>
-            </a:br>
-            <a:r>
-              <a:rPr lang="en-US" kern="100" sz="1100" b="0" dirty="0">
-                <a:solidFill>
-                  <a:srgbClr val="F6F3EC"/>
-                </a:solidFill>
-                <a:latin typeface="Menlo"/>
-                <a:ea typeface="Menlo"/>
-                <a:cs typeface="Menlo"/>
-              </a:rPr>
-              <a:t>llm-wiki --wiki notes lint --llm         </a:t>
-            </a:r>
-            <a:r>
-              <a:rPr lang="en-US" kern="100" sz="1100" b="0" dirty="0">
-                <a:solidFill>
-                  <a:srgbClr val="F6F3EC">
-                    <a:alpha val="50000"/>
-                  </a:srgbClr>
-                </a:solidFill>
-                <a:latin typeface="Menlo"/>
-                <a:ea typeface="Menlo"/>
-                <a:cs typeface="Menlo"/>
-              </a:rPr>
-              <a:t># contradictions, gaps, next questions</a:t>
-            </a:r>
-            <a:br>
-              <a:rPr lang="en-US" kern="100" sz="1100" b="0" dirty="0">
-                <a:solidFill>
-                  <a:srgbClr val="F6F3EC"/>
-                </a:solidFill>
-                <a:latin typeface="Menlo"/>
-                <a:ea typeface="Menlo"/>
-                <a:cs typeface="Menlo"/>
-              </a:rPr>
-            </a:br>
-            <a:r>
-              <a:rPr lang="en-US" kern="100" sz="1100" b="0" dirty="0">
-                <a:solidFill>
-                  <a:srgbClr val="F6F3EC"/>
-                </a:solidFill>
-                <a:latin typeface="Menlo"/>
-                <a:ea typeface="Menlo"/>
-                <a:cs typeface="Menlo"/>
-              </a:rPr>
-              <a:t>llm-wiki --wiki notes convert --to html  </a:t>
-            </a:r>
-            <a:r>
-              <a:rPr lang="en-US" kern="100" sz="1100" b="0" dirty="0">
-                <a:solidFill>
-                  <a:srgbClr val="F6F3EC">
-                    <a:alpha val="50000"/>
-                  </a:srgbClr>
-                </a:solidFill>
-                <a:latin typeface="Menlo"/>
-                <a:ea typeface="Menlo"/>
-                <a:cs typeface="Menlo"/>
-              </a:rPr>
-              <a:t># make a markdown wiki browsable</a:t>
-            </a:r>
-            <a:br>
-              <a:rPr lang="en-US" kern="100" sz="1100" b="0" dirty="0">
-                <a:solidFill>
-                  <a:srgbClr val="F6F3EC"/>
-                </a:solidFill>
-                <a:latin typeface="Menlo"/>
-                <a:ea typeface="Menlo"/>
-                <a:cs typeface="Menlo"/>
-              </a:rPr>
-            </a:br>
-            <a:r>
-              <a:rPr lang="en-US" kern="100" sz="1100" b="0" dirty="0">
-                <a:solidFill>
-                  <a:srgbClr val="F6F3EC"/>
-                </a:solidFill>
-                <a:latin typeface="Menlo"/>
-                <a:ea typeface="Menlo"/>
-                <a:cs typeface="Menlo"/>
-              </a:rPr>
-              <a:t>llm-wiki guide  ·  llm-wiki mcp          </a:t>
-            </a:r>
-            <a:r>
-              <a:rPr lang="en-US" kern="100" sz="1100" b="0" dirty="0">
-                <a:solidFill>
-                  <a:srgbClr val="F6F3EC">
-                    <a:alpha val="50000"/>
-                  </a:srgbClr>
-                </a:solidFill>
-                <a:latin typeface="Menlo"/>
-                <a:ea typeface="Menlo"/>
-                <a:cs typeface="Menlo"/>
-              </a:rPr>
-              <a:t># the manual · tools for your agent</a:t>
-            </a:r>
-            <a:endParaRPr lang="en-US" kern="100" sz="1100" b="0" dirty="0">
-              <a:solidFill>
-                <a:srgbClr val="F6F3EC">
-                  <a:alpha val="50000"/>
-                </a:srgbClr>
-              </a:solidFill>
-              <a:latin typeface="Menlo"/>
-              <a:ea typeface="Menlo"/>
-              <a:cs typeface="Menlo"/>
-            </a:endParaRPr>
-          </a:p>
-        </p:txBody>
-      </p:sp>
-      <p:pic>
-        <p:nvPicPr>
-          <p:cNvPr id="7" name="Picture 7" descr=""/>
-          <p:cNvPicPr>
-            <a:picLocks noChangeAspect="1"/>
-          </p:cNvPicPr>
-          <p:nvPr/>
-        </p:nvPicPr>
-        <p:blipFill>
-          <a:blip r:embed="rId2"/>
-          <a:srcRect/>
-          <a:stretch>
-            <a:fillRect/>
-          </a:stretch>
-        </p:blipFill>
-        <p:spPr>
-          <a:xfrm>
-            <a:off x="571500" y="5994400"/>
-            <a:ext cx="1801707" cy="355600"/>
-          </a:xfrm>
-          <a:prstGeom prst="rect">
-            <a:avLst/>
-          </a:prstGeom>
-        </p:spPr>
-      </p:pic>
-      <p:sp>
-        <p:nvSpPr>
-          <p:cNvPr id="8" name="Text 8"/>
-          <p:cNvSpPr txBox="1"/>
-          <p:nvPr/>
-        </p:nvSpPr>
-        <p:spPr>
-          <a:xfrm>
-            <a:off x="10096214" y="6041288"/>
-            <a:ext cx="1524286" cy="156312"/>
-          </a:xfrm>
-          <a:prstGeom prst="rect">
-            <a:avLst/>
-          </a:prstGeom>
-          <a:noFill/>
-        </p:spPr>
-        <p:txBody>
-          <a:bodyPr wrap="none" lIns="0" tIns="0" rIns="0" bIns="0" rtlCol="0" anchor="t" anchorCtr="0">
-            <a:noAutofit/>
-          </a:bodyPr>
-          <a:lstStyle/>
-          <a:p>
-            <a:pPr algn="r">
-              <a:lnSpc>
-                <a:spcPct val="125000"/>
-              </a:lnSpc>
-              <a:spcBef>
-                <a:spcPts val="0"/>
-              </a:spcBef>
-              <a:spcAft>
-                <a:spcPts val="0"/>
-              </a:spcAft>
-              <a:buNone/>
-            </a:pPr>
-            <a:r>
-              <a:rPr lang="en-US" kern="100" sz="800" b="0" spc="20" dirty="0">
-                <a:solidFill>
-                  <a:srgbClr val="F6F3EC">
-                    <a:alpha val="70000"/>
-                  </a:srgbClr>
-                </a:solidFill>
-                <a:latin typeface="Avenir Next"/>
-                <a:ea typeface="Avenir Next"/>
-                <a:cs typeface="Avenir Next"/>
-              </a:rPr>
-              <a:t>github.com/BikS2013/llm-wiki</a:t>
-            </a:r>
-            <a:endParaRPr lang="en-US" kern="100" sz="800" b="0" spc="20" dirty="0">
-              <a:solidFill>
-                <a:srgbClr val="F6F3EC">
-                  <a:alpha val="70000"/>
-                </a:srgbClr>
-              </a:solidFill>
-              <a:latin typeface="Avenir Next"/>
-              <a:ea typeface="Avenir Next"/>
-              <a:cs typeface="Avenir Next"/>
-            </a:endParaRPr>
-          </a:p>
-        </p:txBody>
-      </p:sp>
-      <p:sp>
-        <p:nvSpPr>
-          <p:cNvPr id="9" name="Text 9"/>
-          <p:cNvSpPr txBox="1"/>
-          <p:nvPr/>
-        </p:nvSpPr>
-        <p:spPr>
-          <a:xfrm>
-            <a:off x="9931837" y="6193688"/>
-            <a:ext cx="1688663" cy="156312"/>
-          </a:xfrm>
-          <a:prstGeom prst="rect">
-            <a:avLst/>
-          </a:prstGeom>
-          <a:noFill/>
-        </p:spPr>
-        <p:txBody>
-          <a:bodyPr wrap="none" lIns="0" tIns="0" rIns="0" bIns="0" rtlCol="0" anchor="t" anchorCtr="0">
-            <a:noAutofit/>
-          </a:bodyPr>
-          <a:lstStyle/>
-          <a:p>
-            <a:pPr algn="r">
-              <a:lnSpc>
-                <a:spcPct val="125000"/>
-              </a:lnSpc>
-              <a:spcBef>
-                <a:spcPts val="0"/>
-              </a:spcBef>
-              <a:spcAft>
-                <a:spcPts val="0"/>
-              </a:spcAft>
-              <a:buNone/>
-            </a:pPr>
-            <a:r>
-              <a:rPr lang="en-US" kern="100" sz="800" b="0" spc="20" dirty="0">
-                <a:solidFill>
-                  <a:srgbClr val="F6F3EC">
-                    <a:alpha val="70000"/>
-                  </a:srgbClr>
-                </a:solidFill>
-                <a:latin typeface="Avenir Next"/>
-                <a:ea typeface="Avenir Next"/>
-                <a:cs typeface="Avenir Next"/>
-              </a:rPr>
-              <a:t>Pattern: Karpathy, LLM Wiki, 2026</a:t>
-            </a:r>
-            <a:endParaRPr lang="en-US" kern="100" sz="800" b="0" spc="20" dirty="0">
-              <a:solidFill>
-                <a:srgbClr val="F6F3EC">
-                  <a:alpha val="70000"/>
                 </a:srgbClr>
               </a:solidFill>
               <a:latin typeface="Avenir Next"/>
@@ -31775,7 +32395,7 @@
                 <a:ea typeface="Avenir Next"/>
                 <a:cs typeface="Avenir Next"/>
               </a:rPr>
-              <a:t>Your documents, exactly as you added them. Read, never written — except the markdown conversion placed beside a PDF or DOCX.</a:t>
+              <a:t>Your documents, exactly as you added them. Read, never written — except the markdown conversion placed beside a document or image.</a:t>
             </a:r>
             <a:endParaRPr lang="en-US" kern="100" sz="950" b="0" dirty="0">
               <a:solidFill>
@@ -32775,6 +33395,639 @@
               <a:solidFill>
                 <a:srgbClr val="1B1D21">
                   <a:alpha val="38500"/>
+                </a:srgbClr>
+              </a:solidFill>
+              <a:latin typeface="Avenir Next"/>
+              <a:ea typeface="Avenir Next"/>
+              <a:cs typeface="Avenir Next"/>
+            </a:endParaRPr>
+          </a:p>
+        </p:txBody>
+      </p:sp>
+    </p:spTree>
+  </p:cSld>
+  <p:clrMapOvr>
+    <a:masterClrMapping/>
+  </p:clrMapOvr>
+</p:sld>
+</file>
+
+<file path=ppt/slides/slide30.xml><?xml version="1.0" encoding="utf-8"?>
+<p:sld xmlns:a="http://schemas.openxmlformats.org/drawingml/2006/main" xmlns:r="http://schemas.openxmlformats.org/officeDocument/2006/relationships" xmlns:p="http://schemas.openxmlformats.org/presentationml/2006/main">
+  <p:cSld>
+    <p:bg>
+      <p:bgPr>
+        <a:solidFill>
+          <a:srgbClr val="111316"/>
+        </a:solidFill>
+        <a:effectLst/>
+      </p:bgPr>
+    </p:bg>
+    <p:spTree>
+      <p:nvGrpSpPr>
+        <p:cNvPr id="1" name=""/>
+        <p:cNvGrpSpPr/>
+        <p:nvPr/>
+      </p:nvGrpSpPr>
+      <p:grpSpPr>
+        <a:xfrm>
+          <a:off x="0" y="0"/>
+          <a:ext cx="0" cy="0"/>
+          <a:chOff x="0" y="0"/>
+          <a:chExt cx="0" cy="0"/>
+        </a:xfrm>
+      </p:grpSpPr>
+      <p:sp>
+        <p:nvSpPr>
+          <p:cNvPr id="2" name="Shape 2"/>
+          <p:cNvSpPr/>
+          <p:nvPr/>
+        </p:nvSpPr>
+        <p:spPr>
+          <a:xfrm>
+            <a:off x="9779000" y="0"/>
+            <a:ext cx="2413000" cy="2413000"/>
+          </a:xfrm>
+          <a:prstGeom prst="rect">
+            <a:avLst/>
+          </a:prstGeom>
+          <a:solidFill>
+            <a:srgbClr val="C8623A"/>
+          </a:solidFill>
+          <a:ln>
+            <a:noFill/>
+          </a:ln>
+        </p:spPr>
+        <p:txBody>
+          <a:bodyPr rtlCol="0" anchor="ctr"/>
+          <a:lstStyle/>
+          <a:p>
+            <a:endParaRPr lang="en-US" dirty="0"/>
+          </a:p>
+        </p:txBody>
+      </p:sp>
+      <p:sp>
+        <p:nvSpPr>
+          <p:cNvPr id="3" name="Text 3"/>
+          <p:cNvSpPr txBox="1"/>
+          <p:nvPr/>
+        </p:nvSpPr>
+        <p:spPr>
+          <a:xfrm>
+            <a:off x="571500" y="638747"/>
+            <a:ext cx="917750" cy="116903"/>
+          </a:xfrm>
+          <a:prstGeom prst="rect">
+            <a:avLst/>
+          </a:prstGeom>
+          <a:noFill/>
+        </p:spPr>
+        <p:txBody>
+          <a:bodyPr wrap="none" lIns="0" tIns="0" rIns="0" bIns="0" rtlCol="0" anchor="t" anchorCtr="0">
+            <a:noAutofit/>
+          </a:bodyPr>
+          <a:lstStyle/>
+          <a:p>
+            <a:pPr algn="l">
+              <a:lnSpc>
+                <a:spcPct val="98958"/>
+              </a:lnSpc>
+              <a:spcBef>
+                <a:spcPts val="0"/>
+              </a:spcBef>
+              <a:spcAft>
+                <a:spcPts val="0"/>
+              </a:spcAft>
+              <a:buNone/>
+            </a:pPr>
+            <a:r>
+              <a:rPr lang="en-US" kern="100" sz="800" b="1" cap="all" spc="150" dirty="0">
+                <a:solidFill>
+                  <a:srgbClr val="C8623A"/>
+                </a:solidFill>
+                <a:latin typeface="Menlo"/>
+                <a:ea typeface="Menlo"/>
+                <a:cs typeface="Menlo"/>
+              </a:rPr>
+              <a:t>Cheat sheet</a:t>
+            </a:r>
+            <a:endParaRPr lang="en-US" kern="100" sz="800" b="1" cap="all" spc="150" dirty="0">
+              <a:solidFill>
+                <a:srgbClr val="C8623A"/>
+              </a:solidFill>
+              <a:latin typeface="Menlo"/>
+              <a:ea typeface="Menlo"/>
+              <a:cs typeface="Menlo"/>
+            </a:endParaRPr>
+          </a:p>
+        </p:txBody>
+      </p:sp>
+      <p:sp>
+        <p:nvSpPr>
+          <p:cNvPr id="4" name="Text 4"/>
+          <p:cNvSpPr txBox="1"/>
+          <p:nvPr/>
+        </p:nvSpPr>
+        <p:spPr>
+          <a:xfrm>
+            <a:off x="571500" y="995223"/>
+            <a:ext cx="4207677" cy="871677"/>
+          </a:xfrm>
+          <a:prstGeom prst="rect">
+            <a:avLst/>
+          </a:prstGeom>
+          <a:noFill/>
+        </p:spPr>
+        <p:txBody>
+          <a:bodyPr wrap="none" lIns="0" tIns="0" rIns="0" bIns="0" rtlCol="0" anchor="t" anchorCtr="0">
+            <a:noAutofit/>
+          </a:bodyPr>
+          <a:lstStyle/>
+          <a:p>
+            <a:pPr algn="l">
+              <a:lnSpc>
+                <a:spcPct val="83333"/>
+              </a:lnSpc>
+              <a:spcBef>
+                <a:spcPts val="0"/>
+              </a:spcBef>
+              <a:spcAft>
+                <a:spcPts val="0"/>
+              </a:spcAft>
+              <a:buNone/>
+            </a:pPr>
+            <a:r>
+              <a:rPr lang="en-US" kern="100" sz="3600" b="0" spc="-75" dirty="0">
+                <a:solidFill>
+                  <a:srgbClr val="F6F3EC"/>
+                </a:solidFill>
+                <a:latin typeface="Avenir Next Ultra Light"/>
+                <a:ea typeface="Avenir Next Ultra Light"/>
+                <a:cs typeface="Avenir Next Ultra Light"/>
+              </a:rPr>
+              <a:t>Your documentation,</a:t>
+            </a:r>
+            <a:br>
+              <a:rPr lang="en-US" kern="100" sz="3600" b="0" spc="-75" dirty="0">
+                <a:solidFill>
+                  <a:srgbClr val="F6F3EC"/>
+                </a:solidFill>
+                <a:latin typeface="Avenir Next Ultra Light"/>
+                <a:ea typeface="Avenir Next Ultra Light"/>
+                <a:cs typeface="Avenir Next Ultra Light"/>
+              </a:rPr>
+            </a:br>
+            <a:r>
+              <a:rPr lang="en-US" kern="100" sz="3600" b="0" i="1" spc="-75" dirty="0">
+                <a:solidFill>
+                  <a:srgbClr val="E08A5E"/>
+                </a:solidFill>
+                <a:latin typeface="Avenir Next"/>
+                <a:ea typeface="Avenir Next"/>
+                <a:cs typeface="Avenir Next"/>
+              </a:rPr>
+              <a:t>compiled.</a:t>
+            </a:r>
+            <a:endParaRPr lang="en-US" kern="100" sz="3600" b="0" i="1" spc="-75" dirty="0">
+              <a:solidFill>
+                <a:srgbClr val="E08A5E"/>
+              </a:solidFill>
+              <a:latin typeface="Avenir Next"/>
+              <a:ea typeface="Avenir Next"/>
+              <a:cs typeface="Avenir Next"/>
+            </a:endParaRPr>
+          </a:p>
+        </p:txBody>
+      </p:sp>
+      <p:sp>
+        <p:nvSpPr>
+          <p:cNvPr id="5" name="Shape 5"/>
+          <p:cNvSpPr/>
+          <p:nvPr/>
+        </p:nvSpPr>
+        <p:spPr>
+          <a:xfrm>
+            <a:off x="571500" y="2540000"/>
+            <a:ext cx="9525000" cy="2043013"/>
+          </a:xfrm>
+          <a:prstGeom prst="roundRect">
+            <a:avLst>
+              <a:gd name="adj" fmla="val 4973"/>
+            </a:avLst>
+          </a:prstGeom>
+          <a:solidFill>
+            <a:srgbClr val="1B1D21"/>
+          </a:solidFill>
+          <a:ln>
+            <a:noFill/>
+          </a:ln>
+        </p:spPr>
+        <p:txBody>
+          <a:bodyPr rtlCol="0" anchor="ctr"/>
+          <a:lstStyle/>
+          <a:p>
+            <a:endParaRPr lang="en-US" dirty="0"/>
+          </a:p>
+        </p:txBody>
+      </p:sp>
+      <p:sp>
+        <p:nvSpPr>
+          <p:cNvPr id="6" name="Text 6"/>
+          <p:cNvSpPr txBox="1"/>
+          <p:nvPr/>
+        </p:nvSpPr>
+        <p:spPr>
+          <a:xfrm>
+            <a:off x="800100" y="2716086"/>
+            <a:ext cx="8047490" cy="1675217"/>
+          </a:xfrm>
+          <a:prstGeom prst="rect">
+            <a:avLst/>
+          </a:prstGeom>
+          <a:noFill/>
+        </p:spPr>
+        <p:txBody>
+          <a:bodyPr wrap="none" lIns="0" tIns="0" rIns="0" bIns="0" rtlCol="0" anchor="t" anchorCtr="0">
+            <a:noAutofit/>
+          </a:bodyPr>
+          <a:lstStyle/>
+          <a:p>
+            <a:pPr algn="l">
+              <a:lnSpc>
+                <a:spcPct val="141667"/>
+              </a:lnSpc>
+              <a:spcBef>
+                <a:spcPts val="0"/>
+              </a:spcBef>
+              <a:spcAft>
+                <a:spcPts val="0"/>
+              </a:spcAft>
+              <a:buNone/>
+            </a:pPr>
+            <a:r>
+              <a:rPr lang="en-US" kern="100" sz="1100" b="0" dirty="0">
+                <a:solidFill>
+                  <a:srgbClr val="F6F3EC"/>
+                </a:solidFill>
+                <a:latin typeface="Menlo"/>
+                <a:ea typeface="Menlo"/>
+                <a:cs typeface="Menlo"/>
+              </a:rPr>
+              <a:t>llm-wiki init ~/notes --format markdown|html --name notes</a:t>
+            </a:r>
+            <a:br>
+              <a:rPr lang="en-US" kern="100" sz="1100" b="0" dirty="0">
+                <a:solidFill>
+                  <a:srgbClr val="F6F3EC"/>
+                </a:solidFill>
+                <a:latin typeface="Menlo"/>
+                <a:ea typeface="Menlo"/>
+                <a:cs typeface="Menlo"/>
+              </a:rPr>
+            </a:br>
+            <a:r>
+              <a:rPr lang="en-US" kern="100" sz="1100" b="0" dirty="0">
+                <a:solidFill>
+                  <a:srgbClr val="F6F3EC"/>
+                </a:solidFill>
+                <a:latin typeface="Menlo"/>
+                <a:ea typeface="Menlo"/>
+                <a:cs typeface="Menlo"/>
+              </a:rPr>
+              <a:t>llm-wiki --wiki notes ingest &lt;file&gt;     </a:t>
+            </a:r>
+            <a:r>
+              <a:rPr lang="en-US" kern="100" sz="1100" b="0" dirty="0">
+                <a:solidFill>
+                  <a:srgbClr val="F6F3EC">
+                    <a:alpha val="50000"/>
+                  </a:srgbClr>
+                </a:solidFill>
+                <a:latin typeface="Menlo"/>
+                <a:ea typeface="Menlo"/>
+                <a:cs typeface="Menlo"/>
+              </a:rPr>
+              <a:t># text, PDF, DOCX, PPTX, XLSX or an image</a:t>
+            </a:r>
+            <a:br>
+              <a:rPr lang="en-US" kern="100" sz="1100" b="0" dirty="0">
+                <a:solidFill>
+                  <a:srgbClr val="F6F3EC"/>
+                </a:solidFill>
+                <a:latin typeface="Menlo"/>
+                <a:ea typeface="Menlo"/>
+                <a:cs typeface="Menlo"/>
+              </a:rPr>
+            </a:br>
+            <a:r>
+              <a:rPr lang="en-US" kern="100" sz="1100" b="0" dirty="0">
+                <a:solidFill>
+                  <a:srgbClr val="F6F3EC"/>
+                </a:solidFill>
+                <a:latin typeface="Menlo"/>
+                <a:ea typeface="Menlo"/>
+                <a:cs typeface="Menlo"/>
+              </a:rPr>
+              <a:t>llm-wiki --wiki notes search "&lt;terms&gt;"   </a:t>
+            </a:r>
+            <a:r>
+              <a:rPr lang="en-US" kern="100" sz="1100" b="0" dirty="0">
+                <a:solidFill>
+                  <a:srgbClr val="F6F3EC">
+                    <a:alpha val="50000"/>
+                  </a:srgbClr>
+                </a:solidFill>
+                <a:latin typeface="Menlo"/>
+                <a:ea typeface="Menlo"/>
+                <a:cs typeface="Menlo"/>
+              </a:rPr>
+              <a:t># --all-wikis · --mode hybrid after `index --embed`</a:t>
+            </a:r>
+            <a:br>
+              <a:rPr lang="en-US" kern="100" sz="1100" b="0" dirty="0">
+                <a:solidFill>
+                  <a:srgbClr val="F6F3EC"/>
+                </a:solidFill>
+                <a:latin typeface="Menlo"/>
+                <a:ea typeface="Menlo"/>
+                <a:cs typeface="Menlo"/>
+              </a:rPr>
+            </a:br>
+            <a:r>
+              <a:rPr lang="en-US" kern="100" sz="1100" b="0" dirty="0">
+                <a:solidFill>
+                  <a:srgbClr val="F6F3EC"/>
+                </a:solidFill>
+                <a:latin typeface="Menlo"/>
+                <a:ea typeface="Menlo"/>
+                <a:cs typeface="Menlo"/>
+              </a:rPr>
+              <a:t>llm-wiki --wiki notes query "&lt;q&gt;" --file </a:t>
+            </a:r>
+            <a:r>
+              <a:rPr lang="en-US" kern="100" sz="1100" b="0" dirty="0">
+                <a:solidFill>
+                  <a:srgbClr val="F6F3EC">
+                    <a:alpha val="50000"/>
+                  </a:srgbClr>
+                </a:solidFill>
+                <a:latin typeface="Menlo"/>
+                <a:ea typeface="Menlo"/>
+                <a:cs typeface="Menlo"/>
+              </a:rPr>
+              <a:t># cited answer, filed · --wikis a,b to ask several</a:t>
+            </a:r>
+            <a:br>
+              <a:rPr lang="en-US" kern="100" sz="1100" b="0" dirty="0">
+                <a:solidFill>
+                  <a:srgbClr val="F6F3EC"/>
+                </a:solidFill>
+                <a:latin typeface="Menlo"/>
+                <a:ea typeface="Menlo"/>
+                <a:cs typeface="Menlo"/>
+              </a:rPr>
+            </a:br>
+            <a:r>
+              <a:rPr lang="en-US" kern="100" sz="1100" b="0" dirty="0">
+                <a:solidFill>
+                  <a:srgbClr val="F6F3EC"/>
+                </a:solidFill>
+                <a:latin typeface="Menlo"/>
+                <a:ea typeface="Menlo"/>
+                <a:cs typeface="Menlo"/>
+              </a:rPr>
+              <a:t>llm-wiki --wiki notes lint --llm         </a:t>
+            </a:r>
+            <a:r>
+              <a:rPr lang="en-US" kern="100" sz="1100" b="0" dirty="0">
+                <a:solidFill>
+                  <a:srgbClr val="F6F3EC">
+                    <a:alpha val="50000"/>
+                  </a:srgbClr>
+                </a:solidFill>
+                <a:latin typeface="Menlo"/>
+                <a:ea typeface="Menlo"/>
+                <a:cs typeface="Menlo"/>
+              </a:rPr>
+              <a:t># contradictions, gaps, next questions</a:t>
+            </a:r>
+            <a:br>
+              <a:rPr lang="en-US" kern="100" sz="1100" b="0" dirty="0">
+                <a:solidFill>
+                  <a:srgbClr val="F6F3EC"/>
+                </a:solidFill>
+                <a:latin typeface="Menlo"/>
+                <a:ea typeface="Menlo"/>
+                <a:cs typeface="Menlo"/>
+              </a:rPr>
+            </a:br>
+            <a:r>
+              <a:rPr lang="en-US" kern="100" sz="1100" b="0" dirty="0">
+                <a:solidFill>
+                  <a:srgbClr val="F6F3EC"/>
+                </a:solidFill>
+                <a:latin typeface="Menlo"/>
+                <a:ea typeface="Menlo"/>
+                <a:cs typeface="Menlo"/>
+              </a:rPr>
+              <a:t>llm-wiki --wiki notes convert --to html  </a:t>
+            </a:r>
+            <a:r>
+              <a:rPr lang="en-US" kern="100" sz="1100" b="0" dirty="0">
+                <a:solidFill>
+                  <a:srgbClr val="F6F3EC">
+                    <a:alpha val="50000"/>
+                  </a:srgbClr>
+                </a:solidFill>
+                <a:latin typeface="Menlo"/>
+                <a:ea typeface="Menlo"/>
+                <a:cs typeface="Menlo"/>
+              </a:rPr>
+              <a:t># make a markdown wiki browsable</a:t>
+            </a:r>
+            <a:br>
+              <a:rPr lang="en-US" kern="100" sz="1100" b="0" dirty="0">
+                <a:solidFill>
+                  <a:srgbClr val="F6F3EC"/>
+                </a:solidFill>
+                <a:latin typeface="Menlo"/>
+                <a:ea typeface="Menlo"/>
+                <a:cs typeface="Menlo"/>
+              </a:rPr>
+            </a:br>
+            <a:r>
+              <a:rPr lang="en-US" kern="100" sz="1100" b="0" dirty="0">
+                <a:solidFill>
+                  <a:srgbClr val="F6F3EC"/>
+                </a:solidFill>
+                <a:latin typeface="Menlo"/>
+                <a:ea typeface="Menlo"/>
+                <a:cs typeface="Menlo"/>
+              </a:rPr>
+              <a:t>llm-wiki guide  ·  llm-wiki mcp          </a:t>
+            </a:r>
+            <a:r>
+              <a:rPr lang="en-US" kern="100" sz="1100" b="0" dirty="0">
+                <a:solidFill>
+                  <a:srgbClr val="F6F3EC">
+                    <a:alpha val="50000"/>
+                  </a:srgbClr>
+                </a:solidFill>
+                <a:latin typeface="Menlo"/>
+                <a:ea typeface="Menlo"/>
+                <a:cs typeface="Menlo"/>
+              </a:rPr>
+              <a:t># the manual · tools for your agent</a:t>
+            </a:r>
+            <a:endParaRPr lang="en-US" kern="100" sz="1100" b="0" dirty="0">
+              <a:solidFill>
+                <a:srgbClr val="F6F3EC">
+                  <a:alpha val="50000"/>
+                </a:srgbClr>
+              </a:solidFill>
+              <a:latin typeface="Menlo"/>
+              <a:ea typeface="Menlo"/>
+              <a:cs typeface="Menlo"/>
+            </a:endParaRPr>
+          </a:p>
+        </p:txBody>
+      </p:sp>
+      <p:pic>
+        <p:nvPicPr>
+          <p:cNvPr id="7" name="Picture 7" descr=""/>
+          <p:cNvPicPr>
+            <a:picLocks noChangeAspect="1"/>
+          </p:cNvPicPr>
+          <p:nvPr/>
+        </p:nvPicPr>
+        <p:blipFill>
+          <a:blip r:embed="rId2"/>
+          <a:srcRect/>
+          <a:stretch>
+            <a:fillRect/>
+          </a:stretch>
+        </p:blipFill>
+        <p:spPr>
+          <a:xfrm>
+            <a:off x="571500" y="5994400"/>
+            <a:ext cx="1801707" cy="355600"/>
+          </a:xfrm>
+          <a:prstGeom prst="rect">
+            <a:avLst/>
+          </a:prstGeom>
+        </p:spPr>
+      </p:pic>
+      <p:sp>
+        <p:nvSpPr>
+          <p:cNvPr id="8" name="Text 8"/>
+          <p:cNvSpPr txBox="1"/>
+          <p:nvPr/>
+        </p:nvSpPr>
+        <p:spPr>
+          <a:xfrm>
+            <a:off x="10096214" y="6041288"/>
+            <a:ext cx="1524286" cy="156312"/>
+          </a:xfrm>
+          <a:prstGeom prst="rect">
+            <a:avLst/>
+          </a:prstGeom>
+          <a:noFill/>
+        </p:spPr>
+        <p:txBody>
+          <a:bodyPr wrap="none" lIns="0" tIns="0" rIns="0" bIns="0" rtlCol="0" anchor="t" anchorCtr="0">
+            <a:noAutofit/>
+          </a:bodyPr>
+          <a:lstStyle/>
+          <a:p>
+            <a:pPr algn="r">
+              <a:lnSpc>
+                <a:spcPct val="125000"/>
+              </a:lnSpc>
+              <a:spcBef>
+                <a:spcPts val="0"/>
+              </a:spcBef>
+              <a:spcAft>
+                <a:spcPts val="0"/>
+              </a:spcAft>
+              <a:buNone/>
+            </a:pPr>
+            <a:r>
+              <a:rPr lang="en-US" kern="100" sz="800" b="0" spc="20" dirty="0">
+                <a:solidFill>
+                  <a:srgbClr val="F6F3EC">
+                    <a:alpha val="70000"/>
+                  </a:srgbClr>
+                </a:solidFill>
+                <a:latin typeface="Avenir Next"/>
+                <a:ea typeface="Avenir Next"/>
+                <a:cs typeface="Avenir Next"/>
+              </a:rPr>
+              <a:t>github.com/BikS2013/llm-wiki</a:t>
+            </a:r>
+            <a:endParaRPr lang="en-US" kern="100" sz="800" b="0" spc="20" dirty="0">
+              <a:solidFill>
+                <a:srgbClr val="F6F3EC">
+                  <a:alpha val="70000"/>
+                </a:srgbClr>
+              </a:solidFill>
+              <a:latin typeface="Avenir Next"/>
+              <a:ea typeface="Avenir Next"/>
+              <a:cs typeface="Avenir Next"/>
+            </a:endParaRPr>
+          </a:p>
+        </p:txBody>
+      </p:sp>
+      <p:sp>
+        <p:nvSpPr>
+          <p:cNvPr id="9" name="Text 9"/>
+          <p:cNvSpPr txBox="1"/>
+          <p:nvPr/>
+        </p:nvSpPr>
+        <p:spPr>
+          <a:xfrm>
+            <a:off x="9931837" y="6193688"/>
+            <a:ext cx="1688663" cy="156312"/>
+          </a:xfrm>
+          <a:prstGeom prst="rect">
+            <a:avLst/>
+          </a:prstGeom>
+          <a:noFill/>
+        </p:spPr>
+        <p:txBody>
+          <a:bodyPr wrap="none" lIns="0" tIns="0" rIns="0" bIns="0" rtlCol="0" anchor="t" anchorCtr="0">
+            <a:noAutofit/>
+          </a:bodyPr>
+          <a:lstStyle/>
+          <a:p>
+            <a:pPr algn="r">
+              <a:lnSpc>
+                <a:spcPct val="125000"/>
+              </a:lnSpc>
+              <a:spcBef>
+                <a:spcPts val="0"/>
+              </a:spcBef>
+              <a:spcAft>
+                <a:spcPts val="0"/>
+              </a:spcAft>
+              <a:buNone/>
+            </a:pPr>
+            <a:r>
+              <a:rPr lang="en-US" kern="100" sz="800" b="0" spc="20" dirty="0">
+                <a:solidFill>
+                  <a:srgbClr val="F6F3EC">
+                    <a:alpha val="70000"/>
+                  </a:srgbClr>
+                </a:solidFill>
+                <a:latin typeface="Avenir Next"/>
+                <a:ea typeface="Avenir Next"/>
+                <a:cs typeface="Avenir Next"/>
+              </a:rPr>
+              <a:t>Pattern: Karpathy, LLM Wiki, 2026</a:t>
+            </a:r>
+            <a:endParaRPr lang="en-US" kern="100" sz="800" b="0" spc="20" dirty="0">
+              <a:solidFill>
+                <a:srgbClr val="F6F3EC">
+                  <a:alpha val="70000"/>
                 </a:srgbClr>
               </a:solidFill>
               <a:latin typeface="Avenir Next"/>

--- a/docs/presentations/llm-wiki-user-guide.pptx
+++ b/docs/presentations/llm-wiki-user-guide.pptx
@@ -15427,7 +15427,7 @@
         <p:spPr>
           <a:xfrm>
             <a:off x="571500" y="6032768"/>
-            <a:ext cx="4295180" cy="124866"/>
+            <a:ext cx="4519819" cy="124866"/>
           </a:xfrm>
           <a:prstGeom prst="rect">
             <a:avLst/>
@@ -15463,7 +15463,7 @@
                 <a:ea typeface="Avenir Next"/>
                 <a:cs typeface="Avenir Next"/>
               </a:rPr>
-              <a:t>Pattern: Andrej Karpathy, "LLM Wiki" (gist, April 2026). Implementation: github.com/BikS2013/llm-wiki.</a:t>
+              <a:t>Pattern: Andrej Karpathy, "LLM Wiki" (gist, April 2026). Implementation: github.com/biks2013-tools/llm-wiki.</a:t>
             </a:r>
             <a:endParaRPr lang="en-US" kern="100" sz="700" b="0" dirty="0">
               <a:solidFill>
@@ -33925,8 +33925,8 @@
         </p:nvSpPr>
         <p:spPr>
           <a:xfrm>
-            <a:off x="10096214" y="6041288"/>
-            <a:ext cx="1524286" cy="156312"/>
+            <a:off x="9823593" y="6041288"/>
+            <a:ext cx="1796907" cy="156312"/>
           </a:xfrm>
           <a:prstGeom prst="rect">
             <a:avLst/>
@@ -33962,7 +33962,7 @@
                 <a:ea typeface="Avenir Next"/>
                 <a:cs typeface="Avenir Next"/>
               </a:rPr>
-              <a:t>github.com/BikS2013/llm-wiki</a:t>
+              <a:t>github.com/biks2013-tools/llm-wiki</a:t>
             </a:r>
             <a:endParaRPr lang="en-US" kern="100" sz="800" b="0" spc="20" dirty="0">
               <a:solidFill>
@@ -34716,7 +34716,7 @@
                 <a:ea typeface="Menlo"/>
                 <a:cs typeface="Menlo"/>
               </a:rPr>
-              <a:t>git clone git@github.com:BikS2013/llm-wiki.git</a:t>
+              <a:t>git clone git@github.com:biks2013-tools/llm-wiki.git</a:t>
             </a:r>
             <a:br>
               <a:rPr lang="en-US" kern="100" sz="1050" b="0" dirty="0">
